--- a/Presentation_Neuropulse.pptx
+++ b/Presentation_Neuropulse.pptx
@@ -5,22 +5,24 @@
     <p:sldMasterId id="2147483648" r:id="rId1"/>
   </p:sldMasterIdLst>
   <p:notesMasterIdLst>
-    <p:notesMasterId r:id="rId15"/>
+    <p:notesMasterId r:id="rId17"/>
   </p:notesMasterIdLst>
   <p:sldIdLst>
     <p:sldId id="256" r:id="rId2"/>
     <p:sldId id="257" r:id="rId3"/>
     <p:sldId id="270" r:id="rId4"/>
-    <p:sldId id="258" r:id="rId5"/>
-    <p:sldId id="259" r:id="rId6"/>
-    <p:sldId id="260" r:id="rId7"/>
-    <p:sldId id="261" r:id="rId8"/>
-    <p:sldId id="262" r:id="rId9"/>
-    <p:sldId id="263" r:id="rId10"/>
-    <p:sldId id="269" r:id="rId11"/>
-    <p:sldId id="266" r:id="rId12"/>
-    <p:sldId id="267" r:id="rId13"/>
-    <p:sldId id="268" r:id="rId14"/>
+    <p:sldId id="271" r:id="rId5"/>
+    <p:sldId id="258" r:id="rId6"/>
+    <p:sldId id="259" r:id="rId7"/>
+    <p:sldId id="260" r:id="rId8"/>
+    <p:sldId id="261" r:id="rId9"/>
+    <p:sldId id="262" r:id="rId10"/>
+    <p:sldId id="263" r:id="rId11"/>
+    <p:sldId id="269" r:id="rId12"/>
+    <p:sldId id="272" r:id="rId13"/>
+    <p:sldId id="266" r:id="rId14"/>
+    <p:sldId id="267" r:id="rId15"/>
+    <p:sldId id="268" r:id="rId16"/>
   </p:sldIdLst>
   <p:sldSz cx="9144000" cy="5143500" type="screen16x9"/>
   <p:notesSz cx="5143500" cy="9144000"/>
@@ -128,6 +130,7 @@
 <p1510:revInfo xmlns:a="http://schemas.openxmlformats.org/drawingml/2006/main" xmlns:r="http://schemas.openxmlformats.org/officeDocument/2006/relationships" xmlns:p1510="http://schemas.microsoft.com/office/powerpoint/2015/10/main">
   <p1510:revLst>
     <p1510:client id="{DC8D99FE-356C-4716-8733-0651BA1AB075}" v="3" dt="2026-06-30T20:28:40.899"/>
+    <p1510:client id="{E2F6B850-39E2-41BC-8855-EDEEF74CB478}" v="2" dt="2026-07-01T08:53:22.079"/>
   </p1510:revLst>
 </p1510:revInfo>
 </file>
@@ -137,18 +140,18 @@
   <pc:docChgLst>
     <pc:chgData name="Antoine VIVIEN" userId="360f1131c864c888" providerId="LiveId" clId="{BCF8220F-FA57-4D90-A194-5A123AAEFF6E}"/>
     <pc:docChg chg="undo redo custSel addSld delSld modSld sldOrd">
-      <pc:chgData name="Antoine VIVIEN" userId="360f1131c864c888" providerId="LiveId" clId="{BCF8220F-FA57-4D90-A194-5A123AAEFF6E}" dt="2026-06-30T20:37:56.660" v="705" actId="1076"/>
+      <pc:chgData name="Antoine VIVIEN" userId="360f1131c864c888" providerId="LiveId" clId="{BCF8220F-FA57-4D90-A194-5A123AAEFF6E}" dt="2026-07-01T08:59:09.408" v="1494" actId="20577"/>
       <pc:docMkLst>
         <pc:docMk/>
       </pc:docMkLst>
       <pc:sldChg chg="modSp mod">
-        <pc:chgData name="Antoine VIVIEN" userId="360f1131c864c888" providerId="LiveId" clId="{BCF8220F-FA57-4D90-A194-5A123AAEFF6E}" dt="2026-06-30T20:13:33.254" v="12" actId="20577"/>
+        <pc:chgData name="Antoine VIVIEN" userId="360f1131c864c888" providerId="LiveId" clId="{BCF8220F-FA57-4D90-A194-5A123AAEFF6E}" dt="2026-07-01T08:30:54.642" v="719" actId="403"/>
         <pc:sldMkLst>
           <pc:docMk/>
           <pc:sldMk cId="0" sldId="259"/>
         </pc:sldMkLst>
         <pc:spChg chg="mod">
-          <ac:chgData name="Antoine VIVIEN" userId="360f1131c864c888" providerId="LiveId" clId="{BCF8220F-FA57-4D90-A194-5A123AAEFF6E}" dt="2026-06-30T20:12:57.903" v="3" actId="20577"/>
+          <ac:chgData name="Antoine VIVIEN" userId="360f1131c864c888" providerId="LiveId" clId="{BCF8220F-FA57-4D90-A194-5A123AAEFF6E}" dt="2026-07-01T08:30:43.049" v="715" actId="20577"/>
           <ac:spMkLst>
             <pc:docMk/>
             <pc:sldMk cId="0" sldId="259"/>
@@ -156,7 +159,7 @@
           </ac:spMkLst>
         </pc:spChg>
         <pc:spChg chg="mod">
-          <ac:chgData name="Antoine VIVIEN" userId="360f1131c864c888" providerId="LiveId" clId="{BCF8220F-FA57-4D90-A194-5A123AAEFF6E}" dt="2026-06-30T20:13:26.874" v="10" actId="20577"/>
+          <ac:chgData name="Antoine VIVIEN" userId="360f1131c864c888" providerId="LiveId" clId="{BCF8220F-FA57-4D90-A194-5A123AAEFF6E}" dt="2026-07-01T08:30:49.213" v="717" actId="403"/>
           <ac:spMkLst>
             <pc:docMk/>
             <pc:sldMk cId="0" sldId="259"/>
@@ -164,7 +167,7 @@
           </ac:spMkLst>
         </pc:spChg>
         <pc:spChg chg="mod">
-          <ac:chgData name="Antoine VIVIEN" userId="360f1131c864c888" providerId="LiveId" clId="{BCF8220F-FA57-4D90-A194-5A123AAEFF6E}" dt="2026-06-30T20:13:33.254" v="12" actId="20577"/>
+          <ac:chgData name="Antoine VIVIEN" userId="360f1131c864c888" providerId="LiveId" clId="{BCF8220F-FA57-4D90-A194-5A123AAEFF6E}" dt="2026-07-01T08:30:54.642" v="719" actId="403"/>
           <ac:spMkLst>
             <pc:docMk/>
             <pc:sldMk cId="0" sldId="259"/>
@@ -721,6 +724,300 @@
           <pc:sldMk cId="1916461942" sldId="270"/>
         </pc:sldMkLst>
       </pc:sldChg>
+      <pc:sldChg chg="addSp delSp modSp add mod">
+        <pc:chgData name="Antoine VIVIEN" userId="360f1131c864c888" providerId="LiveId" clId="{BCF8220F-FA57-4D90-A194-5A123AAEFF6E}" dt="2026-07-01T08:41:44.569" v="864" actId="1076"/>
+        <pc:sldMkLst>
+          <pc:docMk/>
+          <pc:sldMk cId="357443429" sldId="271"/>
+        </pc:sldMkLst>
+        <pc:spChg chg="mod">
+          <ac:chgData name="Antoine VIVIEN" userId="360f1131c864c888" providerId="LiveId" clId="{BCF8220F-FA57-4D90-A194-5A123AAEFF6E}" dt="2026-07-01T08:36:24.839" v="745" actId="20577"/>
+          <ac:spMkLst>
+            <pc:docMk/>
+            <pc:sldMk cId="357443429" sldId="271"/>
+            <ac:spMk id="3" creationId="{B8D15FE1-2A94-9BC2-6E42-77A4DFD47284}"/>
+          </ac:spMkLst>
+        </pc:spChg>
+        <pc:spChg chg="mod">
+          <ac:chgData name="Antoine VIVIEN" userId="360f1131c864c888" providerId="LiveId" clId="{BCF8220F-FA57-4D90-A194-5A123AAEFF6E}" dt="2026-07-01T08:38:08.363" v="842" actId="20577"/>
+          <ac:spMkLst>
+            <pc:docMk/>
+            <pc:sldMk cId="357443429" sldId="271"/>
+            <ac:spMk id="5" creationId="{7E645C60-13D5-4628-13A8-16178E62C223}"/>
+          </ac:spMkLst>
+        </pc:spChg>
+        <pc:spChg chg="mod">
+          <ac:chgData name="Antoine VIVIEN" userId="360f1131c864c888" providerId="LiveId" clId="{BCF8220F-FA57-4D90-A194-5A123AAEFF6E}" dt="2026-07-01T08:41:34.061" v="863" actId="1076"/>
+          <ac:spMkLst>
+            <pc:docMk/>
+            <pc:sldMk cId="357443429" sldId="271"/>
+            <ac:spMk id="12" creationId="{F9E1830A-6F4F-FD92-947F-51FE5358B8FA}"/>
+          </ac:spMkLst>
+        </pc:spChg>
+        <pc:spChg chg="mod">
+          <ac:chgData name="Antoine VIVIEN" userId="360f1131c864c888" providerId="LiveId" clId="{BCF8220F-FA57-4D90-A194-5A123AAEFF6E}" dt="2026-07-01T08:41:34.061" v="863" actId="1076"/>
+          <ac:spMkLst>
+            <pc:docMk/>
+            <pc:sldMk cId="357443429" sldId="271"/>
+            <ac:spMk id="13" creationId="{FE8FECBB-0FAC-C045-42E8-7B8CB56965CD}"/>
+          </ac:spMkLst>
+        </pc:spChg>
+        <pc:spChg chg="mod">
+          <ac:chgData name="Antoine VIVIEN" userId="360f1131c864c888" providerId="LiveId" clId="{BCF8220F-FA57-4D90-A194-5A123AAEFF6E}" dt="2026-07-01T08:41:34.061" v="863" actId="1076"/>
+          <ac:spMkLst>
+            <pc:docMk/>
+            <pc:sldMk cId="357443429" sldId="271"/>
+            <ac:spMk id="14" creationId="{ED9E89D9-8695-29ED-0427-8F606FC213BB}"/>
+          </ac:spMkLst>
+        </pc:spChg>
+        <pc:spChg chg="mod">
+          <ac:chgData name="Antoine VIVIEN" userId="360f1131c864c888" providerId="LiveId" clId="{BCF8220F-FA57-4D90-A194-5A123AAEFF6E}" dt="2026-07-01T08:41:44.569" v="864" actId="1076"/>
+          <ac:spMkLst>
+            <pc:docMk/>
+            <pc:sldMk cId="357443429" sldId="271"/>
+            <ac:spMk id="15" creationId="{8646E41E-E13C-4EBF-E744-CD334CBF9FF5}"/>
+          </ac:spMkLst>
+        </pc:spChg>
+        <pc:spChg chg="mod">
+          <ac:chgData name="Antoine VIVIEN" userId="360f1131c864c888" providerId="LiveId" clId="{BCF8220F-FA57-4D90-A194-5A123AAEFF6E}" dt="2026-07-01T08:41:44.569" v="864" actId="1076"/>
+          <ac:spMkLst>
+            <pc:docMk/>
+            <pc:sldMk cId="357443429" sldId="271"/>
+            <ac:spMk id="16" creationId="{D68654CB-E32F-780C-32F5-138C1D34CA6B}"/>
+          </ac:spMkLst>
+        </pc:spChg>
+        <pc:spChg chg="mod">
+          <ac:chgData name="Antoine VIVIEN" userId="360f1131c864c888" providerId="LiveId" clId="{BCF8220F-FA57-4D90-A194-5A123AAEFF6E}" dt="2026-07-01T08:41:44.569" v="864" actId="1076"/>
+          <ac:spMkLst>
+            <pc:docMk/>
+            <pc:sldMk cId="357443429" sldId="271"/>
+            <ac:spMk id="17" creationId="{784D1CE8-1871-5AE0-90E2-AC05456043F3}"/>
+          </ac:spMkLst>
+        </pc:spChg>
+        <pc:spChg chg="del">
+          <ac:chgData name="Antoine VIVIEN" userId="360f1131c864c888" providerId="LiveId" clId="{BCF8220F-FA57-4D90-A194-5A123AAEFF6E}" dt="2026-07-01T08:40:42.965" v="849" actId="478"/>
+          <ac:spMkLst>
+            <pc:docMk/>
+            <pc:sldMk cId="357443429" sldId="271"/>
+            <ac:spMk id="18" creationId="{21A4CBE0-E1C3-8868-D115-98DFDD5DEE4F}"/>
+          </ac:spMkLst>
+        </pc:spChg>
+        <pc:spChg chg="del mod">
+          <ac:chgData name="Antoine VIVIEN" userId="360f1131c864c888" providerId="LiveId" clId="{BCF8220F-FA57-4D90-A194-5A123AAEFF6E}" dt="2026-07-01T08:40:45.317" v="851" actId="478"/>
+          <ac:spMkLst>
+            <pc:docMk/>
+            <pc:sldMk cId="357443429" sldId="271"/>
+            <ac:spMk id="19" creationId="{0A74C200-2D41-22B2-9DA5-C0D31F335069}"/>
+          </ac:spMkLst>
+        </pc:spChg>
+        <pc:spChg chg="del">
+          <ac:chgData name="Antoine VIVIEN" userId="360f1131c864c888" providerId="LiveId" clId="{BCF8220F-FA57-4D90-A194-5A123AAEFF6E}" dt="2026-07-01T08:40:46.445" v="852" actId="478"/>
+          <ac:spMkLst>
+            <pc:docMk/>
+            <pc:sldMk cId="357443429" sldId="271"/>
+            <ac:spMk id="20" creationId="{2170CDE4-2DDE-8FD3-EF87-E9F23E916706}"/>
+          </ac:spMkLst>
+        </pc:spChg>
+        <pc:spChg chg="del">
+          <ac:chgData name="Antoine VIVIEN" userId="360f1131c864c888" providerId="LiveId" clId="{BCF8220F-FA57-4D90-A194-5A123AAEFF6E}" dt="2026-07-01T08:40:47.831" v="853" actId="478"/>
+          <ac:spMkLst>
+            <pc:docMk/>
+            <pc:sldMk cId="357443429" sldId="271"/>
+            <ac:spMk id="21" creationId="{F2A66F54-3957-8A72-9377-5FA6B430902E}"/>
+          </ac:spMkLst>
+        </pc:spChg>
+        <pc:spChg chg="del">
+          <ac:chgData name="Antoine VIVIEN" userId="360f1131c864c888" providerId="LiveId" clId="{BCF8220F-FA57-4D90-A194-5A123AAEFF6E}" dt="2026-07-01T08:40:49.183" v="854" actId="478"/>
+          <ac:spMkLst>
+            <pc:docMk/>
+            <pc:sldMk cId="357443429" sldId="271"/>
+            <ac:spMk id="22" creationId="{1E30D17F-A45F-F545-6A8C-92E33F29349F}"/>
+          </ac:spMkLst>
+        </pc:spChg>
+        <pc:spChg chg="del">
+          <ac:chgData name="Antoine VIVIEN" userId="360f1131c864c888" providerId="LiveId" clId="{BCF8220F-FA57-4D90-A194-5A123AAEFF6E}" dt="2026-07-01T08:40:50.709" v="855" actId="478"/>
+          <ac:spMkLst>
+            <pc:docMk/>
+            <pc:sldMk cId="357443429" sldId="271"/>
+            <ac:spMk id="23" creationId="{DDAD2AA0-CEA0-EF82-E17E-6B2C420EBAA0}"/>
+          </ac:spMkLst>
+        </pc:spChg>
+        <pc:picChg chg="add mod">
+          <ac:chgData name="Antoine VIVIEN" userId="360f1131c864c888" providerId="LiveId" clId="{BCF8220F-FA57-4D90-A194-5A123AAEFF6E}" dt="2026-07-01T08:39:06.773" v="845" actId="1076"/>
+          <ac:picMkLst>
+            <pc:docMk/>
+            <pc:sldMk cId="357443429" sldId="271"/>
+            <ac:picMk id="7" creationId="{E7896789-EBEF-3CF0-1B96-4355C7F0D2F1}"/>
+          </ac:picMkLst>
+        </pc:picChg>
+        <pc:picChg chg="add mod">
+          <ac:chgData name="Antoine VIVIEN" userId="360f1131c864c888" providerId="LiveId" clId="{BCF8220F-FA57-4D90-A194-5A123AAEFF6E}" dt="2026-07-01T08:40:33.862" v="848" actId="1076"/>
+          <ac:picMkLst>
+            <pc:docMk/>
+            <pc:sldMk cId="357443429" sldId="271"/>
+            <ac:picMk id="9" creationId="{680E2317-4DCD-6693-908E-606FAF7BCFE6}"/>
+          </ac:picMkLst>
+        </pc:picChg>
+        <pc:picChg chg="del">
+          <ac:chgData name="Antoine VIVIEN" userId="360f1131c864c888" providerId="LiveId" clId="{BCF8220F-FA57-4D90-A194-5A123AAEFF6E}" dt="2026-07-01T08:36:29.317" v="746" actId="478"/>
+          <ac:picMkLst>
+            <pc:docMk/>
+            <pc:sldMk cId="357443429" sldId="271"/>
+            <ac:picMk id="27" creationId="{8A8B6C51-95E0-9908-7B1B-18F630A19BAE}"/>
+          </ac:picMkLst>
+        </pc:picChg>
+      </pc:sldChg>
+      <pc:sldChg chg="addSp delSp modSp add mod ord">
+        <pc:chgData name="Antoine VIVIEN" userId="360f1131c864c888" providerId="LiveId" clId="{BCF8220F-FA57-4D90-A194-5A123AAEFF6E}" dt="2026-07-01T08:59:09.408" v="1494" actId="20577"/>
+        <pc:sldMkLst>
+          <pc:docMk/>
+          <pc:sldMk cId="3181075057" sldId="272"/>
+        </pc:sldMkLst>
+        <pc:spChg chg="mod">
+          <ac:chgData name="Antoine VIVIEN" userId="360f1131c864c888" providerId="LiveId" clId="{BCF8220F-FA57-4D90-A194-5A123AAEFF6E}" dt="2026-07-01T08:47:16.246" v="898" actId="20577"/>
+          <ac:spMkLst>
+            <pc:docMk/>
+            <pc:sldMk cId="3181075057" sldId="272"/>
+            <ac:spMk id="3" creationId="{63EBB1A5-98D5-6F68-B42B-B0F1E0AC995B}"/>
+          </ac:spMkLst>
+        </pc:spChg>
+        <pc:spChg chg="mod">
+          <ac:chgData name="Antoine VIVIEN" userId="360f1131c864c888" providerId="LiveId" clId="{BCF8220F-FA57-4D90-A194-5A123AAEFF6E}" dt="2026-07-01T08:48:07.270" v="928" actId="20577"/>
+          <ac:spMkLst>
+            <pc:docMk/>
+            <pc:sldMk cId="3181075057" sldId="272"/>
+            <ac:spMk id="6" creationId="{15034B4A-5358-370C-F962-49FF9950F2F6}"/>
+          </ac:spMkLst>
+        </pc:spChg>
+        <pc:spChg chg="del mod">
+          <ac:chgData name="Antoine VIVIEN" userId="360f1131c864c888" providerId="LiveId" clId="{BCF8220F-FA57-4D90-A194-5A123AAEFF6E}" dt="2026-07-01T08:47:42.157" v="919" actId="478"/>
+          <ac:spMkLst>
+            <pc:docMk/>
+            <pc:sldMk cId="3181075057" sldId="272"/>
+            <ac:spMk id="7" creationId="{11227BDA-4522-BA9A-58C1-44D1A726CB74}"/>
+          </ac:spMkLst>
+        </pc:spChg>
+        <pc:spChg chg="add del mod">
+          <ac:chgData name="Antoine VIVIEN" userId="360f1131c864c888" providerId="LiveId" clId="{BCF8220F-FA57-4D90-A194-5A123AAEFF6E}" dt="2026-07-01T08:48:34.557" v="947" actId="20577"/>
+          <ac:spMkLst>
+            <pc:docMk/>
+            <pc:sldMk cId="3181075057" sldId="272"/>
+            <ac:spMk id="10" creationId="{ABAE440C-E767-E819-38C7-BC6835C1AA82}"/>
+          </ac:spMkLst>
+        </pc:spChg>
+        <pc:spChg chg="mod">
+          <ac:chgData name="Antoine VIVIEN" userId="360f1131c864c888" providerId="LiveId" clId="{BCF8220F-FA57-4D90-A194-5A123AAEFF6E}" dt="2026-07-01T08:52:04.668" v="1059" actId="20577"/>
+          <ac:spMkLst>
+            <pc:docMk/>
+            <pc:sldMk cId="3181075057" sldId="272"/>
+            <ac:spMk id="11" creationId="{97F826DE-7D42-CC59-D072-BF1CB2C93C32}"/>
+          </ac:spMkLst>
+        </pc:spChg>
+        <pc:spChg chg="mod">
+          <ac:chgData name="Antoine VIVIEN" userId="360f1131c864c888" providerId="LiveId" clId="{BCF8220F-FA57-4D90-A194-5A123AAEFF6E}" dt="2026-07-01T08:53:03.939" v="1087" actId="20577"/>
+          <ac:spMkLst>
+            <pc:docMk/>
+            <pc:sldMk cId="3181075057" sldId="272"/>
+            <ac:spMk id="14" creationId="{6EAB5E7D-AA71-E667-7176-BDBDAD211E9B}"/>
+          </ac:spMkLst>
+        </pc:spChg>
+        <pc:spChg chg="mod">
+          <ac:chgData name="Antoine VIVIEN" userId="360f1131c864c888" providerId="LiveId" clId="{BCF8220F-FA57-4D90-A194-5A123AAEFF6E}" dt="2026-07-01T08:53:33.345" v="1166" actId="20577"/>
+          <ac:spMkLst>
+            <pc:docMk/>
+            <pc:sldMk cId="3181075057" sldId="272"/>
+            <ac:spMk id="15" creationId="{15681305-D8B0-E730-3FC5-3E2C94A5FE9F}"/>
+          </ac:spMkLst>
+        </pc:spChg>
+        <pc:spChg chg="mod">
+          <ac:chgData name="Antoine VIVIEN" userId="360f1131c864c888" providerId="LiveId" clId="{BCF8220F-FA57-4D90-A194-5A123AAEFF6E}" dt="2026-07-01T08:54:14.601" v="1262" actId="1076"/>
+          <ac:spMkLst>
+            <pc:docMk/>
+            <pc:sldMk cId="3181075057" sldId="272"/>
+            <ac:spMk id="18" creationId="{9130C0BF-B103-6A3F-F0E5-74D0ACF6E5FD}"/>
+          </ac:spMkLst>
+        </pc:spChg>
+        <pc:spChg chg="del">
+          <ac:chgData name="Antoine VIVIEN" userId="360f1131c864c888" providerId="LiveId" clId="{BCF8220F-FA57-4D90-A194-5A123AAEFF6E}" dt="2026-07-01T08:54:11.591" v="1261" actId="478"/>
+          <ac:spMkLst>
+            <pc:docMk/>
+            <pc:sldMk cId="3181075057" sldId="272"/>
+            <ac:spMk id="19" creationId="{6AA0DEFE-8B1F-FAFB-364D-105D49F56936}"/>
+          </ac:spMkLst>
+        </pc:spChg>
+        <pc:spChg chg="mod">
+          <ac:chgData name="Antoine VIVIEN" userId="360f1131c864c888" providerId="LiveId" clId="{BCF8220F-FA57-4D90-A194-5A123AAEFF6E}" dt="2026-07-01T08:55:07.308" v="1287" actId="20577"/>
+          <ac:spMkLst>
+            <pc:docMk/>
+            <pc:sldMk cId="3181075057" sldId="272"/>
+            <ac:spMk id="22" creationId="{0724B748-6F0B-8D11-BAAF-FC692B61AE4B}"/>
+          </ac:spMkLst>
+        </pc:spChg>
+        <pc:spChg chg="mod">
+          <ac:chgData name="Antoine VIVIEN" userId="360f1131c864c888" providerId="LiveId" clId="{BCF8220F-FA57-4D90-A194-5A123AAEFF6E}" dt="2026-07-01T08:55:17.933" v="1321" actId="313"/>
+          <ac:spMkLst>
+            <pc:docMk/>
+            <pc:sldMk cId="3181075057" sldId="272"/>
+            <ac:spMk id="23" creationId="{3D92F569-6611-8D40-2B54-DABDF1E41967}"/>
+          </ac:spMkLst>
+        </pc:spChg>
+        <pc:spChg chg="mod">
+          <ac:chgData name="Antoine VIVIEN" userId="360f1131c864c888" providerId="LiveId" clId="{BCF8220F-FA57-4D90-A194-5A123AAEFF6E}" dt="2026-07-01T08:55:34.511" v="1352" actId="20577"/>
+          <ac:spMkLst>
+            <pc:docMk/>
+            <pc:sldMk cId="3181075057" sldId="272"/>
+            <ac:spMk id="26" creationId="{8B2091C9-A13D-E3C6-2CCB-88EB7B96C7F8}"/>
+          </ac:spMkLst>
+        </pc:spChg>
+        <pc:spChg chg="mod">
+          <ac:chgData name="Antoine VIVIEN" userId="360f1131c864c888" providerId="LiveId" clId="{BCF8220F-FA57-4D90-A194-5A123AAEFF6E}" dt="2026-07-01T08:56:44.515" v="1441" actId="20577"/>
+          <ac:spMkLst>
+            <pc:docMk/>
+            <pc:sldMk cId="3181075057" sldId="272"/>
+            <ac:spMk id="27" creationId="{A4B82182-32EF-8359-0120-118B37C4E983}"/>
+          </ac:spMkLst>
+        </pc:spChg>
+        <pc:spChg chg="mod">
+          <ac:chgData name="Antoine VIVIEN" userId="360f1131c864c888" providerId="LiveId" clId="{BCF8220F-FA57-4D90-A194-5A123AAEFF6E}" dt="2026-07-01T08:58:22.993" v="1476" actId="1076"/>
+          <ac:spMkLst>
+            <pc:docMk/>
+            <pc:sldMk cId="3181075057" sldId="272"/>
+            <ac:spMk id="28" creationId="{C064BE48-007B-847A-AA68-496D7EAFBD69}"/>
+          </ac:spMkLst>
+        </pc:spChg>
+        <pc:spChg chg="mod">
+          <ac:chgData name="Antoine VIVIEN" userId="360f1131c864c888" providerId="LiveId" clId="{BCF8220F-FA57-4D90-A194-5A123AAEFF6E}" dt="2026-07-01T08:58:27.452" v="1477" actId="1076"/>
+          <ac:spMkLst>
+            <pc:docMk/>
+            <pc:sldMk cId="3181075057" sldId="272"/>
+            <ac:spMk id="30" creationId="{EABDD7EA-57BB-A668-8BD4-710E2B86FB3D}"/>
+          </ac:spMkLst>
+        </pc:spChg>
+        <pc:spChg chg="del">
+          <ac:chgData name="Antoine VIVIEN" userId="360f1131c864c888" providerId="LiveId" clId="{BCF8220F-FA57-4D90-A194-5A123AAEFF6E}" dt="2026-07-01T08:58:20.069" v="1474" actId="478"/>
+          <ac:spMkLst>
+            <pc:docMk/>
+            <pc:sldMk cId="3181075057" sldId="272"/>
+            <ac:spMk id="31" creationId="{27AB6D5A-1C5D-B631-E43F-DB4ECDCDF8B8}"/>
+          </ac:spMkLst>
+        </pc:spChg>
+        <pc:spChg chg="mod">
+          <ac:chgData name="Antoine VIVIEN" userId="360f1131c864c888" providerId="LiveId" clId="{BCF8220F-FA57-4D90-A194-5A123AAEFF6E}" dt="2026-07-01T08:59:09.408" v="1494" actId="20577"/>
+          <ac:spMkLst>
+            <pc:docMk/>
+            <pc:sldMk cId="3181075057" sldId="272"/>
+            <ac:spMk id="37" creationId="{166F4E4C-4C26-3434-AF58-1DEABB64A746}"/>
+          </ac:spMkLst>
+        </pc:spChg>
+        <pc:spChg chg="del">
+          <ac:chgData name="Antoine VIVIEN" userId="360f1131c864c888" providerId="LiveId" clId="{BCF8220F-FA57-4D90-A194-5A123AAEFF6E}" dt="2026-07-01T08:58:31.648" v="1478" actId="478"/>
+          <ac:spMkLst>
+            <pc:docMk/>
+            <pc:sldMk cId="3181075057" sldId="272"/>
+            <ac:spMk id="39" creationId="{55C0BC0C-2464-E55D-A120-2B56834A4E99}"/>
+          </ac:spMkLst>
+        </pc:spChg>
+      </pc:sldChg>
     </pc:docChg>
   </pc:docChgLst>
 </pc:chgInfo>
@@ -1212,6 +1509,100 @@
   <p:cSld>
     <p:spTree>
       <p:nvGrpSpPr>
+        <p:cNvPr id="1" name=""/>
+        <p:cNvGrpSpPr/>
+        <p:nvPr/>
+      </p:nvGrpSpPr>
+      <p:grpSpPr>
+        <a:xfrm>
+          <a:off x="0" y="0"/>
+          <a:ext cx="0" cy="0"/>
+          <a:chOff x="0" y="0"/>
+          <a:chExt cx="0" cy="0"/>
+        </a:xfrm>
+      </p:grpSpPr>
+      <p:sp>
+        <p:nvSpPr>
+          <p:cNvPr id="2" name="Slide Image Placeholder 1"/>
+          <p:cNvSpPr>
+            <a:spLocks noGrp="1" noRot="1" noChangeAspect="1"/>
+          </p:cNvSpPr>
+          <p:nvPr>
+            <p:ph type="sldImg"/>
+          </p:nvPr>
+        </p:nvSpPr>
+        <p:spPr/>
+        <p:txBody>
+          <a:bodyPr/>
+          <a:lstStyle/>
+          <a:p>
+            <a:endParaRPr lang="fr-FR"/>
+          </a:p>
+        </p:txBody>
+      </p:sp>
+      <p:sp>
+        <p:nvSpPr>
+          <p:cNvPr id="3" name="Notes Placeholder 2"/>
+          <p:cNvSpPr>
+            <a:spLocks noGrp="1"/>
+          </p:cNvSpPr>
+          <p:nvPr>
+            <p:ph type="body" idx="1"/>
+          </p:nvPr>
+        </p:nvSpPr>
+        <p:spPr/>
+        <p:txBody>
+          <a:bodyPr/>
+          <a:lstStyle/>
+          <a:p>
+            <a:r>
+              <a:rPr lang="en-US" dirty="0"/>
+              <a:t>8 pages HTML dédiées. La navbar s'adapte selon l'état de connexion. La langue est persistée en localStorage.</a:t>
+            </a:r>
+          </a:p>
+        </p:txBody>
+      </p:sp>
+      <p:sp>
+        <p:nvSpPr>
+          <p:cNvPr id="4" name="Slide Number Placeholder 3"/>
+          <p:cNvSpPr>
+            <a:spLocks noGrp="1"/>
+          </p:cNvSpPr>
+          <p:nvPr>
+            <p:ph type="sldNum" sz="quarter" idx="10"/>
+          </p:nvPr>
+        </p:nvSpPr>
+        <p:spPr/>
+        <p:txBody>
+          <a:bodyPr/>
+          <a:lstStyle/>
+          <a:p>
+            <a:fld id="{F7021451-1387-4CA6-816F-3879F97B5CBC}" type="slidenum">
+              <a:rPr lang="en-US"/>
+              <a:t>10</a:t>
+            </a:fld>
+            <a:endParaRPr lang="en-US"/>
+          </a:p>
+        </p:txBody>
+      </p:sp>
+    </p:spTree>
+    <p:extLst>
+      <p:ext uri="{BB962C8B-B14F-4D97-AF65-F5344CB8AC3E}">
+        <p14:creationId xmlns:p14="http://schemas.microsoft.com/office/powerpoint/2010/main" val="1024086991"/>
+      </p:ext>
+    </p:extLst>
+  </p:cSld>
+  <p:clrMapOvr>
+    <a:masterClrMapping/>
+  </p:clrMapOvr>
+</p:notes>
+</file>
+
+<file path=ppt/notesSlides/notesSlide11.xml><?xml version="1.0" encoding="utf-8"?>
+<p:notes xmlns:a="http://schemas.openxmlformats.org/drawingml/2006/main" xmlns:r="http://schemas.openxmlformats.org/officeDocument/2006/relationships" xmlns:p="http://schemas.openxmlformats.org/presentationml/2006/main">
+  <p:cSld>
+    <p:spTree>
+      <p:nvGrpSpPr>
         <p:cNvPr id="1" name="">
           <a:extLst>
             <a:ext uri="{FF2B5EF4-FFF2-40B4-BE49-F238E27FC236}">
@@ -1306,7 +1697,7 @@
           <a:p>
             <a:fld id="{F7021451-1387-4CA6-816F-3879F97B5CBC}" type="slidenum">
               <a:rPr lang="en-US"/>
-              <a:t>10</a:t>
+              <a:t>11</a:t>
             </a:fld>
             <a:endParaRPr lang="en-US"/>
           </a:p>
@@ -1316,100 +1707,6 @@
     <p:extLst>
       <p:ext uri="{BB962C8B-B14F-4D97-AF65-F5344CB8AC3E}">
         <p14:creationId xmlns:p14="http://schemas.microsoft.com/office/powerpoint/2010/main" val="2283142744"/>
-      </p:ext>
-    </p:extLst>
-  </p:cSld>
-  <p:clrMapOvr>
-    <a:masterClrMapping/>
-  </p:clrMapOvr>
-</p:notes>
-</file>
-
-<file path=ppt/notesSlides/notesSlide11.xml><?xml version="1.0" encoding="utf-8"?>
-<p:notes xmlns:a="http://schemas.openxmlformats.org/drawingml/2006/main" xmlns:r="http://schemas.openxmlformats.org/officeDocument/2006/relationships" xmlns:p="http://schemas.openxmlformats.org/presentationml/2006/main">
-  <p:cSld>
-    <p:spTree>
-      <p:nvGrpSpPr>
-        <p:cNvPr id="1" name=""/>
-        <p:cNvGrpSpPr/>
-        <p:nvPr/>
-      </p:nvGrpSpPr>
-      <p:grpSpPr>
-        <a:xfrm>
-          <a:off x="0" y="0"/>
-          <a:ext cx="0" cy="0"/>
-          <a:chOff x="0" y="0"/>
-          <a:chExt cx="0" cy="0"/>
-        </a:xfrm>
-      </p:grpSpPr>
-      <p:sp>
-        <p:nvSpPr>
-          <p:cNvPr id="2" name="Slide Image Placeholder 1"/>
-          <p:cNvSpPr>
-            <a:spLocks noGrp="1" noRot="1" noChangeAspect="1"/>
-          </p:cNvSpPr>
-          <p:nvPr>
-            <p:ph type="sldImg"/>
-          </p:nvPr>
-        </p:nvSpPr>
-        <p:spPr/>
-        <p:txBody>
-          <a:bodyPr/>
-          <a:lstStyle/>
-          <a:p>
-            <a:endParaRPr lang="fr-FR"/>
-          </a:p>
-        </p:txBody>
-      </p:sp>
-      <p:sp>
-        <p:nvSpPr>
-          <p:cNvPr id="3" name="Notes Placeholder 2"/>
-          <p:cNvSpPr>
-            <a:spLocks noGrp="1"/>
-          </p:cNvSpPr>
-          <p:nvPr>
-            <p:ph type="body" idx="1"/>
-          </p:nvPr>
-        </p:nvSpPr>
-        <p:spPr/>
-        <p:txBody>
-          <a:bodyPr/>
-          <a:lstStyle/>
-          <a:p>
-            <a:r>
-              <a:rPr lang="en-US" dirty="0"/>
-              <a:t>57 cas couvrent : AUTH, PLAYER, STATE, FRONTEND, JEU et SÉCURITÉ. Tous les P1 et P2 sont bloquants pour la livraison.</a:t>
-            </a:r>
-          </a:p>
-        </p:txBody>
-      </p:sp>
-      <p:sp>
-        <p:nvSpPr>
-          <p:cNvPr id="4" name="Slide Number Placeholder 3"/>
-          <p:cNvSpPr>
-            <a:spLocks noGrp="1"/>
-          </p:cNvSpPr>
-          <p:nvPr>
-            <p:ph type="sldNum" sz="quarter" idx="10"/>
-          </p:nvPr>
-        </p:nvSpPr>
-        <p:spPr/>
-        <p:txBody>
-          <a:bodyPr/>
-          <a:lstStyle/>
-          <a:p>
-            <a:fld id="{F7021451-1387-4CA6-816F-3879F97B5CBC}" type="slidenum">
-              <a:rPr lang="en-US"/>
-              <a:t>11</a:t>
-            </a:fld>
-            <a:endParaRPr lang="en-US"/>
-          </a:p>
-        </p:txBody>
-      </p:sp>
-    </p:spTree>
-    <p:extLst>
-      <p:ext uri="{BB962C8B-B14F-4D97-AF65-F5344CB8AC3E}">
-        <p14:creationId xmlns:p14="http://schemas.microsoft.com/office/powerpoint/2010/main" val="1024086991"/>
       </p:ext>
     </p:extLst>
   </p:cSld>
@@ -1424,7 +1721,13 @@
   <p:cSld>
     <p:spTree>
       <p:nvGrpSpPr>
-        <p:cNvPr id="1" name=""/>
+        <p:cNvPr id="1" name="">
+          <a:extLst>
+            <a:ext uri="{FF2B5EF4-FFF2-40B4-BE49-F238E27FC236}">
+              <a16:creationId xmlns:a16="http://schemas.microsoft.com/office/drawing/2014/main" id="{57C7D2C4-F1E9-F81B-6457-0F53A34F10CD}"/>
+            </a:ext>
+          </a:extLst>
+        </p:cNvPr>
         <p:cNvGrpSpPr/>
         <p:nvPr/>
       </p:nvGrpSpPr>
@@ -1438,7 +1741,13 @@
       </p:grpSpPr>
       <p:sp>
         <p:nvSpPr>
-          <p:cNvPr id="2" name="Slide Image Placeholder 1"/>
+          <p:cNvPr id="2" name="Slide Image Placeholder 1">
+            <a:extLst>
+              <a:ext uri="{FF2B5EF4-FFF2-40B4-BE49-F238E27FC236}">
+                <a16:creationId xmlns:a16="http://schemas.microsoft.com/office/drawing/2014/main" id="{69F6A58D-CE75-3D7D-A528-9906D81EF84A}"/>
+              </a:ext>
+            </a:extLst>
+          </p:cNvPr>
           <p:cNvSpPr>
             <a:spLocks noGrp="1" noRot="1" noChangeAspect="1"/>
           </p:cNvSpPr>
@@ -1457,7 +1766,13 @@
       </p:sp>
       <p:sp>
         <p:nvSpPr>
-          <p:cNvPr id="3" name="Notes Placeholder 2"/>
+          <p:cNvPr id="3" name="Notes Placeholder 2">
+            <a:extLst>
+              <a:ext uri="{FF2B5EF4-FFF2-40B4-BE49-F238E27FC236}">
+                <a16:creationId xmlns:a16="http://schemas.microsoft.com/office/drawing/2014/main" id="{D4ED677A-4DC2-E076-553C-B4955FB5DCBE}"/>
+              </a:ext>
+            </a:extLst>
+          </p:cNvPr>
           <p:cNvSpPr>
             <a:spLocks noGrp="1"/>
           </p:cNvSpPr>
@@ -1479,7 +1794,13 @@
       </p:sp>
       <p:sp>
         <p:nvSpPr>
-          <p:cNvPr id="4" name="Slide Number Placeholder 3"/>
+          <p:cNvPr id="4" name="Slide Number Placeholder 3">
+            <a:extLst>
+              <a:ext uri="{FF2B5EF4-FFF2-40B4-BE49-F238E27FC236}">
+                <a16:creationId xmlns:a16="http://schemas.microsoft.com/office/drawing/2014/main" id="{BD5B3455-F40E-8E84-C2AA-8525A508138D}"/>
+              </a:ext>
+            </a:extLst>
+          </p:cNvPr>
           <p:cNvSpPr>
             <a:spLocks noGrp="1"/>
           </p:cNvSpPr>
@@ -1503,7 +1824,7 @@
     </p:spTree>
     <p:extLst>
       <p:ext uri="{BB962C8B-B14F-4D97-AF65-F5344CB8AC3E}">
-        <p14:creationId xmlns:p14="http://schemas.microsoft.com/office/powerpoint/2010/main" val="1024086991"/>
+        <p14:creationId xmlns:p14="http://schemas.microsoft.com/office/powerpoint/2010/main" val="2629458333"/>
       </p:ext>
     </p:extLst>
   </p:cSld>
@@ -1566,7 +1887,7 @@
           <a:p>
             <a:r>
               <a:rPr lang="en-US" dirty="0"/>
-              <a:t>Résumer les points clés, ouvrir sur les questions.</a:t>
+              <a:t>57 cas couvrent : AUTH, PLAYER, STATE, FRONTEND, JEU et SÉCURITÉ. Tous les P1 et P2 sont bloquants pour la livraison.</a:t>
             </a:r>
           </a:p>
         </p:txBody>
@@ -1589,6 +1910,194 @@
             <a:fld id="{F7021451-1387-4CA6-816F-3879F97B5CBC}" type="slidenum">
               <a:rPr lang="en-US"/>
               <a:t>13</a:t>
+            </a:fld>
+            <a:endParaRPr lang="en-US"/>
+          </a:p>
+        </p:txBody>
+      </p:sp>
+    </p:spTree>
+    <p:extLst>
+      <p:ext uri="{BB962C8B-B14F-4D97-AF65-F5344CB8AC3E}">
+        <p14:creationId xmlns:p14="http://schemas.microsoft.com/office/powerpoint/2010/main" val="1024086991"/>
+      </p:ext>
+    </p:extLst>
+  </p:cSld>
+  <p:clrMapOvr>
+    <a:masterClrMapping/>
+  </p:clrMapOvr>
+</p:notes>
+</file>
+
+<file path=ppt/notesSlides/notesSlide14.xml><?xml version="1.0" encoding="utf-8"?>
+<p:notes xmlns:a="http://schemas.openxmlformats.org/drawingml/2006/main" xmlns:r="http://schemas.openxmlformats.org/officeDocument/2006/relationships" xmlns:p="http://schemas.openxmlformats.org/presentationml/2006/main">
+  <p:cSld>
+    <p:spTree>
+      <p:nvGrpSpPr>
+        <p:cNvPr id="1" name=""/>
+        <p:cNvGrpSpPr/>
+        <p:nvPr/>
+      </p:nvGrpSpPr>
+      <p:grpSpPr>
+        <a:xfrm>
+          <a:off x="0" y="0"/>
+          <a:ext cx="0" cy="0"/>
+          <a:chOff x="0" y="0"/>
+          <a:chExt cx="0" cy="0"/>
+        </a:xfrm>
+      </p:grpSpPr>
+      <p:sp>
+        <p:nvSpPr>
+          <p:cNvPr id="2" name="Slide Image Placeholder 1"/>
+          <p:cNvSpPr>
+            <a:spLocks noGrp="1" noRot="1" noChangeAspect="1"/>
+          </p:cNvSpPr>
+          <p:nvPr>
+            <p:ph type="sldImg"/>
+          </p:nvPr>
+        </p:nvSpPr>
+        <p:spPr/>
+        <p:txBody>
+          <a:bodyPr/>
+          <a:lstStyle/>
+          <a:p>
+            <a:endParaRPr lang="fr-FR"/>
+          </a:p>
+        </p:txBody>
+      </p:sp>
+      <p:sp>
+        <p:nvSpPr>
+          <p:cNvPr id="3" name="Notes Placeholder 2"/>
+          <p:cNvSpPr>
+            <a:spLocks noGrp="1"/>
+          </p:cNvSpPr>
+          <p:nvPr>
+            <p:ph type="body" idx="1"/>
+          </p:nvPr>
+        </p:nvSpPr>
+        <p:spPr/>
+        <p:txBody>
+          <a:bodyPr/>
+          <a:lstStyle/>
+          <a:p>
+            <a:r>
+              <a:rPr lang="en-US" dirty="0"/>
+              <a:t>Ces évolutions sont priorisées : combat et inventaire en premier pour compléter le gameplay.</a:t>
+            </a:r>
+          </a:p>
+        </p:txBody>
+      </p:sp>
+      <p:sp>
+        <p:nvSpPr>
+          <p:cNvPr id="4" name="Slide Number Placeholder 3"/>
+          <p:cNvSpPr>
+            <a:spLocks noGrp="1"/>
+          </p:cNvSpPr>
+          <p:nvPr>
+            <p:ph type="sldNum" sz="quarter" idx="10"/>
+          </p:nvPr>
+        </p:nvSpPr>
+        <p:spPr/>
+        <p:txBody>
+          <a:bodyPr/>
+          <a:lstStyle/>
+          <a:p>
+            <a:fld id="{F7021451-1387-4CA6-816F-3879F97B5CBC}" type="slidenum">
+              <a:rPr lang="en-US"/>
+              <a:t>14</a:t>
+            </a:fld>
+            <a:endParaRPr lang="en-US"/>
+          </a:p>
+        </p:txBody>
+      </p:sp>
+    </p:spTree>
+    <p:extLst>
+      <p:ext uri="{BB962C8B-B14F-4D97-AF65-F5344CB8AC3E}">
+        <p14:creationId xmlns:p14="http://schemas.microsoft.com/office/powerpoint/2010/main" val="1024086991"/>
+      </p:ext>
+    </p:extLst>
+  </p:cSld>
+  <p:clrMapOvr>
+    <a:masterClrMapping/>
+  </p:clrMapOvr>
+</p:notes>
+</file>
+
+<file path=ppt/notesSlides/notesSlide15.xml><?xml version="1.0" encoding="utf-8"?>
+<p:notes xmlns:a="http://schemas.openxmlformats.org/drawingml/2006/main" xmlns:r="http://schemas.openxmlformats.org/officeDocument/2006/relationships" xmlns:p="http://schemas.openxmlformats.org/presentationml/2006/main">
+  <p:cSld>
+    <p:spTree>
+      <p:nvGrpSpPr>
+        <p:cNvPr id="1" name=""/>
+        <p:cNvGrpSpPr/>
+        <p:nvPr/>
+      </p:nvGrpSpPr>
+      <p:grpSpPr>
+        <a:xfrm>
+          <a:off x="0" y="0"/>
+          <a:ext cx="0" cy="0"/>
+          <a:chOff x="0" y="0"/>
+          <a:chExt cx="0" cy="0"/>
+        </a:xfrm>
+      </p:grpSpPr>
+      <p:sp>
+        <p:nvSpPr>
+          <p:cNvPr id="2" name="Slide Image Placeholder 1"/>
+          <p:cNvSpPr>
+            <a:spLocks noGrp="1" noRot="1" noChangeAspect="1"/>
+          </p:cNvSpPr>
+          <p:nvPr>
+            <p:ph type="sldImg"/>
+          </p:nvPr>
+        </p:nvSpPr>
+        <p:spPr/>
+        <p:txBody>
+          <a:bodyPr/>
+          <a:lstStyle/>
+          <a:p>
+            <a:endParaRPr lang="fr-FR"/>
+          </a:p>
+        </p:txBody>
+      </p:sp>
+      <p:sp>
+        <p:nvSpPr>
+          <p:cNvPr id="3" name="Notes Placeholder 2"/>
+          <p:cNvSpPr>
+            <a:spLocks noGrp="1"/>
+          </p:cNvSpPr>
+          <p:nvPr>
+            <p:ph type="body" idx="1"/>
+          </p:nvPr>
+        </p:nvSpPr>
+        <p:spPr/>
+        <p:txBody>
+          <a:bodyPr/>
+          <a:lstStyle/>
+          <a:p>
+            <a:r>
+              <a:rPr lang="en-US" dirty="0"/>
+              <a:t>Résumer les points clés, ouvrir sur les questions.</a:t>
+            </a:r>
+          </a:p>
+        </p:txBody>
+      </p:sp>
+      <p:sp>
+        <p:nvSpPr>
+          <p:cNvPr id="4" name="Slide Number Placeholder 3"/>
+          <p:cNvSpPr>
+            <a:spLocks noGrp="1"/>
+          </p:cNvSpPr>
+          <p:nvPr>
+            <p:ph type="sldNum" sz="quarter" idx="10"/>
+          </p:nvPr>
+        </p:nvSpPr>
+        <p:spPr/>
+        <p:txBody>
+          <a:bodyPr/>
+          <a:lstStyle/>
+          <a:p>
+            <a:fld id="{F7021451-1387-4CA6-816F-3879F97B5CBC}" type="slidenum">
+              <a:rPr lang="en-US"/>
+              <a:t>15</a:t>
             </a:fld>
             <a:endParaRPr lang="en-US"/>
           </a:p>
@@ -1824,7 +2333,13 @@
   <p:cSld>
     <p:spTree>
       <p:nvGrpSpPr>
-        <p:cNvPr id="1" name=""/>
+        <p:cNvPr id="1" name="">
+          <a:extLst>
+            <a:ext uri="{FF2B5EF4-FFF2-40B4-BE49-F238E27FC236}">
+              <a16:creationId xmlns:a16="http://schemas.microsoft.com/office/drawing/2014/main" id="{312DD982-E6AA-A6C8-984C-204209656471}"/>
+            </a:ext>
+          </a:extLst>
+        </p:cNvPr>
         <p:cNvGrpSpPr/>
         <p:nvPr/>
       </p:nvGrpSpPr>
@@ -1838,7 +2353,13 @@
       </p:grpSpPr>
       <p:sp>
         <p:nvSpPr>
-          <p:cNvPr id="2" name="Slide Image Placeholder 1"/>
+          <p:cNvPr id="2" name="Slide Image Placeholder 1">
+            <a:extLst>
+              <a:ext uri="{FF2B5EF4-FFF2-40B4-BE49-F238E27FC236}">
+                <a16:creationId xmlns:a16="http://schemas.microsoft.com/office/drawing/2014/main" id="{9DC4FEAC-3815-9A7B-3786-49A1DB94EA67}"/>
+              </a:ext>
+            </a:extLst>
+          </p:cNvPr>
           <p:cNvSpPr>
             <a:spLocks noGrp="1" noRot="1" noChangeAspect="1"/>
           </p:cNvSpPr>
@@ -1857,7 +2378,13 @@
       </p:sp>
       <p:sp>
         <p:nvSpPr>
-          <p:cNvPr id="3" name="Notes Placeholder 2"/>
+          <p:cNvPr id="3" name="Notes Placeholder 2">
+            <a:extLst>
+              <a:ext uri="{FF2B5EF4-FFF2-40B4-BE49-F238E27FC236}">
+                <a16:creationId xmlns:a16="http://schemas.microsoft.com/office/drawing/2014/main" id="{9A40F548-42E9-DE38-0525-82C4BF073D60}"/>
+              </a:ext>
+            </a:extLst>
+          </p:cNvPr>
           <p:cNvSpPr>
             <a:spLocks noGrp="1"/>
           </p:cNvSpPr>
@@ -1872,14 +2399,20 @@
           <a:p>
             <a:r>
               <a:rPr lang="en-US" dirty="0"/>
-              <a:t>Expliquer les 3 couches : frontend (navigateur + Phaser), backend (Node/Express), BDD (PostgreSQL).</a:t>
-            </a:r>
-          </a:p>
-        </p:txBody>
-      </p:sp>
-      <p:sp>
-        <p:nvSpPr>
-          <p:cNvPr id="4" name="Slide Number Placeholder 3"/>
+              <a:t>Expliquer le concept narratif cyberpunk et les caractéristiques principales du jeu.</a:t>
+            </a:r>
+          </a:p>
+        </p:txBody>
+      </p:sp>
+      <p:sp>
+        <p:nvSpPr>
+          <p:cNvPr id="4" name="Slide Number Placeholder 3">
+            <a:extLst>
+              <a:ext uri="{FF2B5EF4-FFF2-40B4-BE49-F238E27FC236}">
+                <a16:creationId xmlns:a16="http://schemas.microsoft.com/office/drawing/2014/main" id="{3A8C0B89-BF7B-644E-706D-0BE6589F4143}"/>
+              </a:ext>
+            </a:extLst>
+          </p:cNvPr>
           <p:cNvSpPr>
             <a:spLocks noGrp="1"/>
           </p:cNvSpPr>
@@ -1903,7 +2436,7 @@
     </p:spTree>
     <p:extLst>
       <p:ext uri="{BB962C8B-B14F-4D97-AF65-F5344CB8AC3E}">
-        <p14:creationId xmlns:p14="http://schemas.microsoft.com/office/powerpoint/2010/main" val="1024086991"/>
+        <p14:creationId xmlns:p14="http://schemas.microsoft.com/office/powerpoint/2010/main" val="2241868293"/>
       </p:ext>
     </p:extLst>
   </p:cSld>
@@ -1966,7 +2499,7 @@
           <a:p>
             <a:r>
               <a:rPr lang="en-US" dirty="0"/>
-              <a:t>Montrer la cohérence de la stack : tout JS côté frontend + backend, PostgreSQL pour la persistance.</a:t>
+              <a:t>Expliquer les 3 couches : frontend (navigateur + Phaser), backend (Node/Express), BDD (PostgreSQL).</a:t>
             </a:r>
           </a:p>
         </p:txBody>
@@ -2060,7 +2593,7 @@
           <a:p>
             <a:r>
               <a:rPr lang="en-US" dirty="0"/>
-              <a:t>Insister sur bcrypt et JWT — sécurité standard industriel. Les requêtes paramétrées évitent toute injection SQL.</a:t>
+              <a:t>Montrer la cohérence de la stack : tout JS côté frontend + backend, PostgreSQL pour la persistance.</a:t>
             </a:r>
           </a:p>
         </p:txBody>
@@ -2154,7 +2687,7 @@
           <a:p>
             <a:r>
               <a:rPr lang="en-US" dirty="0"/>
-              <a:t>3 slots de sauvegarde = 3 personnages max. L'inventaire est créé automatiquement côté backend lors du POST /api/player.</a:t>
+              <a:t>Insister sur bcrypt et JWT — sécurité standard industriel. Les requêtes paramétrées évitent toute injection SQL.</a:t>
             </a:r>
           </a:p>
         </p:txBody>
@@ -2248,7 +2781,7 @@
           <a:p>
             <a:r>
               <a:rPr lang="en-US" dirty="0"/>
-              <a:t>Phaser.js est le coeur du jeu. Insister sur la sauvegarde serveur (pas localStorage) et la grille de zones.</a:t>
+              <a:t>3 slots de sauvegarde = 3 personnages max. L'inventaire est créé automatiquement côté backend lors du POST /api/player.</a:t>
             </a:r>
           </a:p>
         </p:txBody>
@@ -2342,7 +2875,7 @@
           <a:p>
             <a:r>
               <a:rPr lang="en-US" dirty="0"/>
-              <a:t>8 pages HTML dédiées. La navbar s'adapte selon l'état de connexion. La langue est persistée en localStorage.</a:t>
+              <a:t>Phaser.js est le coeur du jeu. Insister sur la sauvegarde serveur (pas localStorage) et la grille de zones.</a:t>
             </a:r>
           </a:p>
         </p:txBody>
@@ -3255,6 +3788,1336 @@
 
 <file path=ppt/slides/slide10.xml><?xml version="1.0" encoding="utf-8"?>
 <p:sld xmlns:a="http://schemas.openxmlformats.org/drawingml/2006/main" xmlns:r="http://schemas.openxmlformats.org/officeDocument/2006/relationships" xmlns:p="http://schemas.openxmlformats.org/presentationml/2006/main">
+  <p:cSld name="Slide 8">
+    <p:bg>
+      <p:bgPr>
+        <a:solidFill>
+          <a:srgbClr val="070B14"/>
+        </a:solidFill>
+        <a:effectLst/>
+      </p:bgPr>
+    </p:bg>
+    <p:spTree>
+      <p:nvGrpSpPr>
+        <p:cNvPr id="1" name=""/>
+        <p:cNvGrpSpPr/>
+        <p:nvPr/>
+      </p:nvGrpSpPr>
+      <p:grpSpPr>
+        <a:xfrm>
+          <a:off x="0" y="0"/>
+          <a:ext cx="0" cy="0"/>
+          <a:chOff x="0" y="0"/>
+          <a:chExt cx="0" cy="0"/>
+        </a:xfrm>
+      </p:grpSpPr>
+      <p:sp>
+        <p:nvSpPr>
+          <p:cNvPr id="2" name="Shape 0"/>
+          <p:cNvSpPr/>
+          <p:nvPr/>
+        </p:nvSpPr>
+        <p:spPr>
+          <a:xfrm>
+            <a:off x="365760" y="201168"/>
+            <a:ext cx="54864" cy="548640"/>
+          </a:xfrm>
+          <a:prstGeom prst="roundRect">
+            <a:avLst>
+              <a:gd name="adj" fmla="val 50000"/>
+            </a:avLst>
+          </a:prstGeom>
+          <a:solidFill>
+            <a:srgbClr val="00E5FF"/>
+          </a:solidFill>
+          <a:ln w="12700">
+            <a:solidFill>
+              <a:srgbClr val="00E5FF"/>
+            </a:solidFill>
+            <a:prstDash val="solid"/>
+          </a:ln>
+        </p:spPr>
+        <p:txBody>
+          <a:bodyPr/>
+          <a:lstStyle/>
+          <a:p>
+            <a:endParaRPr lang="fr-FR"/>
+          </a:p>
+        </p:txBody>
+      </p:sp>
+      <p:sp>
+        <p:nvSpPr>
+          <p:cNvPr id="3" name="Text 1"/>
+          <p:cNvSpPr/>
+          <p:nvPr/>
+        </p:nvSpPr>
+        <p:spPr>
+          <a:xfrm>
+            <a:off x="548640" y="137160"/>
+            <a:ext cx="8229600" cy="685800"/>
+          </a:xfrm>
+          <a:prstGeom prst="rect">
+            <a:avLst/>
+          </a:prstGeom>
+          <a:noFill/>
+          <a:ln/>
+        </p:spPr>
+        <p:txBody>
+          <a:bodyPr wrap="square" lIns="0" tIns="0" rIns="0" bIns="0" rtlCol="0" anchor="ctr"/>
+          <a:lstStyle/>
+          <a:p>
+            <a:pPr marL="0" indent="0" algn="l">
+              <a:buNone/>
+            </a:pPr>
+            <a:r>
+              <a:rPr lang="en-US" sz="2800" b="1" dirty="0">
+                <a:solidFill>
+                  <a:srgbClr val="FFFFFF"/>
+                </a:solidFill>
+                <a:latin typeface="Calibri" pitchFamily="34" charset="0"/>
+                <a:ea typeface="Calibri" pitchFamily="34" charset="-122"/>
+                <a:cs typeface="Calibri" pitchFamily="34" charset="-120"/>
+              </a:rPr>
+              <a:t>Interface Web</a:t>
+            </a:r>
+            <a:endParaRPr lang="en-US" sz="2800" dirty="0"/>
+          </a:p>
+        </p:txBody>
+      </p:sp>
+      <p:sp>
+        <p:nvSpPr>
+          <p:cNvPr id="4" name="Shape 2"/>
+          <p:cNvSpPr/>
+          <p:nvPr/>
+        </p:nvSpPr>
+        <p:spPr>
+          <a:xfrm>
+            <a:off x="365760" y="1051560"/>
+            <a:ext cx="1965960" cy="1417320"/>
+          </a:xfrm>
+          <a:prstGeom prst="roundRect">
+            <a:avLst>
+              <a:gd name="adj" fmla="val 6452"/>
+            </a:avLst>
+          </a:prstGeom>
+          <a:solidFill>
+            <a:srgbClr val="0D1526"/>
+          </a:solidFill>
+          <a:ln w="12700">
+            <a:solidFill>
+              <a:srgbClr val="A855F7">
+                <a:alpha val="60000"/>
+              </a:srgbClr>
+            </a:solidFill>
+            <a:prstDash val="solid"/>
+          </a:ln>
+          <a:effectLst>
+            <a:outerShdw blurRad="127000" dist="38100" dir="2700000" algn="bl" rotWithShape="0">
+              <a:srgbClr val="000000">
+                <a:alpha val="30000"/>
+              </a:srgbClr>
+            </a:outerShdw>
+          </a:effectLst>
+        </p:spPr>
+        <p:txBody>
+          <a:bodyPr/>
+          <a:lstStyle/>
+          <a:p>
+            <a:endParaRPr lang="fr-FR"/>
+          </a:p>
+        </p:txBody>
+      </p:sp>
+      <p:sp>
+        <p:nvSpPr>
+          <p:cNvPr id="5" name="Text 3"/>
+          <p:cNvSpPr/>
+          <p:nvPr/>
+        </p:nvSpPr>
+        <p:spPr>
+          <a:xfrm>
+            <a:off x="457200" y="1188720"/>
+            <a:ext cx="1783080" cy="457200"/>
+          </a:xfrm>
+          <a:prstGeom prst="rect">
+            <a:avLst/>
+          </a:prstGeom>
+          <a:noFill/>
+          <a:ln/>
+        </p:spPr>
+        <p:txBody>
+          <a:bodyPr wrap="square" rtlCol="0" anchor="ctr"/>
+          <a:lstStyle/>
+          <a:p>
+            <a:pPr marL="0" indent="0" algn="ctr">
+              <a:buNone/>
+            </a:pPr>
+            <a:r>
+              <a:rPr lang="en-US" sz="1000" b="1" dirty="0">
+                <a:solidFill>
+                  <a:srgbClr val="00E5FF"/>
+                </a:solidFill>
+                <a:latin typeface="Courier New" pitchFamily="34" charset="0"/>
+                <a:ea typeface="Courier New" pitchFamily="34" charset="-122"/>
+                <a:cs typeface="Courier New" pitchFamily="34" charset="-120"/>
+              </a:rPr>
+              <a:t>index.html</a:t>
+            </a:r>
+            <a:endParaRPr lang="en-US" sz="1000" dirty="0"/>
+          </a:p>
+        </p:txBody>
+      </p:sp>
+      <p:sp>
+        <p:nvSpPr>
+          <p:cNvPr id="6" name="Shape 4"/>
+          <p:cNvSpPr/>
+          <p:nvPr/>
+        </p:nvSpPr>
+        <p:spPr>
+          <a:xfrm>
+            <a:off x="548640" y="1691640"/>
+            <a:ext cx="1600200" cy="0"/>
+          </a:xfrm>
+          <a:prstGeom prst="line">
+            <a:avLst/>
+          </a:prstGeom>
+          <a:noFill/>
+          <a:ln w="12700">
+            <a:solidFill>
+              <a:srgbClr val="A855F7">
+                <a:alpha val="40000"/>
+              </a:srgbClr>
+            </a:solidFill>
+            <a:prstDash val="solid"/>
+          </a:ln>
+        </p:spPr>
+        <p:txBody>
+          <a:bodyPr/>
+          <a:lstStyle/>
+          <a:p>
+            <a:endParaRPr lang="fr-FR"/>
+          </a:p>
+        </p:txBody>
+      </p:sp>
+      <p:sp>
+        <p:nvSpPr>
+          <p:cNvPr id="7" name="Text 5"/>
+          <p:cNvSpPr/>
+          <p:nvPr/>
+        </p:nvSpPr>
+        <p:spPr>
+          <a:xfrm>
+            <a:off x="457200" y="1783080"/>
+            <a:ext cx="1783080" cy="548640"/>
+          </a:xfrm>
+          <a:prstGeom prst="rect">
+            <a:avLst/>
+          </a:prstGeom>
+          <a:noFill/>
+          <a:ln/>
+        </p:spPr>
+        <p:txBody>
+          <a:bodyPr wrap="square" rtlCol="0" anchor="ctr"/>
+          <a:lstStyle/>
+          <a:p>
+            <a:pPr marL="0" indent="0" algn="ctr">
+              <a:buNone/>
+            </a:pPr>
+            <a:r>
+              <a:rPr lang="en-US" sz="1000" dirty="0">
+                <a:solidFill>
+                  <a:srgbClr val="CBD5E1"/>
+                </a:solidFill>
+                <a:latin typeface="Calibri" pitchFamily="34" charset="0"/>
+                <a:ea typeface="Calibri" pitchFamily="34" charset="-122"/>
+                <a:cs typeface="Calibri" pitchFamily="34" charset="-120"/>
+              </a:rPr>
+              <a:t>Accueil · Navbar dynamique</a:t>
+            </a:r>
+            <a:endParaRPr lang="en-US" sz="1000" dirty="0"/>
+          </a:p>
+        </p:txBody>
+      </p:sp>
+      <p:sp>
+        <p:nvSpPr>
+          <p:cNvPr id="8" name="Shape 6"/>
+          <p:cNvSpPr/>
+          <p:nvPr/>
+        </p:nvSpPr>
+        <p:spPr>
+          <a:xfrm>
+            <a:off x="2514600" y="1051560"/>
+            <a:ext cx="1965960" cy="1417320"/>
+          </a:xfrm>
+          <a:prstGeom prst="roundRect">
+            <a:avLst>
+              <a:gd name="adj" fmla="val 6452"/>
+            </a:avLst>
+          </a:prstGeom>
+          <a:solidFill>
+            <a:srgbClr val="0D1526"/>
+          </a:solidFill>
+          <a:ln w="12700">
+            <a:solidFill>
+              <a:srgbClr val="A855F7">
+                <a:alpha val="60000"/>
+              </a:srgbClr>
+            </a:solidFill>
+            <a:prstDash val="solid"/>
+          </a:ln>
+          <a:effectLst>
+            <a:outerShdw blurRad="127000" dist="38100" dir="2700000" algn="bl" rotWithShape="0">
+              <a:srgbClr val="000000">
+                <a:alpha val="30000"/>
+              </a:srgbClr>
+            </a:outerShdw>
+          </a:effectLst>
+        </p:spPr>
+        <p:txBody>
+          <a:bodyPr/>
+          <a:lstStyle/>
+          <a:p>
+            <a:endParaRPr lang="fr-FR"/>
+          </a:p>
+        </p:txBody>
+      </p:sp>
+      <p:sp>
+        <p:nvSpPr>
+          <p:cNvPr id="9" name="Text 7"/>
+          <p:cNvSpPr/>
+          <p:nvPr/>
+        </p:nvSpPr>
+        <p:spPr>
+          <a:xfrm>
+            <a:off x="2606040" y="1188720"/>
+            <a:ext cx="1783080" cy="457200"/>
+          </a:xfrm>
+          <a:prstGeom prst="rect">
+            <a:avLst/>
+          </a:prstGeom>
+          <a:noFill/>
+          <a:ln/>
+        </p:spPr>
+        <p:txBody>
+          <a:bodyPr wrap="square" rtlCol="0" anchor="ctr"/>
+          <a:lstStyle/>
+          <a:p>
+            <a:pPr marL="0" indent="0" algn="ctr">
+              <a:buNone/>
+            </a:pPr>
+            <a:r>
+              <a:rPr lang="en-US" sz="1000" b="1" dirty="0">
+                <a:solidFill>
+                  <a:srgbClr val="00E5FF"/>
+                </a:solidFill>
+                <a:latin typeface="Courier New" pitchFamily="34" charset="0"/>
+                <a:ea typeface="Courier New" pitchFamily="34" charset="-122"/>
+                <a:cs typeface="Courier New" pitchFamily="34" charset="-120"/>
+              </a:rPr>
+              <a:t>login.html</a:t>
+            </a:r>
+            <a:endParaRPr lang="en-US" sz="1000" dirty="0"/>
+          </a:p>
+        </p:txBody>
+      </p:sp>
+      <p:sp>
+        <p:nvSpPr>
+          <p:cNvPr id="10" name="Shape 8"/>
+          <p:cNvSpPr/>
+          <p:nvPr/>
+        </p:nvSpPr>
+        <p:spPr>
+          <a:xfrm>
+            <a:off x="2697480" y="1691640"/>
+            <a:ext cx="1600200" cy="0"/>
+          </a:xfrm>
+          <a:prstGeom prst="line">
+            <a:avLst/>
+          </a:prstGeom>
+          <a:noFill/>
+          <a:ln w="12700">
+            <a:solidFill>
+              <a:srgbClr val="A855F7">
+                <a:alpha val="40000"/>
+              </a:srgbClr>
+            </a:solidFill>
+            <a:prstDash val="solid"/>
+          </a:ln>
+        </p:spPr>
+        <p:txBody>
+          <a:bodyPr/>
+          <a:lstStyle/>
+          <a:p>
+            <a:endParaRPr lang="fr-FR"/>
+          </a:p>
+        </p:txBody>
+      </p:sp>
+      <p:sp>
+        <p:nvSpPr>
+          <p:cNvPr id="11" name="Text 9"/>
+          <p:cNvSpPr/>
+          <p:nvPr/>
+        </p:nvSpPr>
+        <p:spPr>
+          <a:xfrm>
+            <a:off x="2606040" y="1783080"/>
+            <a:ext cx="1783080" cy="548640"/>
+          </a:xfrm>
+          <a:prstGeom prst="rect">
+            <a:avLst/>
+          </a:prstGeom>
+          <a:noFill/>
+          <a:ln/>
+        </p:spPr>
+        <p:txBody>
+          <a:bodyPr wrap="square" rtlCol="0" anchor="ctr"/>
+          <a:lstStyle/>
+          <a:p>
+            <a:pPr marL="0" indent="0" algn="ctr">
+              <a:buNone/>
+            </a:pPr>
+            <a:r>
+              <a:rPr lang="en-US" sz="1000" dirty="0">
+                <a:solidFill>
+                  <a:srgbClr val="CBD5E1"/>
+                </a:solidFill>
+                <a:latin typeface="Calibri" pitchFamily="34" charset="0"/>
+                <a:ea typeface="Calibri" pitchFamily="34" charset="-122"/>
+                <a:cs typeface="Calibri" pitchFamily="34" charset="-120"/>
+              </a:rPr>
+              <a:t>Formulaire connexion</a:t>
+            </a:r>
+            <a:endParaRPr lang="en-US" sz="1000" dirty="0"/>
+          </a:p>
+        </p:txBody>
+      </p:sp>
+      <p:sp>
+        <p:nvSpPr>
+          <p:cNvPr id="12" name="Shape 10"/>
+          <p:cNvSpPr/>
+          <p:nvPr/>
+        </p:nvSpPr>
+        <p:spPr>
+          <a:xfrm>
+            <a:off x="4663440" y="1051560"/>
+            <a:ext cx="1965960" cy="1417320"/>
+          </a:xfrm>
+          <a:prstGeom prst="roundRect">
+            <a:avLst>
+              <a:gd name="adj" fmla="val 6452"/>
+            </a:avLst>
+          </a:prstGeom>
+          <a:solidFill>
+            <a:srgbClr val="0D1526"/>
+          </a:solidFill>
+          <a:ln w="12700">
+            <a:solidFill>
+              <a:srgbClr val="A855F7">
+                <a:alpha val="60000"/>
+              </a:srgbClr>
+            </a:solidFill>
+            <a:prstDash val="solid"/>
+          </a:ln>
+          <a:effectLst>
+            <a:outerShdw blurRad="127000" dist="38100" dir="2700000" algn="bl" rotWithShape="0">
+              <a:srgbClr val="000000">
+                <a:alpha val="30000"/>
+              </a:srgbClr>
+            </a:outerShdw>
+          </a:effectLst>
+        </p:spPr>
+        <p:txBody>
+          <a:bodyPr/>
+          <a:lstStyle/>
+          <a:p>
+            <a:endParaRPr lang="fr-FR"/>
+          </a:p>
+        </p:txBody>
+      </p:sp>
+      <p:sp>
+        <p:nvSpPr>
+          <p:cNvPr id="13" name="Text 11"/>
+          <p:cNvSpPr/>
+          <p:nvPr/>
+        </p:nvSpPr>
+        <p:spPr>
+          <a:xfrm>
+            <a:off x="4754880" y="1188720"/>
+            <a:ext cx="1783080" cy="457200"/>
+          </a:xfrm>
+          <a:prstGeom prst="rect">
+            <a:avLst/>
+          </a:prstGeom>
+          <a:noFill/>
+          <a:ln/>
+        </p:spPr>
+        <p:txBody>
+          <a:bodyPr wrap="square" rtlCol="0" anchor="ctr"/>
+          <a:lstStyle/>
+          <a:p>
+            <a:pPr marL="0" indent="0" algn="ctr">
+              <a:buNone/>
+            </a:pPr>
+            <a:r>
+              <a:rPr lang="en-US" sz="1000" b="1" dirty="0">
+                <a:solidFill>
+                  <a:srgbClr val="00E5FF"/>
+                </a:solidFill>
+                <a:latin typeface="Courier New" pitchFamily="34" charset="0"/>
+                <a:ea typeface="Courier New" pitchFamily="34" charset="-122"/>
+                <a:cs typeface="Courier New" pitchFamily="34" charset="-120"/>
+              </a:rPr>
+              <a:t>register.html</a:t>
+            </a:r>
+            <a:endParaRPr lang="en-US" sz="1000" dirty="0"/>
+          </a:p>
+        </p:txBody>
+      </p:sp>
+      <p:sp>
+        <p:nvSpPr>
+          <p:cNvPr id="14" name="Shape 12"/>
+          <p:cNvSpPr/>
+          <p:nvPr/>
+        </p:nvSpPr>
+        <p:spPr>
+          <a:xfrm>
+            <a:off x="4846320" y="1691640"/>
+            <a:ext cx="1600200" cy="0"/>
+          </a:xfrm>
+          <a:prstGeom prst="line">
+            <a:avLst/>
+          </a:prstGeom>
+          <a:noFill/>
+          <a:ln w="12700">
+            <a:solidFill>
+              <a:srgbClr val="A855F7">
+                <a:alpha val="40000"/>
+              </a:srgbClr>
+            </a:solidFill>
+            <a:prstDash val="solid"/>
+          </a:ln>
+        </p:spPr>
+        <p:txBody>
+          <a:bodyPr/>
+          <a:lstStyle/>
+          <a:p>
+            <a:endParaRPr lang="fr-FR"/>
+          </a:p>
+        </p:txBody>
+      </p:sp>
+      <p:sp>
+        <p:nvSpPr>
+          <p:cNvPr id="15" name="Text 13"/>
+          <p:cNvSpPr/>
+          <p:nvPr/>
+        </p:nvSpPr>
+        <p:spPr>
+          <a:xfrm>
+            <a:off x="4754880" y="1783080"/>
+            <a:ext cx="1783080" cy="548640"/>
+          </a:xfrm>
+          <a:prstGeom prst="rect">
+            <a:avLst/>
+          </a:prstGeom>
+          <a:noFill/>
+          <a:ln/>
+        </p:spPr>
+        <p:txBody>
+          <a:bodyPr wrap="square" rtlCol="0" anchor="ctr"/>
+          <a:lstStyle/>
+          <a:p>
+            <a:pPr marL="0" indent="0" algn="ctr">
+              <a:buNone/>
+            </a:pPr>
+            <a:r>
+              <a:rPr lang="en-US" sz="1000" dirty="0">
+                <a:solidFill>
+                  <a:srgbClr val="CBD5E1"/>
+                </a:solidFill>
+                <a:latin typeface="Calibri" pitchFamily="34" charset="0"/>
+                <a:ea typeface="Calibri" pitchFamily="34" charset="-122"/>
+                <a:cs typeface="Calibri" pitchFamily="34" charset="-120"/>
+              </a:rPr>
+              <a:t>Formulaire inscription</a:t>
+            </a:r>
+            <a:endParaRPr lang="en-US" sz="1000" dirty="0"/>
+          </a:p>
+        </p:txBody>
+      </p:sp>
+      <p:sp>
+        <p:nvSpPr>
+          <p:cNvPr id="16" name="Shape 14"/>
+          <p:cNvSpPr/>
+          <p:nvPr/>
+        </p:nvSpPr>
+        <p:spPr>
+          <a:xfrm>
+            <a:off x="6812280" y="1051560"/>
+            <a:ext cx="1965960" cy="1417320"/>
+          </a:xfrm>
+          <a:prstGeom prst="roundRect">
+            <a:avLst>
+              <a:gd name="adj" fmla="val 6452"/>
+            </a:avLst>
+          </a:prstGeom>
+          <a:solidFill>
+            <a:srgbClr val="0D1526"/>
+          </a:solidFill>
+          <a:ln w="12700">
+            <a:solidFill>
+              <a:srgbClr val="A855F7">
+                <a:alpha val="60000"/>
+              </a:srgbClr>
+            </a:solidFill>
+            <a:prstDash val="solid"/>
+          </a:ln>
+          <a:effectLst>
+            <a:outerShdw blurRad="127000" dist="38100" dir="2700000" algn="bl" rotWithShape="0">
+              <a:srgbClr val="000000">
+                <a:alpha val="30000"/>
+              </a:srgbClr>
+            </a:outerShdw>
+          </a:effectLst>
+        </p:spPr>
+        <p:txBody>
+          <a:bodyPr/>
+          <a:lstStyle/>
+          <a:p>
+            <a:endParaRPr lang="fr-FR"/>
+          </a:p>
+        </p:txBody>
+      </p:sp>
+      <p:sp>
+        <p:nvSpPr>
+          <p:cNvPr id="17" name="Text 15"/>
+          <p:cNvSpPr/>
+          <p:nvPr/>
+        </p:nvSpPr>
+        <p:spPr>
+          <a:xfrm>
+            <a:off x="6903720" y="1188720"/>
+            <a:ext cx="1783080" cy="457200"/>
+          </a:xfrm>
+          <a:prstGeom prst="rect">
+            <a:avLst/>
+          </a:prstGeom>
+          <a:noFill/>
+          <a:ln/>
+        </p:spPr>
+        <p:txBody>
+          <a:bodyPr wrap="square" rtlCol="0" anchor="ctr"/>
+          <a:lstStyle/>
+          <a:p>
+            <a:pPr marL="0" indent="0" algn="ctr">
+              <a:buNone/>
+            </a:pPr>
+            <a:r>
+              <a:rPr lang="en-US" sz="1000" b="1" dirty="0">
+                <a:solidFill>
+                  <a:srgbClr val="00E5FF"/>
+                </a:solidFill>
+                <a:latin typeface="Courier New" pitchFamily="34" charset="0"/>
+                <a:ea typeface="Courier New" pitchFamily="34" charset="-122"/>
+                <a:cs typeface="Courier New" pitchFamily="34" charset="-120"/>
+              </a:rPr>
+              <a:t>character_save.html</a:t>
+            </a:r>
+            <a:endParaRPr lang="en-US" sz="1000" dirty="0"/>
+          </a:p>
+        </p:txBody>
+      </p:sp>
+      <p:sp>
+        <p:nvSpPr>
+          <p:cNvPr id="18" name="Shape 16"/>
+          <p:cNvSpPr/>
+          <p:nvPr/>
+        </p:nvSpPr>
+        <p:spPr>
+          <a:xfrm>
+            <a:off x="6995160" y="1691640"/>
+            <a:ext cx="1600200" cy="0"/>
+          </a:xfrm>
+          <a:prstGeom prst="line">
+            <a:avLst/>
+          </a:prstGeom>
+          <a:noFill/>
+          <a:ln w="12700">
+            <a:solidFill>
+              <a:srgbClr val="A855F7">
+                <a:alpha val="40000"/>
+              </a:srgbClr>
+            </a:solidFill>
+            <a:prstDash val="solid"/>
+          </a:ln>
+        </p:spPr>
+        <p:txBody>
+          <a:bodyPr/>
+          <a:lstStyle/>
+          <a:p>
+            <a:endParaRPr lang="fr-FR"/>
+          </a:p>
+        </p:txBody>
+      </p:sp>
+      <p:sp>
+        <p:nvSpPr>
+          <p:cNvPr id="19" name="Text 17"/>
+          <p:cNvSpPr/>
+          <p:nvPr/>
+        </p:nvSpPr>
+        <p:spPr>
+          <a:xfrm>
+            <a:off x="6903720" y="1783080"/>
+            <a:ext cx="1783080" cy="548640"/>
+          </a:xfrm>
+          <a:prstGeom prst="rect">
+            <a:avLst/>
+          </a:prstGeom>
+          <a:noFill/>
+          <a:ln/>
+        </p:spPr>
+        <p:txBody>
+          <a:bodyPr wrap="square" rtlCol="0" anchor="ctr"/>
+          <a:lstStyle/>
+          <a:p>
+            <a:pPr marL="0" indent="0" algn="ctr">
+              <a:buNone/>
+            </a:pPr>
+            <a:r>
+              <a:rPr lang="en-US" sz="1000" dirty="0">
+                <a:solidFill>
+                  <a:srgbClr val="CBD5E1"/>
+                </a:solidFill>
+                <a:latin typeface="Calibri" pitchFamily="34" charset="0"/>
+                <a:ea typeface="Calibri" pitchFamily="34" charset="-122"/>
+                <a:cs typeface="Calibri" pitchFamily="34" charset="-120"/>
+              </a:rPr>
+              <a:t>Sélection des slots</a:t>
+            </a:r>
+            <a:endParaRPr lang="en-US" sz="1000" dirty="0"/>
+          </a:p>
+        </p:txBody>
+      </p:sp>
+      <p:sp>
+        <p:nvSpPr>
+          <p:cNvPr id="20" name="Shape 18"/>
+          <p:cNvSpPr/>
+          <p:nvPr/>
+        </p:nvSpPr>
+        <p:spPr>
+          <a:xfrm>
+            <a:off x="365760" y="2697480"/>
+            <a:ext cx="1965960" cy="1417320"/>
+          </a:xfrm>
+          <a:prstGeom prst="roundRect">
+            <a:avLst>
+              <a:gd name="adj" fmla="val 6452"/>
+            </a:avLst>
+          </a:prstGeom>
+          <a:solidFill>
+            <a:srgbClr val="0D1526"/>
+          </a:solidFill>
+          <a:ln w="12700">
+            <a:solidFill>
+              <a:srgbClr val="A855F7">
+                <a:alpha val="60000"/>
+              </a:srgbClr>
+            </a:solidFill>
+            <a:prstDash val="solid"/>
+          </a:ln>
+          <a:effectLst>
+            <a:outerShdw blurRad="127000" dist="38100" dir="2700000" algn="bl" rotWithShape="0">
+              <a:srgbClr val="000000">
+                <a:alpha val="30000"/>
+              </a:srgbClr>
+            </a:outerShdw>
+          </a:effectLst>
+        </p:spPr>
+        <p:txBody>
+          <a:bodyPr/>
+          <a:lstStyle/>
+          <a:p>
+            <a:endParaRPr lang="fr-FR"/>
+          </a:p>
+        </p:txBody>
+      </p:sp>
+      <p:sp>
+        <p:nvSpPr>
+          <p:cNvPr id="21" name="Text 19"/>
+          <p:cNvSpPr/>
+          <p:nvPr/>
+        </p:nvSpPr>
+        <p:spPr>
+          <a:xfrm>
+            <a:off x="457200" y="2834640"/>
+            <a:ext cx="1783080" cy="457200"/>
+          </a:xfrm>
+          <a:prstGeom prst="rect">
+            <a:avLst/>
+          </a:prstGeom>
+          <a:noFill/>
+          <a:ln/>
+        </p:spPr>
+        <p:txBody>
+          <a:bodyPr wrap="square" rtlCol="0" anchor="ctr"/>
+          <a:lstStyle/>
+          <a:p>
+            <a:pPr marL="0" indent="0" algn="ctr">
+              <a:buNone/>
+            </a:pPr>
+            <a:r>
+              <a:rPr lang="en-US" sz="1000" b="1" dirty="0">
+                <a:solidFill>
+                  <a:srgbClr val="00E5FF"/>
+                </a:solidFill>
+                <a:latin typeface="Courier New" pitchFamily="34" charset="0"/>
+                <a:ea typeface="Courier New" pitchFamily="34" charset="-122"/>
+                <a:cs typeface="Courier New" pitchFamily="34" charset="-120"/>
+              </a:rPr>
+              <a:t>create_character.html</a:t>
+            </a:r>
+            <a:endParaRPr lang="en-US" sz="1000" dirty="0"/>
+          </a:p>
+        </p:txBody>
+      </p:sp>
+      <p:sp>
+        <p:nvSpPr>
+          <p:cNvPr id="22" name="Shape 20"/>
+          <p:cNvSpPr/>
+          <p:nvPr/>
+        </p:nvSpPr>
+        <p:spPr>
+          <a:xfrm>
+            <a:off x="548640" y="3337560"/>
+            <a:ext cx="1600200" cy="0"/>
+          </a:xfrm>
+          <a:prstGeom prst="line">
+            <a:avLst/>
+          </a:prstGeom>
+          <a:noFill/>
+          <a:ln w="12700">
+            <a:solidFill>
+              <a:srgbClr val="A855F7">
+                <a:alpha val="40000"/>
+              </a:srgbClr>
+            </a:solidFill>
+            <a:prstDash val="solid"/>
+          </a:ln>
+        </p:spPr>
+        <p:txBody>
+          <a:bodyPr/>
+          <a:lstStyle/>
+          <a:p>
+            <a:endParaRPr lang="fr-FR"/>
+          </a:p>
+        </p:txBody>
+      </p:sp>
+      <p:sp>
+        <p:nvSpPr>
+          <p:cNvPr id="23" name="Text 21"/>
+          <p:cNvSpPr/>
+          <p:nvPr/>
+        </p:nvSpPr>
+        <p:spPr>
+          <a:xfrm>
+            <a:off x="457200" y="3429000"/>
+            <a:ext cx="1783080" cy="548640"/>
+          </a:xfrm>
+          <a:prstGeom prst="rect">
+            <a:avLst/>
+          </a:prstGeom>
+          <a:noFill/>
+          <a:ln/>
+        </p:spPr>
+        <p:txBody>
+          <a:bodyPr wrap="square" rtlCol="0" anchor="ctr"/>
+          <a:lstStyle/>
+          <a:p>
+            <a:pPr marL="0" indent="0" algn="ctr">
+              <a:buNone/>
+            </a:pPr>
+            <a:r>
+              <a:rPr lang="en-US" sz="1000" dirty="0">
+                <a:solidFill>
+                  <a:srgbClr val="CBD5E1"/>
+                </a:solidFill>
+                <a:latin typeface="Calibri" pitchFamily="34" charset="0"/>
+                <a:ea typeface="Calibri" pitchFamily="34" charset="-122"/>
+                <a:cs typeface="Calibri" pitchFamily="34" charset="-120"/>
+              </a:rPr>
+              <a:t>Création personnage</a:t>
+            </a:r>
+            <a:endParaRPr lang="en-US" sz="1000" dirty="0"/>
+          </a:p>
+        </p:txBody>
+      </p:sp>
+      <p:sp>
+        <p:nvSpPr>
+          <p:cNvPr id="24" name="Shape 22"/>
+          <p:cNvSpPr/>
+          <p:nvPr/>
+        </p:nvSpPr>
+        <p:spPr>
+          <a:xfrm>
+            <a:off x="2514600" y="2697480"/>
+            <a:ext cx="1965960" cy="1417320"/>
+          </a:xfrm>
+          <a:prstGeom prst="roundRect">
+            <a:avLst>
+              <a:gd name="adj" fmla="val 6452"/>
+            </a:avLst>
+          </a:prstGeom>
+          <a:solidFill>
+            <a:srgbClr val="0D1526"/>
+          </a:solidFill>
+          <a:ln w="12700">
+            <a:solidFill>
+              <a:srgbClr val="A855F7">
+                <a:alpha val="60000"/>
+              </a:srgbClr>
+            </a:solidFill>
+            <a:prstDash val="solid"/>
+          </a:ln>
+          <a:effectLst>
+            <a:outerShdw blurRad="127000" dist="38100" dir="2700000" algn="bl" rotWithShape="0">
+              <a:srgbClr val="000000">
+                <a:alpha val="30000"/>
+              </a:srgbClr>
+            </a:outerShdw>
+          </a:effectLst>
+        </p:spPr>
+        <p:txBody>
+          <a:bodyPr/>
+          <a:lstStyle/>
+          <a:p>
+            <a:endParaRPr lang="fr-FR"/>
+          </a:p>
+        </p:txBody>
+      </p:sp>
+      <p:sp>
+        <p:nvSpPr>
+          <p:cNvPr id="25" name="Text 23"/>
+          <p:cNvSpPr/>
+          <p:nvPr/>
+        </p:nvSpPr>
+        <p:spPr>
+          <a:xfrm>
+            <a:off x="2606040" y="2834640"/>
+            <a:ext cx="1783080" cy="457200"/>
+          </a:xfrm>
+          <a:prstGeom prst="rect">
+            <a:avLst/>
+          </a:prstGeom>
+          <a:noFill/>
+          <a:ln/>
+        </p:spPr>
+        <p:txBody>
+          <a:bodyPr wrap="square" rtlCol="0" anchor="ctr"/>
+          <a:lstStyle/>
+          <a:p>
+            <a:pPr marL="0" indent="0" algn="ctr">
+              <a:buNone/>
+            </a:pPr>
+            <a:r>
+              <a:rPr lang="en-US" sz="1000" b="1" dirty="0">
+                <a:solidFill>
+                  <a:srgbClr val="00E5FF"/>
+                </a:solidFill>
+                <a:latin typeface="Courier New" pitchFamily="34" charset="0"/>
+                <a:ea typeface="Courier New" pitchFamily="34" charset="-122"/>
+                <a:cs typeface="Courier New" pitchFamily="34" charset="-120"/>
+              </a:rPr>
+              <a:t>edit_character.html</a:t>
+            </a:r>
+            <a:endParaRPr lang="en-US" sz="1000" dirty="0"/>
+          </a:p>
+        </p:txBody>
+      </p:sp>
+      <p:sp>
+        <p:nvSpPr>
+          <p:cNvPr id="26" name="Shape 24"/>
+          <p:cNvSpPr/>
+          <p:nvPr/>
+        </p:nvSpPr>
+        <p:spPr>
+          <a:xfrm>
+            <a:off x="2697480" y="3337560"/>
+            <a:ext cx="1600200" cy="0"/>
+          </a:xfrm>
+          <a:prstGeom prst="line">
+            <a:avLst/>
+          </a:prstGeom>
+          <a:noFill/>
+          <a:ln w="12700">
+            <a:solidFill>
+              <a:srgbClr val="A855F7">
+                <a:alpha val="40000"/>
+              </a:srgbClr>
+            </a:solidFill>
+            <a:prstDash val="solid"/>
+          </a:ln>
+        </p:spPr>
+        <p:txBody>
+          <a:bodyPr/>
+          <a:lstStyle/>
+          <a:p>
+            <a:endParaRPr lang="fr-FR"/>
+          </a:p>
+        </p:txBody>
+      </p:sp>
+      <p:sp>
+        <p:nvSpPr>
+          <p:cNvPr id="27" name="Text 25"/>
+          <p:cNvSpPr/>
+          <p:nvPr/>
+        </p:nvSpPr>
+        <p:spPr>
+          <a:xfrm>
+            <a:off x="2606040" y="3429000"/>
+            <a:ext cx="1783080" cy="548640"/>
+          </a:xfrm>
+          <a:prstGeom prst="rect">
+            <a:avLst/>
+          </a:prstGeom>
+          <a:noFill/>
+          <a:ln/>
+        </p:spPr>
+        <p:txBody>
+          <a:bodyPr wrap="square" rtlCol="0" anchor="ctr"/>
+          <a:lstStyle/>
+          <a:p>
+            <a:pPr marL="0" indent="0" algn="ctr">
+              <a:buNone/>
+            </a:pPr>
+            <a:r>
+              <a:rPr lang="en-US" sz="1000" dirty="0">
+                <a:solidFill>
+                  <a:srgbClr val="CBD5E1"/>
+                </a:solidFill>
+                <a:latin typeface="Calibri" pitchFamily="34" charset="0"/>
+                <a:ea typeface="Calibri" pitchFamily="34" charset="-122"/>
+                <a:cs typeface="Calibri" pitchFamily="34" charset="-120"/>
+              </a:rPr>
+              <a:t>Modification personnage</a:t>
+            </a:r>
+            <a:endParaRPr lang="en-US" sz="1000" dirty="0"/>
+          </a:p>
+        </p:txBody>
+      </p:sp>
+      <p:sp>
+        <p:nvSpPr>
+          <p:cNvPr id="28" name="Shape 26"/>
+          <p:cNvSpPr/>
+          <p:nvPr/>
+        </p:nvSpPr>
+        <p:spPr>
+          <a:xfrm>
+            <a:off x="4663440" y="2697480"/>
+            <a:ext cx="1965960" cy="1417320"/>
+          </a:xfrm>
+          <a:prstGeom prst="roundRect">
+            <a:avLst>
+              <a:gd name="adj" fmla="val 6452"/>
+            </a:avLst>
+          </a:prstGeom>
+          <a:solidFill>
+            <a:srgbClr val="0D1526"/>
+          </a:solidFill>
+          <a:ln w="12700">
+            <a:solidFill>
+              <a:srgbClr val="A855F7">
+                <a:alpha val="60000"/>
+              </a:srgbClr>
+            </a:solidFill>
+            <a:prstDash val="solid"/>
+          </a:ln>
+          <a:effectLst>
+            <a:outerShdw blurRad="127000" dist="38100" dir="2700000" algn="bl" rotWithShape="0">
+              <a:srgbClr val="000000">
+                <a:alpha val="30000"/>
+              </a:srgbClr>
+            </a:outerShdw>
+          </a:effectLst>
+        </p:spPr>
+        <p:txBody>
+          <a:bodyPr/>
+          <a:lstStyle/>
+          <a:p>
+            <a:endParaRPr lang="fr-FR"/>
+          </a:p>
+        </p:txBody>
+      </p:sp>
+      <p:sp>
+        <p:nvSpPr>
+          <p:cNvPr id="29" name="Text 27"/>
+          <p:cNvSpPr/>
+          <p:nvPr/>
+        </p:nvSpPr>
+        <p:spPr>
+          <a:xfrm>
+            <a:off x="4754880" y="2834640"/>
+            <a:ext cx="1783080" cy="457200"/>
+          </a:xfrm>
+          <a:prstGeom prst="rect">
+            <a:avLst/>
+          </a:prstGeom>
+          <a:noFill/>
+          <a:ln/>
+        </p:spPr>
+        <p:txBody>
+          <a:bodyPr wrap="square" rtlCol="0" anchor="ctr"/>
+          <a:lstStyle/>
+          <a:p>
+            <a:pPr marL="0" indent="0" algn="ctr">
+              <a:buNone/>
+            </a:pPr>
+            <a:r>
+              <a:rPr lang="en-US" sz="1000" b="1" dirty="0">
+                <a:solidFill>
+                  <a:srgbClr val="00E5FF"/>
+                </a:solidFill>
+                <a:latin typeface="Courier New" pitchFamily="34" charset="0"/>
+                <a:ea typeface="Courier New" pitchFamily="34" charset="-122"/>
+                <a:cs typeface="Courier New" pitchFamily="34" charset="-120"/>
+              </a:rPr>
+              <a:t>settings.html</a:t>
+            </a:r>
+            <a:endParaRPr lang="en-US" sz="1000" dirty="0"/>
+          </a:p>
+        </p:txBody>
+      </p:sp>
+      <p:sp>
+        <p:nvSpPr>
+          <p:cNvPr id="30" name="Shape 28"/>
+          <p:cNvSpPr/>
+          <p:nvPr/>
+        </p:nvSpPr>
+        <p:spPr>
+          <a:xfrm>
+            <a:off x="4846320" y="3337560"/>
+            <a:ext cx="1600200" cy="0"/>
+          </a:xfrm>
+          <a:prstGeom prst="line">
+            <a:avLst/>
+          </a:prstGeom>
+          <a:noFill/>
+          <a:ln w="12700">
+            <a:solidFill>
+              <a:srgbClr val="A855F7">
+                <a:alpha val="40000"/>
+              </a:srgbClr>
+            </a:solidFill>
+            <a:prstDash val="solid"/>
+          </a:ln>
+        </p:spPr>
+        <p:txBody>
+          <a:bodyPr/>
+          <a:lstStyle/>
+          <a:p>
+            <a:endParaRPr lang="fr-FR"/>
+          </a:p>
+        </p:txBody>
+      </p:sp>
+      <p:sp>
+        <p:nvSpPr>
+          <p:cNvPr id="31" name="Text 29"/>
+          <p:cNvSpPr/>
+          <p:nvPr/>
+        </p:nvSpPr>
+        <p:spPr>
+          <a:xfrm>
+            <a:off x="4754880" y="3429000"/>
+            <a:ext cx="1783080" cy="548640"/>
+          </a:xfrm>
+          <a:prstGeom prst="rect">
+            <a:avLst/>
+          </a:prstGeom>
+          <a:noFill/>
+          <a:ln/>
+        </p:spPr>
+        <p:txBody>
+          <a:bodyPr wrap="square" rtlCol="0" anchor="ctr"/>
+          <a:lstStyle/>
+          <a:p>
+            <a:pPr marL="0" indent="0" algn="ctr">
+              <a:buNone/>
+            </a:pPr>
+            <a:r>
+              <a:rPr lang="en-US" sz="1000" dirty="0">
+                <a:solidFill>
+                  <a:srgbClr val="CBD5E1"/>
+                </a:solidFill>
+                <a:latin typeface="Calibri" pitchFamily="34" charset="0"/>
+                <a:ea typeface="Calibri" pitchFamily="34" charset="-122"/>
+                <a:cs typeface="Calibri" pitchFamily="34" charset="-120"/>
+              </a:rPr>
+              <a:t>Audio · Langue · Contrôles</a:t>
+            </a:r>
+            <a:endParaRPr lang="en-US" sz="1000" dirty="0"/>
+          </a:p>
+        </p:txBody>
+      </p:sp>
+      <p:sp>
+        <p:nvSpPr>
+          <p:cNvPr id="32" name="Shape 30"/>
+          <p:cNvSpPr/>
+          <p:nvPr/>
+        </p:nvSpPr>
+        <p:spPr>
+          <a:xfrm>
+            <a:off x="6812280" y="2697480"/>
+            <a:ext cx="1965960" cy="1417320"/>
+          </a:xfrm>
+          <a:prstGeom prst="roundRect">
+            <a:avLst>
+              <a:gd name="adj" fmla="val 6452"/>
+            </a:avLst>
+          </a:prstGeom>
+          <a:solidFill>
+            <a:srgbClr val="0D1526"/>
+          </a:solidFill>
+          <a:ln w="12700">
+            <a:solidFill>
+              <a:srgbClr val="A855F7">
+                <a:alpha val="60000"/>
+              </a:srgbClr>
+            </a:solidFill>
+            <a:prstDash val="solid"/>
+          </a:ln>
+          <a:effectLst>
+            <a:outerShdw blurRad="127000" dist="38100" dir="2700000" algn="bl" rotWithShape="0">
+              <a:srgbClr val="000000">
+                <a:alpha val="30000"/>
+              </a:srgbClr>
+            </a:outerShdw>
+          </a:effectLst>
+        </p:spPr>
+        <p:txBody>
+          <a:bodyPr/>
+          <a:lstStyle/>
+          <a:p>
+            <a:endParaRPr lang="fr-FR"/>
+          </a:p>
+        </p:txBody>
+      </p:sp>
+      <p:sp>
+        <p:nvSpPr>
+          <p:cNvPr id="33" name="Text 31"/>
+          <p:cNvSpPr/>
+          <p:nvPr/>
+        </p:nvSpPr>
+        <p:spPr>
+          <a:xfrm>
+            <a:off x="6903720" y="2834640"/>
+            <a:ext cx="1783080" cy="457200"/>
+          </a:xfrm>
+          <a:prstGeom prst="rect">
+            <a:avLst/>
+          </a:prstGeom>
+          <a:noFill/>
+          <a:ln/>
+        </p:spPr>
+        <p:txBody>
+          <a:bodyPr wrap="square" rtlCol="0" anchor="ctr"/>
+          <a:lstStyle/>
+          <a:p>
+            <a:pPr marL="0" indent="0" algn="ctr">
+              <a:buNone/>
+            </a:pPr>
+            <a:r>
+              <a:rPr lang="en-US" sz="1000" b="1" dirty="0">
+                <a:solidFill>
+                  <a:srgbClr val="00E5FF"/>
+                </a:solidFill>
+                <a:latin typeface="Courier New" pitchFamily="34" charset="0"/>
+                <a:ea typeface="Courier New" pitchFamily="34" charset="-122"/>
+                <a:cs typeface="Courier New" pitchFamily="34" charset="-120"/>
+              </a:rPr>
+              <a:t>guide.html</a:t>
+            </a:r>
+            <a:endParaRPr lang="en-US" sz="1000" dirty="0"/>
+          </a:p>
+        </p:txBody>
+      </p:sp>
+      <p:sp>
+        <p:nvSpPr>
+          <p:cNvPr id="34" name="Shape 32"/>
+          <p:cNvSpPr/>
+          <p:nvPr/>
+        </p:nvSpPr>
+        <p:spPr>
+          <a:xfrm>
+            <a:off x="6995160" y="3337560"/>
+            <a:ext cx="1600200" cy="0"/>
+          </a:xfrm>
+          <a:prstGeom prst="line">
+            <a:avLst/>
+          </a:prstGeom>
+          <a:noFill/>
+          <a:ln w="12700">
+            <a:solidFill>
+              <a:srgbClr val="A855F7">
+                <a:alpha val="40000"/>
+              </a:srgbClr>
+            </a:solidFill>
+            <a:prstDash val="solid"/>
+          </a:ln>
+        </p:spPr>
+        <p:txBody>
+          <a:bodyPr/>
+          <a:lstStyle/>
+          <a:p>
+            <a:endParaRPr lang="fr-FR"/>
+          </a:p>
+        </p:txBody>
+      </p:sp>
+      <p:sp>
+        <p:nvSpPr>
+          <p:cNvPr id="35" name="Text 33"/>
+          <p:cNvSpPr/>
+          <p:nvPr/>
+        </p:nvSpPr>
+        <p:spPr>
+          <a:xfrm>
+            <a:off x="6903720" y="3429000"/>
+            <a:ext cx="1783080" cy="548640"/>
+          </a:xfrm>
+          <a:prstGeom prst="rect">
+            <a:avLst/>
+          </a:prstGeom>
+          <a:noFill/>
+          <a:ln/>
+        </p:spPr>
+        <p:txBody>
+          <a:bodyPr wrap="square" rtlCol="0" anchor="ctr"/>
+          <a:lstStyle/>
+          <a:p>
+            <a:pPr marL="0" indent="0" algn="ctr">
+              <a:buNone/>
+            </a:pPr>
+            <a:r>
+              <a:rPr lang="en-US" sz="1000" dirty="0">
+                <a:solidFill>
+                  <a:srgbClr val="CBD5E1"/>
+                </a:solidFill>
+                <a:latin typeface="Calibri" pitchFamily="34" charset="0"/>
+                <a:ea typeface="Calibri" pitchFamily="34" charset="-122"/>
+                <a:cs typeface="Calibri" pitchFamily="34" charset="-120"/>
+              </a:rPr>
+              <a:t>Guide du jeu</a:t>
+            </a:r>
+            <a:endParaRPr lang="en-US" sz="1000" dirty="0"/>
+          </a:p>
+        </p:txBody>
+      </p:sp>
+    </p:spTree>
+  </p:cSld>
+  <p:clrMapOvr>
+    <a:masterClrMapping/>
+  </p:clrMapOvr>
+</p:sld>
+</file>
+
+<file path=ppt/slides/slide11.xml><?xml version="1.0" encoding="utf-8"?>
+<p:sld xmlns:a="http://schemas.openxmlformats.org/drawingml/2006/main" xmlns:r="http://schemas.openxmlformats.org/officeDocument/2006/relationships" xmlns:p="http://schemas.openxmlformats.org/presentationml/2006/main">
   <p:cSld>
     <p:bg>
       <p:bgPr>
@@ -3727,7 +5590,1827 @@
 </p:sld>
 </file>
 
-<file path=ppt/slides/slide11.xml><?xml version="1.0" encoding="utf-8"?>
+<file path=ppt/slides/slide12.xml><?xml version="1.0" encoding="utf-8"?>
+<p:sld xmlns:a="http://schemas.openxmlformats.org/drawingml/2006/main" xmlns:r="http://schemas.openxmlformats.org/officeDocument/2006/relationships" xmlns:p="http://schemas.openxmlformats.org/presentationml/2006/main">
+  <p:cSld>
+    <p:bg>
+      <p:bgPr>
+        <a:solidFill>
+          <a:srgbClr val="070B14"/>
+        </a:solidFill>
+        <a:effectLst/>
+      </p:bgPr>
+    </p:bg>
+    <p:spTree>
+      <p:nvGrpSpPr>
+        <p:cNvPr id="1" name="">
+          <a:extLst>
+            <a:ext uri="{FF2B5EF4-FFF2-40B4-BE49-F238E27FC236}">
+              <a16:creationId xmlns:a16="http://schemas.microsoft.com/office/drawing/2014/main" id="{5AE02FCB-5624-4F9C-4975-65C3D1EB5932}"/>
+            </a:ext>
+          </a:extLst>
+        </p:cNvPr>
+        <p:cNvGrpSpPr/>
+        <p:nvPr/>
+      </p:nvGrpSpPr>
+      <p:grpSpPr>
+        <a:xfrm>
+          <a:off x="0" y="0"/>
+          <a:ext cx="0" cy="0"/>
+          <a:chOff x="0" y="0"/>
+          <a:chExt cx="0" cy="0"/>
+        </a:xfrm>
+      </p:grpSpPr>
+      <p:sp>
+        <p:nvSpPr>
+          <p:cNvPr id="2" name="Shape 0">
+            <a:extLst>
+              <a:ext uri="{FF2B5EF4-FFF2-40B4-BE49-F238E27FC236}">
+                <a16:creationId xmlns:a16="http://schemas.microsoft.com/office/drawing/2014/main" id="{6F9E0ADA-9096-412D-4C2B-BBD45BF4AD61}"/>
+              </a:ext>
+            </a:extLst>
+          </p:cNvPr>
+          <p:cNvSpPr/>
+          <p:nvPr/>
+        </p:nvSpPr>
+        <p:spPr>
+          <a:xfrm>
+            <a:off x="365760" y="201168"/>
+            <a:ext cx="54864" cy="548640"/>
+          </a:xfrm>
+          <a:prstGeom prst="roundRect">
+            <a:avLst>
+              <a:gd name="adj" fmla="val 50000"/>
+            </a:avLst>
+          </a:prstGeom>
+          <a:solidFill>
+            <a:srgbClr val="00E5FF"/>
+          </a:solidFill>
+          <a:ln w="12700">
+            <a:solidFill>
+              <a:srgbClr val="00E5FF"/>
+            </a:solidFill>
+            <a:prstDash val="solid"/>
+          </a:ln>
+        </p:spPr>
+        <p:txBody>
+          <a:bodyPr/>
+          <a:lstStyle/>
+          <a:p>
+            <a:endParaRPr lang="fr-FR"/>
+          </a:p>
+        </p:txBody>
+      </p:sp>
+      <p:sp>
+        <p:nvSpPr>
+          <p:cNvPr id="3" name="Text 1">
+            <a:extLst>
+              <a:ext uri="{FF2B5EF4-FFF2-40B4-BE49-F238E27FC236}">
+                <a16:creationId xmlns:a16="http://schemas.microsoft.com/office/drawing/2014/main" id="{63EBB1A5-98D5-6F68-B42B-B0F1E0AC995B}"/>
+              </a:ext>
+            </a:extLst>
+          </p:cNvPr>
+          <p:cNvSpPr/>
+          <p:nvPr/>
+        </p:nvSpPr>
+        <p:spPr>
+          <a:xfrm>
+            <a:off x="548640" y="137160"/>
+            <a:ext cx="8229600" cy="685800"/>
+          </a:xfrm>
+          <a:prstGeom prst="rect">
+            <a:avLst/>
+          </a:prstGeom>
+          <a:noFill/>
+          <a:ln/>
+        </p:spPr>
+        <p:txBody>
+          <a:bodyPr wrap="square" lIns="0" tIns="0" rIns="0" bIns="0" rtlCol="0" anchor="ctr"/>
+          <a:lstStyle/>
+          <a:p>
+            <a:pPr marL="0" indent="0" algn="l">
+              <a:buNone/>
+            </a:pPr>
+            <a:r>
+              <a:rPr lang="en-US" sz="2800" b="1" dirty="0">
+                <a:solidFill>
+                  <a:srgbClr val="FFFFFF"/>
+                </a:solidFill>
+                <a:latin typeface="Calibri" pitchFamily="34" charset="0"/>
+                <a:ea typeface="Calibri" pitchFamily="34" charset="-122"/>
+                <a:cs typeface="Calibri" pitchFamily="34" charset="-120"/>
+              </a:rPr>
+              <a:t>Installation du </a:t>
+            </a:r>
+            <a:r>
+              <a:rPr lang="en-US" sz="2800" b="1" dirty="0" err="1">
+                <a:solidFill>
+                  <a:srgbClr val="FFFFFF"/>
+                </a:solidFill>
+                <a:latin typeface="Calibri" pitchFamily="34" charset="0"/>
+                <a:ea typeface="Calibri" pitchFamily="34" charset="-122"/>
+                <a:cs typeface="Calibri" pitchFamily="34" charset="-120"/>
+              </a:rPr>
+              <a:t>projet</a:t>
+            </a:r>
+            <a:r>
+              <a:rPr lang="en-US" sz="2800" b="1" dirty="0">
+                <a:solidFill>
+                  <a:srgbClr val="FFFFFF"/>
+                </a:solidFill>
+                <a:latin typeface="Calibri" pitchFamily="34" charset="0"/>
+                <a:ea typeface="Calibri" pitchFamily="34" charset="-122"/>
+                <a:cs typeface="Calibri" pitchFamily="34" charset="-120"/>
+              </a:rPr>
+              <a:t> </a:t>
+            </a:r>
+            <a:r>
+              <a:rPr lang="en-US" sz="2800" b="1" dirty="0" err="1">
+                <a:solidFill>
+                  <a:srgbClr val="FFFFFF"/>
+                </a:solidFill>
+                <a:latin typeface="Calibri" pitchFamily="34" charset="0"/>
+                <a:ea typeface="Calibri" pitchFamily="34" charset="-122"/>
+                <a:cs typeface="Calibri" pitchFamily="34" charset="-120"/>
+              </a:rPr>
+              <a:t>en</a:t>
+            </a:r>
+            <a:r>
+              <a:rPr lang="en-US" sz="2800" b="1" dirty="0">
+                <a:solidFill>
+                  <a:srgbClr val="FFFFFF"/>
+                </a:solidFill>
+                <a:latin typeface="Calibri" pitchFamily="34" charset="0"/>
+                <a:ea typeface="Calibri" pitchFamily="34" charset="-122"/>
+                <a:cs typeface="Calibri" pitchFamily="34" charset="-120"/>
+              </a:rPr>
+              <a:t> local</a:t>
+            </a:r>
+            <a:endParaRPr lang="en-US" sz="2800" dirty="0"/>
+          </a:p>
+        </p:txBody>
+      </p:sp>
+      <p:sp>
+        <p:nvSpPr>
+          <p:cNvPr id="4" name="Shape 2">
+            <a:extLst>
+              <a:ext uri="{FF2B5EF4-FFF2-40B4-BE49-F238E27FC236}">
+                <a16:creationId xmlns:a16="http://schemas.microsoft.com/office/drawing/2014/main" id="{4BD179DB-988E-6774-149C-C83486EBA072}"/>
+              </a:ext>
+            </a:extLst>
+          </p:cNvPr>
+          <p:cNvSpPr/>
+          <p:nvPr/>
+        </p:nvSpPr>
+        <p:spPr>
+          <a:xfrm>
+            <a:off x="365760" y="1051560"/>
+            <a:ext cx="4069080" cy="804672"/>
+          </a:xfrm>
+          <a:prstGeom prst="roundRect">
+            <a:avLst>
+              <a:gd name="adj" fmla="val 9091"/>
+            </a:avLst>
+          </a:prstGeom>
+          <a:solidFill>
+            <a:srgbClr val="0D1526"/>
+          </a:solidFill>
+          <a:ln w="12700">
+            <a:solidFill>
+              <a:srgbClr val="A855F7">
+                <a:alpha val="60000"/>
+              </a:srgbClr>
+            </a:solidFill>
+            <a:prstDash val="solid"/>
+          </a:ln>
+          <a:effectLst>
+            <a:outerShdw blurRad="127000" dist="38100" dir="2700000" algn="bl" rotWithShape="0">
+              <a:srgbClr val="000000">
+                <a:alpha val="25000"/>
+              </a:srgbClr>
+            </a:outerShdw>
+          </a:effectLst>
+        </p:spPr>
+        <p:txBody>
+          <a:bodyPr/>
+          <a:lstStyle/>
+          <a:p>
+            <a:endParaRPr lang="fr-FR"/>
+          </a:p>
+        </p:txBody>
+      </p:sp>
+      <p:sp>
+        <p:nvSpPr>
+          <p:cNvPr id="5" name="Shape 3">
+            <a:extLst>
+              <a:ext uri="{FF2B5EF4-FFF2-40B4-BE49-F238E27FC236}">
+                <a16:creationId xmlns:a16="http://schemas.microsoft.com/office/drawing/2014/main" id="{B94A17CB-58A3-00B1-378C-6E23B40A4809}"/>
+              </a:ext>
+            </a:extLst>
+          </p:cNvPr>
+          <p:cNvSpPr/>
+          <p:nvPr/>
+        </p:nvSpPr>
+        <p:spPr>
+          <a:xfrm>
+            <a:off x="475488" y="1252728"/>
+            <a:ext cx="402336" cy="402336"/>
+          </a:xfrm>
+          <a:prstGeom prst="ellipse">
+            <a:avLst/>
+          </a:prstGeom>
+          <a:solidFill>
+            <a:srgbClr val="A855F7">
+              <a:alpha val="80000"/>
+            </a:srgbClr>
+          </a:solidFill>
+          <a:ln w="12700">
+            <a:solidFill>
+              <a:srgbClr val="A855F7"/>
+            </a:solidFill>
+            <a:prstDash val="solid"/>
+          </a:ln>
+        </p:spPr>
+        <p:txBody>
+          <a:bodyPr/>
+          <a:lstStyle/>
+          <a:p>
+            <a:endParaRPr lang="fr-FR"/>
+          </a:p>
+        </p:txBody>
+      </p:sp>
+      <p:sp>
+        <p:nvSpPr>
+          <p:cNvPr id="6" name="Text 4">
+            <a:extLst>
+              <a:ext uri="{FF2B5EF4-FFF2-40B4-BE49-F238E27FC236}">
+                <a16:creationId xmlns:a16="http://schemas.microsoft.com/office/drawing/2014/main" id="{15034B4A-5358-370C-F962-49FF9950F2F6}"/>
+              </a:ext>
+            </a:extLst>
+          </p:cNvPr>
+          <p:cNvSpPr/>
+          <p:nvPr/>
+        </p:nvSpPr>
+        <p:spPr>
+          <a:xfrm>
+            <a:off x="987552" y="1280160"/>
+            <a:ext cx="3337560" cy="347472"/>
+          </a:xfrm>
+          <a:prstGeom prst="rect">
+            <a:avLst/>
+          </a:prstGeom>
+          <a:noFill/>
+          <a:ln/>
+        </p:spPr>
+        <p:txBody>
+          <a:bodyPr wrap="square" rtlCol="0" anchor="ctr"/>
+          <a:lstStyle/>
+          <a:p>
+            <a:pPr marL="0" indent="0">
+              <a:buNone/>
+            </a:pPr>
+            <a:r>
+              <a:rPr lang="en-US" sz="1400" b="1" dirty="0" err="1">
+                <a:solidFill>
+                  <a:srgbClr val="FFFFFF"/>
+                </a:solidFill>
+                <a:latin typeface="Calibri" pitchFamily="34" charset="0"/>
+                <a:ea typeface="Calibri" pitchFamily="34" charset="-122"/>
+                <a:cs typeface="Calibri" pitchFamily="34" charset="-120"/>
+              </a:rPr>
+              <a:t>Clonage</a:t>
+            </a:r>
+            <a:r>
+              <a:rPr lang="en-US" sz="1400" b="1" dirty="0">
+                <a:solidFill>
+                  <a:srgbClr val="FFFFFF"/>
+                </a:solidFill>
+                <a:latin typeface="Calibri" pitchFamily="34" charset="0"/>
+                <a:ea typeface="Calibri" pitchFamily="34" charset="-122"/>
+                <a:cs typeface="Calibri" pitchFamily="34" charset="-120"/>
+              </a:rPr>
+              <a:t> du </a:t>
+            </a:r>
+            <a:r>
+              <a:rPr lang="en-US" sz="1400" b="1" dirty="0" err="1">
+                <a:solidFill>
+                  <a:srgbClr val="FFFFFF"/>
+                </a:solidFill>
+                <a:latin typeface="Calibri" pitchFamily="34" charset="0"/>
+                <a:ea typeface="Calibri" pitchFamily="34" charset="-122"/>
+                <a:cs typeface="Calibri" pitchFamily="34" charset="-120"/>
+              </a:rPr>
+              <a:t>dépôt</a:t>
+            </a:r>
+            <a:endParaRPr lang="en-US" sz="1400" dirty="0"/>
+          </a:p>
+        </p:txBody>
+      </p:sp>
+      <p:sp>
+        <p:nvSpPr>
+          <p:cNvPr id="8" name="Shape 6">
+            <a:extLst>
+              <a:ext uri="{FF2B5EF4-FFF2-40B4-BE49-F238E27FC236}">
+                <a16:creationId xmlns:a16="http://schemas.microsoft.com/office/drawing/2014/main" id="{CB84F6DC-1FAF-BE27-90A0-19E004FDBA71}"/>
+              </a:ext>
+            </a:extLst>
+          </p:cNvPr>
+          <p:cNvSpPr/>
+          <p:nvPr/>
+        </p:nvSpPr>
+        <p:spPr>
+          <a:xfrm>
+            <a:off x="365760" y="2011680"/>
+            <a:ext cx="4069080" cy="804672"/>
+          </a:xfrm>
+          <a:prstGeom prst="roundRect">
+            <a:avLst>
+              <a:gd name="adj" fmla="val 9091"/>
+            </a:avLst>
+          </a:prstGeom>
+          <a:solidFill>
+            <a:srgbClr val="0D1526"/>
+          </a:solidFill>
+          <a:ln w="12700">
+            <a:solidFill>
+              <a:srgbClr val="00E5FF">
+                <a:alpha val="60000"/>
+              </a:srgbClr>
+            </a:solidFill>
+            <a:prstDash val="solid"/>
+          </a:ln>
+          <a:effectLst>
+            <a:outerShdw blurRad="127000" dist="38100" dir="2700000" algn="bl" rotWithShape="0">
+              <a:srgbClr val="000000">
+                <a:alpha val="25000"/>
+              </a:srgbClr>
+            </a:outerShdw>
+          </a:effectLst>
+        </p:spPr>
+        <p:txBody>
+          <a:bodyPr/>
+          <a:lstStyle/>
+          <a:p>
+            <a:endParaRPr lang="fr-FR"/>
+          </a:p>
+        </p:txBody>
+      </p:sp>
+      <p:sp>
+        <p:nvSpPr>
+          <p:cNvPr id="9" name="Shape 7">
+            <a:extLst>
+              <a:ext uri="{FF2B5EF4-FFF2-40B4-BE49-F238E27FC236}">
+                <a16:creationId xmlns:a16="http://schemas.microsoft.com/office/drawing/2014/main" id="{AB9437E7-4AA7-D96F-3E4A-0A4348DC4922}"/>
+              </a:ext>
+            </a:extLst>
+          </p:cNvPr>
+          <p:cNvSpPr/>
+          <p:nvPr/>
+        </p:nvSpPr>
+        <p:spPr>
+          <a:xfrm>
+            <a:off x="475488" y="2212848"/>
+            <a:ext cx="402336" cy="402336"/>
+          </a:xfrm>
+          <a:prstGeom prst="ellipse">
+            <a:avLst/>
+          </a:prstGeom>
+          <a:solidFill>
+            <a:srgbClr val="00E5FF">
+              <a:alpha val="80000"/>
+            </a:srgbClr>
+          </a:solidFill>
+          <a:ln w="12700">
+            <a:solidFill>
+              <a:srgbClr val="00E5FF"/>
+            </a:solidFill>
+            <a:prstDash val="solid"/>
+          </a:ln>
+        </p:spPr>
+        <p:txBody>
+          <a:bodyPr/>
+          <a:lstStyle/>
+          <a:p>
+            <a:endParaRPr lang="fr-FR"/>
+          </a:p>
+        </p:txBody>
+      </p:sp>
+      <p:sp>
+        <p:nvSpPr>
+          <p:cNvPr id="10" name="Text 8">
+            <a:extLst>
+              <a:ext uri="{FF2B5EF4-FFF2-40B4-BE49-F238E27FC236}">
+                <a16:creationId xmlns:a16="http://schemas.microsoft.com/office/drawing/2014/main" id="{ABAE440C-E767-E819-38C7-BC6835C1AA82}"/>
+              </a:ext>
+            </a:extLst>
+          </p:cNvPr>
+          <p:cNvSpPr/>
+          <p:nvPr/>
+        </p:nvSpPr>
+        <p:spPr>
+          <a:xfrm>
+            <a:off x="987552" y="2066544"/>
+            <a:ext cx="3337560" cy="347472"/>
+          </a:xfrm>
+          <a:prstGeom prst="rect">
+            <a:avLst/>
+          </a:prstGeom>
+          <a:noFill/>
+          <a:ln/>
+        </p:spPr>
+        <p:txBody>
+          <a:bodyPr wrap="square" rtlCol="0" anchor="ctr"/>
+          <a:lstStyle/>
+          <a:p>
+            <a:pPr marL="0" indent="0">
+              <a:buNone/>
+            </a:pPr>
+            <a:r>
+              <a:rPr lang="en-US" sz="1400" b="1" dirty="0">
+                <a:solidFill>
+                  <a:srgbClr val="FFFFFF"/>
+                </a:solidFill>
+                <a:latin typeface="Calibri" pitchFamily="34" charset="0"/>
+                <a:ea typeface="Calibri" pitchFamily="34" charset="-122"/>
+                <a:cs typeface="Calibri" pitchFamily="34" charset="-120"/>
+              </a:rPr>
+              <a:t>Base de donnée</a:t>
+            </a:r>
+            <a:endParaRPr lang="en-US" sz="1400" dirty="0"/>
+          </a:p>
+        </p:txBody>
+      </p:sp>
+      <p:sp>
+        <p:nvSpPr>
+          <p:cNvPr id="11" name="Text 9">
+            <a:extLst>
+              <a:ext uri="{FF2B5EF4-FFF2-40B4-BE49-F238E27FC236}">
+                <a16:creationId xmlns:a16="http://schemas.microsoft.com/office/drawing/2014/main" id="{97F826DE-7D42-CC59-D072-BF1CB2C93C32}"/>
+              </a:ext>
+            </a:extLst>
+          </p:cNvPr>
+          <p:cNvSpPr/>
+          <p:nvPr/>
+        </p:nvSpPr>
+        <p:spPr>
+          <a:xfrm>
+            <a:off x="987552" y="2414016"/>
+            <a:ext cx="3337560" cy="347472"/>
+          </a:xfrm>
+          <a:prstGeom prst="rect">
+            <a:avLst/>
+          </a:prstGeom>
+          <a:noFill/>
+          <a:ln/>
+        </p:spPr>
+        <p:txBody>
+          <a:bodyPr wrap="square" rtlCol="0" anchor="ctr"/>
+          <a:lstStyle/>
+          <a:p>
+            <a:pPr marL="0" indent="0">
+              <a:buNone/>
+            </a:pPr>
+            <a:r>
+              <a:rPr lang="en-US" sz="1100" dirty="0" err="1">
+                <a:solidFill>
+                  <a:srgbClr val="CBD5E1"/>
+                </a:solidFill>
+                <a:latin typeface="Calibri" pitchFamily="34" charset="0"/>
+                <a:ea typeface="Calibri" pitchFamily="34" charset="-122"/>
+                <a:cs typeface="Calibri" pitchFamily="34" charset="-120"/>
+              </a:rPr>
+              <a:t>Créer</a:t>
+            </a:r>
+            <a:r>
+              <a:rPr lang="en-US" sz="1100" dirty="0">
+                <a:solidFill>
+                  <a:srgbClr val="CBD5E1"/>
+                </a:solidFill>
+                <a:latin typeface="Calibri" pitchFamily="34" charset="0"/>
+                <a:ea typeface="Calibri" pitchFamily="34" charset="-122"/>
+                <a:cs typeface="Calibri" pitchFamily="34" charset="-120"/>
+              </a:rPr>
+              <a:t> la BDD et </a:t>
+            </a:r>
+            <a:r>
+              <a:rPr lang="en-US" sz="1100" dirty="0" err="1">
+                <a:solidFill>
+                  <a:srgbClr val="CBD5E1"/>
+                </a:solidFill>
+                <a:latin typeface="Calibri" pitchFamily="34" charset="0"/>
+                <a:ea typeface="Calibri" pitchFamily="34" charset="-122"/>
+                <a:cs typeface="Calibri" pitchFamily="34" charset="-120"/>
+              </a:rPr>
+              <a:t>l’utilisateur</a:t>
+            </a:r>
+            <a:r>
+              <a:rPr lang="en-US" sz="1100" dirty="0">
+                <a:solidFill>
+                  <a:srgbClr val="CBD5E1"/>
+                </a:solidFill>
+                <a:latin typeface="Calibri" pitchFamily="34" charset="0"/>
+                <a:ea typeface="Calibri" pitchFamily="34" charset="-122"/>
+                <a:cs typeface="Calibri" pitchFamily="34" charset="-120"/>
+              </a:rPr>
+              <a:t>, </a:t>
+            </a:r>
+            <a:r>
+              <a:rPr lang="en-US" sz="1100" dirty="0" err="1">
+                <a:solidFill>
+                  <a:srgbClr val="CBD5E1"/>
+                </a:solidFill>
+                <a:latin typeface="Calibri" pitchFamily="34" charset="0"/>
+                <a:ea typeface="Calibri" pitchFamily="34" charset="-122"/>
+                <a:cs typeface="Calibri" pitchFamily="34" charset="-120"/>
+              </a:rPr>
+              <a:t>ainsi</a:t>
+            </a:r>
+            <a:r>
+              <a:rPr lang="en-US" sz="1100" dirty="0">
+                <a:solidFill>
+                  <a:srgbClr val="CBD5E1"/>
+                </a:solidFill>
+                <a:latin typeface="Calibri" pitchFamily="34" charset="0"/>
+                <a:ea typeface="Calibri" pitchFamily="34" charset="-122"/>
+                <a:cs typeface="Calibri" pitchFamily="34" charset="-120"/>
+              </a:rPr>
+              <a:t> </a:t>
+            </a:r>
+            <a:r>
+              <a:rPr lang="en-US" sz="1100" dirty="0" err="1">
+                <a:solidFill>
+                  <a:srgbClr val="CBD5E1"/>
+                </a:solidFill>
+                <a:latin typeface="Calibri" pitchFamily="34" charset="0"/>
+                <a:ea typeface="Calibri" pitchFamily="34" charset="-122"/>
+                <a:cs typeface="Calibri" pitchFamily="34" charset="-120"/>
+              </a:rPr>
+              <a:t>que</a:t>
+            </a:r>
+            <a:r>
+              <a:rPr lang="en-US" sz="1100" dirty="0">
+                <a:solidFill>
+                  <a:srgbClr val="CBD5E1"/>
+                </a:solidFill>
+                <a:latin typeface="Calibri" pitchFamily="34" charset="0"/>
+                <a:ea typeface="Calibri" pitchFamily="34" charset="-122"/>
+                <a:cs typeface="Calibri" pitchFamily="34" charset="-120"/>
+              </a:rPr>
+              <a:t> les privileges</a:t>
+            </a:r>
+          </a:p>
+          <a:p>
+            <a:pPr marL="0" indent="0">
+              <a:buNone/>
+            </a:pPr>
+            <a:r>
+              <a:rPr lang="en-US" sz="1100" dirty="0" err="1">
+                <a:solidFill>
+                  <a:srgbClr val="CBD5E1"/>
+                </a:solidFill>
+                <a:latin typeface="Calibri" pitchFamily="34" charset="0"/>
+                <a:ea typeface="Calibri" pitchFamily="34" charset="-122"/>
+                <a:cs typeface="Calibri" pitchFamily="34" charset="-120"/>
+              </a:rPr>
+              <a:t>Créer</a:t>
+            </a:r>
+            <a:r>
+              <a:rPr lang="en-US" sz="1100" dirty="0">
+                <a:solidFill>
+                  <a:srgbClr val="CBD5E1"/>
+                </a:solidFill>
+                <a:latin typeface="Calibri" pitchFamily="34" charset="0"/>
+                <a:ea typeface="Calibri" pitchFamily="34" charset="-122"/>
+                <a:cs typeface="Calibri" pitchFamily="34" charset="-120"/>
+              </a:rPr>
+              <a:t> les tables à </a:t>
+            </a:r>
+            <a:r>
+              <a:rPr lang="en-US" sz="1100" dirty="0" err="1">
+                <a:solidFill>
+                  <a:srgbClr val="CBD5E1"/>
+                </a:solidFill>
+                <a:latin typeface="Calibri" pitchFamily="34" charset="0"/>
+                <a:ea typeface="Calibri" pitchFamily="34" charset="-122"/>
+                <a:cs typeface="Calibri" pitchFamily="34" charset="-120"/>
+              </a:rPr>
+              <a:t>partir</a:t>
+            </a:r>
+            <a:r>
+              <a:rPr lang="en-US" sz="1100" dirty="0">
+                <a:solidFill>
+                  <a:srgbClr val="CBD5E1"/>
+                </a:solidFill>
+                <a:latin typeface="Calibri" pitchFamily="34" charset="0"/>
+                <a:ea typeface="Calibri" pitchFamily="34" charset="-122"/>
+                <a:cs typeface="Calibri" pitchFamily="34" charset="-120"/>
+              </a:rPr>
+              <a:t> de </a:t>
+            </a:r>
+            <a:r>
+              <a:rPr lang="en-US" sz="1100" dirty="0" err="1">
+                <a:solidFill>
+                  <a:srgbClr val="CBD5E1"/>
+                </a:solidFill>
+                <a:latin typeface="Calibri" pitchFamily="34" charset="0"/>
+                <a:ea typeface="Calibri" pitchFamily="34" charset="-122"/>
+                <a:cs typeface="Calibri" pitchFamily="34" charset="-120"/>
+              </a:rPr>
+              <a:t>schema.sql</a:t>
+            </a:r>
+            <a:endParaRPr lang="en-US" sz="1100" dirty="0"/>
+          </a:p>
+        </p:txBody>
+      </p:sp>
+      <p:sp>
+        <p:nvSpPr>
+          <p:cNvPr id="12" name="Shape 10">
+            <a:extLst>
+              <a:ext uri="{FF2B5EF4-FFF2-40B4-BE49-F238E27FC236}">
+                <a16:creationId xmlns:a16="http://schemas.microsoft.com/office/drawing/2014/main" id="{95F52CB3-C501-DD6B-963F-E21F3FD58EE1}"/>
+              </a:ext>
+            </a:extLst>
+          </p:cNvPr>
+          <p:cNvSpPr/>
+          <p:nvPr/>
+        </p:nvSpPr>
+        <p:spPr>
+          <a:xfrm>
+            <a:off x="365760" y="2971800"/>
+            <a:ext cx="4069080" cy="804672"/>
+          </a:xfrm>
+          <a:prstGeom prst="roundRect">
+            <a:avLst>
+              <a:gd name="adj" fmla="val 9091"/>
+            </a:avLst>
+          </a:prstGeom>
+          <a:solidFill>
+            <a:srgbClr val="0D1526"/>
+          </a:solidFill>
+          <a:ln w="12700">
+            <a:solidFill>
+              <a:srgbClr val="22C55E">
+                <a:alpha val="60000"/>
+              </a:srgbClr>
+            </a:solidFill>
+            <a:prstDash val="solid"/>
+          </a:ln>
+          <a:effectLst>
+            <a:outerShdw blurRad="127000" dist="38100" dir="2700000" algn="bl" rotWithShape="0">
+              <a:srgbClr val="000000">
+                <a:alpha val="25000"/>
+              </a:srgbClr>
+            </a:outerShdw>
+          </a:effectLst>
+        </p:spPr>
+        <p:txBody>
+          <a:bodyPr/>
+          <a:lstStyle/>
+          <a:p>
+            <a:endParaRPr lang="fr-FR"/>
+          </a:p>
+        </p:txBody>
+      </p:sp>
+      <p:sp>
+        <p:nvSpPr>
+          <p:cNvPr id="13" name="Shape 11">
+            <a:extLst>
+              <a:ext uri="{FF2B5EF4-FFF2-40B4-BE49-F238E27FC236}">
+                <a16:creationId xmlns:a16="http://schemas.microsoft.com/office/drawing/2014/main" id="{50394EBC-A846-D4A3-3E69-6A47EFB27F79}"/>
+              </a:ext>
+            </a:extLst>
+          </p:cNvPr>
+          <p:cNvSpPr/>
+          <p:nvPr/>
+        </p:nvSpPr>
+        <p:spPr>
+          <a:xfrm>
+            <a:off x="475488" y="3172968"/>
+            <a:ext cx="402336" cy="402336"/>
+          </a:xfrm>
+          <a:prstGeom prst="ellipse">
+            <a:avLst/>
+          </a:prstGeom>
+          <a:solidFill>
+            <a:srgbClr val="22C55E">
+              <a:alpha val="80000"/>
+            </a:srgbClr>
+          </a:solidFill>
+          <a:ln w="12700">
+            <a:solidFill>
+              <a:srgbClr val="22C55E"/>
+            </a:solidFill>
+            <a:prstDash val="solid"/>
+          </a:ln>
+        </p:spPr>
+        <p:txBody>
+          <a:bodyPr/>
+          <a:lstStyle/>
+          <a:p>
+            <a:endParaRPr lang="fr-FR"/>
+          </a:p>
+        </p:txBody>
+      </p:sp>
+      <p:sp>
+        <p:nvSpPr>
+          <p:cNvPr id="14" name="Text 12">
+            <a:extLst>
+              <a:ext uri="{FF2B5EF4-FFF2-40B4-BE49-F238E27FC236}">
+                <a16:creationId xmlns:a16="http://schemas.microsoft.com/office/drawing/2014/main" id="{6EAB5E7D-AA71-E667-7176-BDBDAD211E9B}"/>
+              </a:ext>
+            </a:extLst>
+          </p:cNvPr>
+          <p:cNvSpPr/>
+          <p:nvPr/>
+        </p:nvSpPr>
+        <p:spPr>
+          <a:xfrm>
+            <a:off x="987552" y="3026664"/>
+            <a:ext cx="3337560" cy="347472"/>
+          </a:xfrm>
+          <a:prstGeom prst="rect">
+            <a:avLst/>
+          </a:prstGeom>
+          <a:noFill/>
+          <a:ln/>
+        </p:spPr>
+        <p:txBody>
+          <a:bodyPr wrap="square" rtlCol="0" anchor="ctr"/>
+          <a:lstStyle/>
+          <a:p>
+            <a:pPr marL="0" indent="0">
+              <a:buNone/>
+            </a:pPr>
+            <a:r>
+              <a:rPr lang="en-US" sz="1400" b="1" dirty="0">
+                <a:solidFill>
+                  <a:srgbClr val="FFFFFF"/>
+                </a:solidFill>
+                <a:latin typeface="Calibri" pitchFamily="34" charset="0"/>
+                <a:ea typeface="Calibri" pitchFamily="34" charset="-122"/>
+                <a:cs typeface="Calibri" pitchFamily="34" charset="-120"/>
+              </a:rPr>
+              <a:t>Installation des </a:t>
+            </a:r>
+            <a:r>
+              <a:rPr lang="en-US" sz="1400" b="1" dirty="0" err="1">
+                <a:solidFill>
+                  <a:srgbClr val="FFFFFF"/>
+                </a:solidFill>
+                <a:latin typeface="Calibri" pitchFamily="34" charset="0"/>
+                <a:ea typeface="Calibri" pitchFamily="34" charset="-122"/>
+                <a:cs typeface="Calibri" pitchFamily="34" charset="-120"/>
+              </a:rPr>
+              <a:t>dépendances</a:t>
+            </a:r>
+            <a:endParaRPr lang="en-US" sz="1400" dirty="0"/>
+          </a:p>
+        </p:txBody>
+      </p:sp>
+      <p:sp>
+        <p:nvSpPr>
+          <p:cNvPr id="15" name="Text 13">
+            <a:extLst>
+              <a:ext uri="{FF2B5EF4-FFF2-40B4-BE49-F238E27FC236}">
+                <a16:creationId xmlns:a16="http://schemas.microsoft.com/office/drawing/2014/main" id="{15681305-D8B0-E730-3FC5-3E2C94A5FE9F}"/>
+              </a:ext>
+            </a:extLst>
+          </p:cNvPr>
+          <p:cNvSpPr/>
+          <p:nvPr/>
+        </p:nvSpPr>
+        <p:spPr>
+          <a:xfrm>
+            <a:off x="987552" y="3374136"/>
+            <a:ext cx="3337560" cy="347472"/>
+          </a:xfrm>
+          <a:prstGeom prst="rect">
+            <a:avLst/>
+          </a:prstGeom>
+          <a:noFill/>
+          <a:ln/>
+        </p:spPr>
+        <p:txBody>
+          <a:bodyPr wrap="square" rtlCol="0" anchor="ctr"/>
+          <a:lstStyle/>
+          <a:p>
+            <a:pPr marL="0" indent="0">
+              <a:buNone/>
+            </a:pPr>
+            <a:r>
+              <a:rPr lang="en-US" sz="1100" dirty="0">
+                <a:solidFill>
+                  <a:srgbClr val="CBD5E1"/>
+                </a:solidFill>
+                <a:latin typeface="Calibri" pitchFamily="34" charset="0"/>
+                <a:ea typeface="Calibri" pitchFamily="34" charset="-122"/>
+                <a:cs typeface="Calibri" pitchFamily="34" charset="-120"/>
+              </a:rPr>
+              <a:t>Aller dans le dossier backend et lancer la </a:t>
+            </a:r>
+            <a:r>
+              <a:rPr lang="en-US" sz="1100" dirty="0" err="1">
+                <a:solidFill>
+                  <a:srgbClr val="CBD5E1"/>
+                </a:solidFill>
+                <a:latin typeface="Calibri" pitchFamily="34" charset="0"/>
+                <a:ea typeface="Calibri" pitchFamily="34" charset="-122"/>
+                <a:cs typeface="Calibri" pitchFamily="34" charset="-120"/>
+              </a:rPr>
+              <a:t>commande</a:t>
+            </a:r>
+            <a:endParaRPr lang="en-US" sz="1100" dirty="0">
+              <a:solidFill>
+                <a:srgbClr val="CBD5E1"/>
+              </a:solidFill>
+              <a:latin typeface="Calibri" pitchFamily="34" charset="0"/>
+              <a:ea typeface="Calibri" pitchFamily="34" charset="-122"/>
+              <a:cs typeface="Calibri" pitchFamily="34" charset="-120"/>
+            </a:endParaRPr>
+          </a:p>
+          <a:p>
+            <a:pPr marL="0" indent="0">
+              <a:buNone/>
+            </a:pPr>
+            <a:r>
+              <a:rPr lang="en-US" sz="1100" dirty="0" err="1">
+                <a:solidFill>
+                  <a:srgbClr val="CBD5E1"/>
+                </a:solidFill>
+                <a:latin typeface="Calibri" pitchFamily="34" charset="0"/>
+                <a:ea typeface="Calibri" pitchFamily="34" charset="-122"/>
+                <a:cs typeface="Calibri" pitchFamily="34" charset="-120"/>
+              </a:rPr>
+              <a:t>npm</a:t>
+            </a:r>
+            <a:r>
+              <a:rPr lang="en-US" sz="1100" dirty="0">
+                <a:solidFill>
+                  <a:srgbClr val="CBD5E1"/>
+                </a:solidFill>
+                <a:latin typeface="Calibri" pitchFamily="34" charset="0"/>
+                <a:ea typeface="Calibri" pitchFamily="34" charset="-122"/>
+                <a:cs typeface="Calibri" pitchFamily="34" charset="-120"/>
+              </a:rPr>
+              <a:t> install</a:t>
+            </a:r>
+          </a:p>
+        </p:txBody>
+      </p:sp>
+      <p:sp>
+        <p:nvSpPr>
+          <p:cNvPr id="16" name="Shape 14">
+            <a:extLst>
+              <a:ext uri="{FF2B5EF4-FFF2-40B4-BE49-F238E27FC236}">
+                <a16:creationId xmlns:a16="http://schemas.microsoft.com/office/drawing/2014/main" id="{20589043-34E5-AEC5-A35C-A3D874536B3F}"/>
+              </a:ext>
+            </a:extLst>
+          </p:cNvPr>
+          <p:cNvSpPr/>
+          <p:nvPr/>
+        </p:nvSpPr>
+        <p:spPr>
+          <a:xfrm>
+            <a:off x="365760" y="3931920"/>
+            <a:ext cx="4069080" cy="804672"/>
+          </a:xfrm>
+          <a:prstGeom prst="roundRect">
+            <a:avLst>
+              <a:gd name="adj" fmla="val 9091"/>
+            </a:avLst>
+          </a:prstGeom>
+          <a:solidFill>
+            <a:srgbClr val="0D1526"/>
+          </a:solidFill>
+          <a:ln w="12700">
+            <a:solidFill>
+              <a:srgbClr val="EF4444">
+                <a:alpha val="60000"/>
+              </a:srgbClr>
+            </a:solidFill>
+            <a:prstDash val="solid"/>
+          </a:ln>
+          <a:effectLst>
+            <a:outerShdw blurRad="127000" dist="38100" dir="2700000" algn="bl" rotWithShape="0">
+              <a:srgbClr val="000000">
+                <a:alpha val="25000"/>
+              </a:srgbClr>
+            </a:outerShdw>
+          </a:effectLst>
+        </p:spPr>
+        <p:txBody>
+          <a:bodyPr/>
+          <a:lstStyle/>
+          <a:p>
+            <a:endParaRPr lang="fr-FR"/>
+          </a:p>
+        </p:txBody>
+      </p:sp>
+      <p:sp>
+        <p:nvSpPr>
+          <p:cNvPr id="17" name="Shape 15">
+            <a:extLst>
+              <a:ext uri="{FF2B5EF4-FFF2-40B4-BE49-F238E27FC236}">
+                <a16:creationId xmlns:a16="http://schemas.microsoft.com/office/drawing/2014/main" id="{3CF96229-752D-A04D-897F-96D44FA27F8A}"/>
+              </a:ext>
+            </a:extLst>
+          </p:cNvPr>
+          <p:cNvSpPr/>
+          <p:nvPr/>
+        </p:nvSpPr>
+        <p:spPr>
+          <a:xfrm>
+            <a:off x="475488" y="4133088"/>
+            <a:ext cx="402336" cy="402336"/>
+          </a:xfrm>
+          <a:prstGeom prst="ellipse">
+            <a:avLst/>
+          </a:prstGeom>
+          <a:solidFill>
+            <a:srgbClr val="EF4444">
+              <a:alpha val="80000"/>
+            </a:srgbClr>
+          </a:solidFill>
+          <a:ln w="12700">
+            <a:solidFill>
+              <a:srgbClr val="EF4444"/>
+            </a:solidFill>
+            <a:prstDash val="solid"/>
+          </a:ln>
+        </p:spPr>
+        <p:txBody>
+          <a:bodyPr/>
+          <a:lstStyle/>
+          <a:p>
+            <a:endParaRPr lang="fr-FR"/>
+          </a:p>
+        </p:txBody>
+      </p:sp>
+      <p:sp>
+        <p:nvSpPr>
+          <p:cNvPr id="18" name="Text 16">
+            <a:extLst>
+              <a:ext uri="{FF2B5EF4-FFF2-40B4-BE49-F238E27FC236}">
+                <a16:creationId xmlns:a16="http://schemas.microsoft.com/office/drawing/2014/main" id="{9130C0BF-B103-6A3F-F0E5-74D0ACF6E5FD}"/>
+              </a:ext>
+            </a:extLst>
+          </p:cNvPr>
+          <p:cNvSpPr/>
+          <p:nvPr/>
+        </p:nvSpPr>
+        <p:spPr>
+          <a:xfrm>
+            <a:off x="987552" y="4160520"/>
+            <a:ext cx="3337560" cy="347472"/>
+          </a:xfrm>
+          <a:prstGeom prst="rect">
+            <a:avLst/>
+          </a:prstGeom>
+          <a:noFill/>
+          <a:ln/>
+        </p:spPr>
+        <p:txBody>
+          <a:bodyPr wrap="square" rtlCol="0" anchor="ctr"/>
+          <a:lstStyle/>
+          <a:p>
+            <a:pPr marL="0" indent="0">
+              <a:buNone/>
+            </a:pPr>
+            <a:r>
+              <a:rPr lang="en-US" sz="1400" b="1" dirty="0" err="1">
+                <a:solidFill>
+                  <a:srgbClr val="FFFFFF"/>
+                </a:solidFill>
+                <a:latin typeface="Calibri" pitchFamily="34" charset="0"/>
+                <a:ea typeface="Calibri" pitchFamily="34" charset="-122"/>
+                <a:cs typeface="Calibri" pitchFamily="34" charset="-120"/>
+              </a:rPr>
+              <a:t>Remplir</a:t>
+            </a:r>
+            <a:r>
+              <a:rPr lang="en-US" sz="1400" b="1" dirty="0">
+                <a:solidFill>
+                  <a:srgbClr val="FFFFFF"/>
+                </a:solidFill>
+                <a:latin typeface="Calibri" pitchFamily="34" charset="0"/>
+                <a:ea typeface="Calibri" pitchFamily="34" charset="-122"/>
+                <a:cs typeface="Calibri" pitchFamily="34" charset="-120"/>
+              </a:rPr>
+              <a:t> le .env </a:t>
+            </a:r>
+            <a:r>
+              <a:rPr lang="en-US" sz="1400" b="1" dirty="0" err="1">
+                <a:solidFill>
+                  <a:srgbClr val="FFFFFF"/>
+                </a:solidFill>
+                <a:latin typeface="Calibri" pitchFamily="34" charset="0"/>
+                <a:ea typeface="Calibri" pitchFamily="34" charset="-122"/>
+                <a:cs typeface="Calibri" pitchFamily="34" charset="-120"/>
+              </a:rPr>
+              <a:t>comme</a:t>
+            </a:r>
+            <a:r>
+              <a:rPr lang="en-US" sz="1400" b="1" dirty="0">
+                <a:solidFill>
+                  <a:srgbClr val="FFFFFF"/>
+                </a:solidFill>
+                <a:latin typeface="Calibri" pitchFamily="34" charset="0"/>
+                <a:ea typeface="Calibri" pitchFamily="34" charset="-122"/>
+                <a:cs typeface="Calibri" pitchFamily="34" charset="-120"/>
+              </a:rPr>
+              <a:t> </a:t>
+            </a:r>
+            <a:r>
+              <a:rPr lang="en-US" sz="1400" b="1" dirty="0" err="1">
+                <a:solidFill>
+                  <a:srgbClr val="FFFFFF"/>
+                </a:solidFill>
+                <a:latin typeface="Calibri" pitchFamily="34" charset="0"/>
+                <a:ea typeface="Calibri" pitchFamily="34" charset="-122"/>
+                <a:cs typeface="Calibri" pitchFamily="34" charset="-120"/>
+              </a:rPr>
+              <a:t>indiqué</a:t>
+            </a:r>
+            <a:r>
+              <a:rPr lang="en-US" sz="1400" b="1" dirty="0">
+                <a:solidFill>
+                  <a:srgbClr val="FFFFFF"/>
+                </a:solidFill>
+                <a:latin typeface="Calibri" pitchFamily="34" charset="0"/>
+                <a:ea typeface="Calibri" pitchFamily="34" charset="-122"/>
+                <a:cs typeface="Calibri" pitchFamily="34" charset="-120"/>
+              </a:rPr>
+              <a:t> sur </a:t>
+            </a:r>
+            <a:r>
+              <a:rPr lang="en-US" sz="1400" b="1" dirty="0" err="1">
+                <a:solidFill>
+                  <a:srgbClr val="FFFFFF"/>
+                </a:solidFill>
+                <a:latin typeface="Calibri" pitchFamily="34" charset="0"/>
+                <a:ea typeface="Calibri" pitchFamily="34" charset="-122"/>
+                <a:cs typeface="Calibri" pitchFamily="34" charset="-120"/>
+              </a:rPr>
+              <a:t>codeberg</a:t>
+            </a:r>
+            <a:endParaRPr lang="en-US" sz="1400" dirty="0"/>
+          </a:p>
+        </p:txBody>
+      </p:sp>
+      <p:sp>
+        <p:nvSpPr>
+          <p:cNvPr id="20" name="Shape 18">
+            <a:extLst>
+              <a:ext uri="{FF2B5EF4-FFF2-40B4-BE49-F238E27FC236}">
+                <a16:creationId xmlns:a16="http://schemas.microsoft.com/office/drawing/2014/main" id="{F82249D4-C4DA-2058-2075-8BE4169E539D}"/>
+              </a:ext>
+            </a:extLst>
+          </p:cNvPr>
+          <p:cNvSpPr/>
+          <p:nvPr/>
+        </p:nvSpPr>
+        <p:spPr>
+          <a:xfrm>
+            <a:off x="4663440" y="1051560"/>
+            <a:ext cx="4069080" cy="804672"/>
+          </a:xfrm>
+          <a:prstGeom prst="roundRect">
+            <a:avLst>
+              <a:gd name="adj" fmla="val 9091"/>
+            </a:avLst>
+          </a:prstGeom>
+          <a:solidFill>
+            <a:srgbClr val="0D1526"/>
+          </a:solidFill>
+          <a:ln w="12700">
+            <a:solidFill>
+              <a:srgbClr val="F59E0B">
+                <a:alpha val="60000"/>
+              </a:srgbClr>
+            </a:solidFill>
+            <a:prstDash val="solid"/>
+          </a:ln>
+          <a:effectLst>
+            <a:outerShdw blurRad="127000" dist="38100" dir="2700000" algn="bl" rotWithShape="0">
+              <a:srgbClr val="000000">
+                <a:alpha val="25000"/>
+              </a:srgbClr>
+            </a:outerShdw>
+          </a:effectLst>
+        </p:spPr>
+        <p:txBody>
+          <a:bodyPr/>
+          <a:lstStyle/>
+          <a:p>
+            <a:endParaRPr lang="fr-FR"/>
+          </a:p>
+        </p:txBody>
+      </p:sp>
+      <p:sp>
+        <p:nvSpPr>
+          <p:cNvPr id="21" name="Shape 19">
+            <a:extLst>
+              <a:ext uri="{FF2B5EF4-FFF2-40B4-BE49-F238E27FC236}">
+                <a16:creationId xmlns:a16="http://schemas.microsoft.com/office/drawing/2014/main" id="{904A4B18-546B-5F8D-49FA-9FA3505DBBA5}"/>
+              </a:ext>
+            </a:extLst>
+          </p:cNvPr>
+          <p:cNvSpPr/>
+          <p:nvPr/>
+        </p:nvSpPr>
+        <p:spPr>
+          <a:xfrm>
+            <a:off x="4773168" y="1252728"/>
+            <a:ext cx="402336" cy="402336"/>
+          </a:xfrm>
+          <a:prstGeom prst="ellipse">
+            <a:avLst/>
+          </a:prstGeom>
+          <a:solidFill>
+            <a:srgbClr val="F59E0B">
+              <a:alpha val="80000"/>
+            </a:srgbClr>
+          </a:solidFill>
+          <a:ln w="12700">
+            <a:solidFill>
+              <a:srgbClr val="F59E0B"/>
+            </a:solidFill>
+            <a:prstDash val="solid"/>
+          </a:ln>
+        </p:spPr>
+        <p:txBody>
+          <a:bodyPr/>
+          <a:lstStyle/>
+          <a:p>
+            <a:endParaRPr lang="fr-FR"/>
+          </a:p>
+        </p:txBody>
+      </p:sp>
+      <p:sp>
+        <p:nvSpPr>
+          <p:cNvPr id="22" name="Text 20">
+            <a:extLst>
+              <a:ext uri="{FF2B5EF4-FFF2-40B4-BE49-F238E27FC236}">
+                <a16:creationId xmlns:a16="http://schemas.microsoft.com/office/drawing/2014/main" id="{0724B748-6F0B-8D11-BAAF-FC692B61AE4B}"/>
+              </a:ext>
+            </a:extLst>
+          </p:cNvPr>
+          <p:cNvSpPr/>
+          <p:nvPr/>
+        </p:nvSpPr>
+        <p:spPr>
+          <a:xfrm>
+            <a:off x="5285232" y="1106424"/>
+            <a:ext cx="3337560" cy="347472"/>
+          </a:xfrm>
+          <a:prstGeom prst="rect">
+            <a:avLst/>
+          </a:prstGeom>
+          <a:noFill/>
+          <a:ln/>
+        </p:spPr>
+        <p:txBody>
+          <a:bodyPr wrap="square" rtlCol="0" anchor="ctr"/>
+          <a:lstStyle/>
+          <a:p>
+            <a:pPr marL="0" indent="0">
+              <a:buNone/>
+            </a:pPr>
+            <a:r>
+              <a:rPr lang="en-US" sz="1400" b="1" dirty="0" err="1">
+                <a:solidFill>
+                  <a:srgbClr val="FFFFFF"/>
+                </a:solidFill>
+                <a:latin typeface="Calibri" pitchFamily="34" charset="0"/>
+                <a:ea typeface="Calibri" pitchFamily="34" charset="-122"/>
+                <a:cs typeface="Calibri" pitchFamily="34" charset="-120"/>
+              </a:rPr>
+              <a:t>Démarrer</a:t>
+            </a:r>
+            <a:r>
+              <a:rPr lang="en-US" sz="1400" b="1" dirty="0">
+                <a:solidFill>
+                  <a:srgbClr val="FFFFFF"/>
+                </a:solidFill>
+                <a:latin typeface="Calibri" pitchFamily="34" charset="0"/>
+                <a:ea typeface="Calibri" pitchFamily="34" charset="-122"/>
+                <a:cs typeface="Calibri" pitchFamily="34" charset="-120"/>
+              </a:rPr>
+              <a:t> le backend</a:t>
+            </a:r>
+            <a:endParaRPr lang="en-US" sz="1400" dirty="0"/>
+          </a:p>
+        </p:txBody>
+      </p:sp>
+      <p:sp>
+        <p:nvSpPr>
+          <p:cNvPr id="23" name="Text 21">
+            <a:extLst>
+              <a:ext uri="{FF2B5EF4-FFF2-40B4-BE49-F238E27FC236}">
+                <a16:creationId xmlns:a16="http://schemas.microsoft.com/office/drawing/2014/main" id="{3D92F569-6611-8D40-2B54-DABDF1E41967}"/>
+              </a:ext>
+            </a:extLst>
+          </p:cNvPr>
+          <p:cNvSpPr/>
+          <p:nvPr/>
+        </p:nvSpPr>
+        <p:spPr>
+          <a:xfrm>
+            <a:off x="5285232" y="1453896"/>
+            <a:ext cx="3337560" cy="347472"/>
+          </a:xfrm>
+          <a:prstGeom prst="rect">
+            <a:avLst/>
+          </a:prstGeom>
+          <a:noFill/>
+          <a:ln/>
+        </p:spPr>
+        <p:txBody>
+          <a:bodyPr wrap="square" rtlCol="0" anchor="ctr"/>
+          <a:lstStyle/>
+          <a:p>
+            <a:pPr marL="0" indent="0">
+              <a:buNone/>
+            </a:pPr>
+            <a:r>
+              <a:rPr lang="en-US" sz="1100" dirty="0" err="1">
+                <a:solidFill>
+                  <a:srgbClr val="CBD5E1"/>
+                </a:solidFill>
+                <a:latin typeface="Calibri" pitchFamily="34" charset="0"/>
+                <a:ea typeface="Calibri" pitchFamily="34" charset="-122"/>
+                <a:cs typeface="Calibri" pitchFamily="34" charset="-120"/>
+              </a:rPr>
+              <a:t>Utiliser</a:t>
+            </a:r>
+            <a:r>
+              <a:rPr lang="en-US" sz="1100" dirty="0">
+                <a:solidFill>
+                  <a:srgbClr val="CBD5E1"/>
+                </a:solidFill>
+                <a:latin typeface="Calibri" pitchFamily="34" charset="0"/>
+                <a:ea typeface="Calibri" pitchFamily="34" charset="-122"/>
+                <a:cs typeface="Calibri" pitchFamily="34" charset="-120"/>
+              </a:rPr>
+              <a:t> la </a:t>
+            </a:r>
+            <a:r>
+              <a:rPr lang="en-US" sz="1100" dirty="0" err="1">
+                <a:solidFill>
+                  <a:srgbClr val="CBD5E1"/>
+                </a:solidFill>
+                <a:latin typeface="Calibri" pitchFamily="34" charset="0"/>
+                <a:ea typeface="Calibri" pitchFamily="34" charset="-122"/>
+                <a:cs typeface="Calibri" pitchFamily="34" charset="-120"/>
+              </a:rPr>
+              <a:t>commande</a:t>
+            </a:r>
+            <a:r>
+              <a:rPr lang="en-US" sz="1100" dirty="0">
+                <a:solidFill>
+                  <a:srgbClr val="CBD5E1"/>
+                </a:solidFill>
+                <a:latin typeface="Calibri" pitchFamily="34" charset="0"/>
+                <a:ea typeface="Calibri" pitchFamily="34" charset="-122"/>
+                <a:cs typeface="Calibri" pitchFamily="34" charset="-120"/>
+              </a:rPr>
+              <a:t> “</a:t>
+            </a:r>
+            <a:r>
+              <a:rPr lang="en-US" sz="1100" dirty="0" err="1">
+                <a:solidFill>
+                  <a:srgbClr val="CBD5E1"/>
+                </a:solidFill>
+                <a:latin typeface="Calibri" pitchFamily="34" charset="0"/>
+                <a:ea typeface="Calibri" pitchFamily="34" charset="-122"/>
+                <a:cs typeface="Calibri" pitchFamily="34" charset="-120"/>
+              </a:rPr>
+              <a:t>npm</a:t>
+            </a:r>
+            <a:r>
+              <a:rPr lang="en-US" sz="1100" dirty="0">
+                <a:solidFill>
+                  <a:srgbClr val="CBD5E1"/>
+                </a:solidFill>
+                <a:latin typeface="Calibri" pitchFamily="34" charset="0"/>
+                <a:ea typeface="Calibri" pitchFamily="34" charset="-122"/>
+                <a:cs typeface="Calibri" pitchFamily="34" charset="-120"/>
+              </a:rPr>
+              <a:t> start”</a:t>
+            </a:r>
+            <a:endParaRPr lang="en-US" sz="1100" dirty="0"/>
+          </a:p>
+        </p:txBody>
+      </p:sp>
+      <p:sp>
+        <p:nvSpPr>
+          <p:cNvPr id="24" name="Shape 22">
+            <a:extLst>
+              <a:ext uri="{FF2B5EF4-FFF2-40B4-BE49-F238E27FC236}">
+                <a16:creationId xmlns:a16="http://schemas.microsoft.com/office/drawing/2014/main" id="{D1760B2C-937E-B683-E3B7-90CDD69CBCF6}"/>
+              </a:ext>
+            </a:extLst>
+          </p:cNvPr>
+          <p:cNvSpPr/>
+          <p:nvPr/>
+        </p:nvSpPr>
+        <p:spPr>
+          <a:xfrm>
+            <a:off x="4663440" y="2011680"/>
+            <a:ext cx="4069080" cy="804672"/>
+          </a:xfrm>
+          <a:prstGeom prst="roundRect">
+            <a:avLst>
+              <a:gd name="adj" fmla="val 9091"/>
+            </a:avLst>
+          </a:prstGeom>
+          <a:solidFill>
+            <a:srgbClr val="0D1526"/>
+          </a:solidFill>
+          <a:ln w="12700">
+            <a:solidFill>
+              <a:srgbClr val="00E5FF">
+                <a:alpha val="60000"/>
+              </a:srgbClr>
+            </a:solidFill>
+            <a:prstDash val="solid"/>
+          </a:ln>
+          <a:effectLst>
+            <a:outerShdw blurRad="127000" dist="38100" dir="2700000" algn="bl" rotWithShape="0">
+              <a:srgbClr val="000000">
+                <a:alpha val="25000"/>
+              </a:srgbClr>
+            </a:outerShdw>
+          </a:effectLst>
+        </p:spPr>
+        <p:txBody>
+          <a:bodyPr/>
+          <a:lstStyle/>
+          <a:p>
+            <a:endParaRPr lang="fr-FR"/>
+          </a:p>
+        </p:txBody>
+      </p:sp>
+      <p:sp>
+        <p:nvSpPr>
+          <p:cNvPr id="25" name="Shape 23">
+            <a:extLst>
+              <a:ext uri="{FF2B5EF4-FFF2-40B4-BE49-F238E27FC236}">
+                <a16:creationId xmlns:a16="http://schemas.microsoft.com/office/drawing/2014/main" id="{D8BD72B0-075F-2C6A-A449-6F479985EE48}"/>
+              </a:ext>
+            </a:extLst>
+          </p:cNvPr>
+          <p:cNvSpPr/>
+          <p:nvPr/>
+        </p:nvSpPr>
+        <p:spPr>
+          <a:xfrm>
+            <a:off x="4773168" y="2212848"/>
+            <a:ext cx="402336" cy="402336"/>
+          </a:xfrm>
+          <a:prstGeom prst="ellipse">
+            <a:avLst/>
+          </a:prstGeom>
+          <a:solidFill>
+            <a:srgbClr val="00E5FF">
+              <a:alpha val="80000"/>
+            </a:srgbClr>
+          </a:solidFill>
+          <a:ln w="12700">
+            <a:solidFill>
+              <a:srgbClr val="00E5FF"/>
+            </a:solidFill>
+            <a:prstDash val="solid"/>
+          </a:ln>
+        </p:spPr>
+        <p:txBody>
+          <a:bodyPr/>
+          <a:lstStyle/>
+          <a:p>
+            <a:endParaRPr lang="fr-FR"/>
+          </a:p>
+        </p:txBody>
+      </p:sp>
+      <p:sp>
+        <p:nvSpPr>
+          <p:cNvPr id="26" name="Text 24">
+            <a:extLst>
+              <a:ext uri="{FF2B5EF4-FFF2-40B4-BE49-F238E27FC236}">
+                <a16:creationId xmlns:a16="http://schemas.microsoft.com/office/drawing/2014/main" id="{8B2091C9-A13D-E3C6-2CCB-88EB7B96C7F8}"/>
+              </a:ext>
+            </a:extLst>
+          </p:cNvPr>
+          <p:cNvSpPr/>
+          <p:nvPr/>
+        </p:nvSpPr>
+        <p:spPr>
+          <a:xfrm>
+            <a:off x="5285232" y="2066544"/>
+            <a:ext cx="3337560" cy="347472"/>
+          </a:xfrm>
+          <a:prstGeom prst="rect">
+            <a:avLst/>
+          </a:prstGeom>
+          <a:noFill/>
+          <a:ln/>
+        </p:spPr>
+        <p:txBody>
+          <a:bodyPr wrap="square" rtlCol="0" anchor="ctr"/>
+          <a:lstStyle/>
+          <a:p>
+            <a:pPr marL="0" indent="0">
+              <a:buNone/>
+            </a:pPr>
+            <a:r>
+              <a:rPr lang="en-US" sz="1400" b="1" dirty="0">
+                <a:solidFill>
+                  <a:srgbClr val="FFFFFF"/>
+                </a:solidFill>
+                <a:latin typeface="Calibri" pitchFamily="34" charset="0"/>
+                <a:ea typeface="Calibri" pitchFamily="34" charset="-122"/>
+                <a:cs typeface="Calibri" pitchFamily="34" charset="-120"/>
+              </a:rPr>
+              <a:t>Lancer le frontend </a:t>
+            </a:r>
+            <a:endParaRPr lang="en-US" sz="1400" dirty="0"/>
+          </a:p>
+        </p:txBody>
+      </p:sp>
+      <p:sp>
+        <p:nvSpPr>
+          <p:cNvPr id="27" name="Text 25">
+            <a:extLst>
+              <a:ext uri="{FF2B5EF4-FFF2-40B4-BE49-F238E27FC236}">
+                <a16:creationId xmlns:a16="http://schemas.microsoft.com/office/drawing/2014/main" id="{A4B82182-32EF-8359-0120-118B37C4E983}"/>
+              </a:ext>
+            </a:extLst>
+          </p:cNvPr>
+          <p:cNvSpPr/>
+          <p:nvPr/>
+        </p:nvSpPr>
+        <p:spPr>
+          <a:xfrm>
+            <a:off x="5285232" y="2414016"/>
+            <a:ext cx="3337560" cy="347472"/>
+          </a:xfrm>
+          <a:prstGeom prst="rect">
+            <a:avLst/>
+          </a:prstGeom>
+          <a:noFill/>
+          <a:ln/>
+        </p:spPr>
+        <p:txBody>
+          <a:bodyPr wrap="square" rtlCol="0" anchor="ctr"/>
+          <a:lstStyle/>
+          <a:p>
+            <a:pPr marL="0" indent="0">
+              <a:buNone/>
+            </a:pPr>
+            <a:r>
+              <a:rPr lang="en-US" sz="1100" dirty="0" err="1">
+                <a:solidFill>
+                  <a:srgbClr val="CBD5E1"/>
+                </a:solidFill>
+                <a:latin typeface="Calibri" pitchFamily="34" charset="0"/>
+                <a:ea typeface="Calibri" pitchFamily="34" charset="-122"/>
+                <a:cs typeface="Calibri" pitchFamily="34" charset="-120"/>
+              </a:rPr>
+              <a:t>LiveServer</a:t>
+            </a:r>
+            <a:r>
+              <a:rPr lang="en-US" sz="1100" dirty="0">
+                <a:solidFill>
+                  <a:srgbClr val="CBD5E1"/>
+                </a:solidFill>
+                <a:latin typeface="Calibri" pitchFamily="34" charset="0"/>
+                <a:ea typeface="Calibri" pitchFamily="34" charset="-122"/>
+                <a:cs typeface="Calibri" pitchFamily="34" charset="-120"/>
+              </a:rPr>
+              <a:t> / WAMP / XAMP</a:t>
+            </a:r>
+            <a:endParaRPr lang="en-US" sz="1100" dirty="0"/>
+          </a:p>
+        </p:txBody>
+      </p:sp>
+      <p:sp>
+        <p:nvSpPr>
+          <p:cNvPr id="28" name="Shape 26">
+            <a:extLst>
+              <a:ext uri="{FF2B5EF4-FFF2-40B4-BE49-F238E27FC236}">
+                <a16:creationId xmlns:a16="http://schemas.microsoft.com/office/drawing/2014/main" id="{C064BE48-007B-847A-AA68-496D7EAFBD69}"/>
+              </a:ext>
+            </a:extLst>
+          </p:cNvPr>
+          <p:cNvSpPr/>
+          <p:nvPr/>
+        </p:nvSpPr>
+        <p:spPr>
+          <a:xfrm>
+            <a:off x="4663440" y="2971800"/>
+            <a:ext cx="4069080" cy="804672"/>
+          </a:xfrm>
+          <a:prstGeom prst="roundRect">
+            <a:avLst>
+              <a:gd name="adj" fmla="val 9091"/>
+            </a:avLst>
+          </a:prstGeom>
+          <a:solidFill>
+            <a:srgbClr val="0D1526"/>
+          </a:solidFill>
+          <a:ln w="12700">
+            <a:solidFill>
+              <a:srgbClr val="A855F7">
+                <a:alpha val="60000"/>
+              </a:srgbClr>
+            </a:solidFill>
+            <a:prstDash val="solid"/>
+          </a:ln>
+          <a:effectLst>
+            <a:outerShdw blurRad="127000" dist="38100" dir="2700000" algn="bl" rotWithShape="0">
+              <a:srgbClr val="000000">
+                <a:alpha val="25000"/>
+              </a:srgbClr>
+            </a:outerShdw>
+          </a:effectLst>
+        </p:spPr>
+        <p:txBody>
+          <a:bodyPr/>
+          <a:lstStyle/>
+          <a:p>
+            <a:endParaRPr lang="fr-FR"/>
+          </a:p>
+        </p:txBody>
+      </p:sp>
+      <p:sp>
+        <p:nvSpPr>
+          <p:cNvPr id="29" name="Shape 27">
+            <a:extLst>
+              <a:ext uri="{FF2B5EF4-FFF2-40B4-BE49-F238E27FC236}">
+                <a16:creationId xmlns:a16="http://schemas.microsoft.com/office/drawing/2014/main" id="{71B806D5-DF5D-B438-C686-4CA722303936}"/>
+              </a:ext>
+            </a:extLst>
+          </p:cNvPr>
+          <p:cNvSpPr/>
+          <p:nvPr/>
+        </p:nvSpPr>
+        <p:spPr>
+          <a:xfrm>
+            <a:off x="4773168" y="3172968"/>
+            <a:ext cx="402336" cy="402336"/>
+          </a:xfrm>
+          <a:prstGeom prst="ellipse">
+            <a:avLst/>
+          </a:prstGeom>
+          <a:solidFill>
+            <a:srgbClr val="A855F7">
+              <a:alpha val="80000"/>
+            </a:srgbClr>
+          </a:solidFill>
+          <a:ln w="12700">
+            <a:solidFill>
+              <a:srgbClr val="A855F7"/>
+            </a:solidFill>
+            <a:prstDash val="solid"/>
+          </a:ln>
+        </p:spPr>
+        <p:txBody>
+          <a:bodyPr/>
+          <a:lstStyle/>
+          <a:p>
+            <a:endParaRPr lang="fr-FR"/>
+          </a:p>
+        </p:txBody>
+      </p:sp>
+      <p:sp>
+        <p:nvSpPr>
+          <p:cNvPr id="30" name="Text 28">
+            <a:extLst>
+              <a:ext uri="{FF2B5EF4-FFF2-40B4-BE49-F238E27FC236}">
+                <a16:creationId xmlns:a16="http://schemas.microsoft.com/office/drawing/2014/main" id="{EABDD7EA-57BB-A668-8BD4-710E2B86FB3D}"/>
+              </a:ext>
+            </a:extLst>
+          </p:cNvPr>
+          <p:cNvSpPr/>
+          <p:nvPr/>
+        </p:nvSpPr>
+        <p:spPr>
+          <a:xfrm>
+            <a:off x="5285232" y="3200400"/>
+            <a:ext cx="3337560" cy="347472"/>
+          </a:xfrm>
+          <a:prstGeom prst="rect">
+            <a:avLst/>
+          </a:prstGeom>
+          <a:noFill/>
+          <a:ln/>
+        </p:spPr>
+        <p:txBody>
+          <a:bodyPr wrap="square" rtlCol="0" anchor="ctr"/>
+          <a:lstStyle/>
+          <a:p>
+            <a:pPr marL="0" indent="0">
+              <a:buNone/>
+            </a:pPr>
+            <a:r>
+              <a:rPr lang="en-US" sz="1400" b="1" dirty="0" err="1">
+                <a:solidFill>
+                  <a:srgbClr val="FFFFFF"/>
+                </a:solidFill>
+                <a:latin typeface="Calibri" pitchFamily="34" charset="0"/>
+                <a:ea typeface="Calibri" pitchFamily="34" charset="-122"/>
+                <a:cs typeface="Calibri" pitchFamily="34" charset="-120"/>
+              </a:rPr>
+              <a:t>Ouvrir</a:t>
+            </a:r>
+            <a:r>
+              <a:rPr lang="en-US" sz="1400" b="1" dirty="0">
+                <a:solidFill>
+                  <a:srgbClr val="FFFFFF"/>
+                </a:solidFill>
+                <a:latin typeface="Calibri" pitchFamily="34" charset="0"/>
+                <a:ea typeface="Calibri" pitchFamily="34" charset="-122"/>
+                <a:cs typeface="Calibri" pitchFamily="34" charset="-120"/>
+              </a:rPr>
+              <a:t> la page sur le </a:t>
+            </a:r>
+            <a:r>
+              <a:rPr lang="en-US" sz="1400" b="1" dirty="0" err="1">
+                <a:solidFill>
+                  <a:srgbClr val="FFFFFF"/>
+                </a:solidFill>
+                <a:latin typeface="Calibri" pitchFamily="34" charset="0"/>
+                <a:ea typeface="Calibri" pitchFamily="34" charset="-122"/>
+                <a:cs typeface="Calibri" pitchFamily="34" charset="-120"/>
+              </a:rPr>
+              <a:t>navigateur</a:t>
+            </a:r>
+            <a:endParaRPr lang="en-US" sz="1400" dirty="0"/>
+          </a:p>
+        </p:txBody>
+      </p:sp>
+      <p:sp>
+        <p:nvSpPr>
+          <p:cNvPr id="33" name="Shape 26">
+            <a:extLst>
+              <a:ext uri="{FF2B5EF4-FFF2-40B4-BE49-F238E27FC236}">
+                <a16:creationId xmlns:a16="http://schemas.microsoft.com/office/drawing/2014/main" id="{1BBD5A93-8410-6C18-EFE5-0518BC8FE00E}"/>
+              </a:ext>
+            </a:extLst>
+          </p:cNvPr>
+          <p:cNvSpPr/>
+          <p:nvPr/>
+        </p:nvSpPr>
+        <p:spPr>
+          <a:xfrm>
+            <a:off x="4663440" y="3935839"/>
+            <a:ext cx="4069080" cy="804672"/>
+          </a:xfrm>
+          <a:prstGeom prst="roundRect">
+            <a:avLst>
+              <a:gd name="adj" fmla="val 9091"/>
+            </a:avLst>
+          </a:prstGeom>
+          <a:solidFill>
+            <a:srgbClr val="0D1526"/>
+          </a:solidFill>
+          <a:ln w="12700">
+            <a:solidFill>
+              <a:schemeClr val="accent1">
+                <a:lumMod val="75000"/>
+                <a:alpha val="60000"/>
+              </a:schemeClr>
+            </a:solidFill>
+            <a:prstDash val="solid"/>
+          </a:ln>
+          <a:effectLst>
+            <a:outerShdw blurRad="127000" dist="38100" dir="2700000" algn="bl" rotWithShape="0">
+              <a:srgbClr val="000000">
+                <a:alpha val="25000"/>
+              </a:srgbClr>
+            </a:outerShdw>
+          </a:effectLst>
+        </p:spPr>
+        <p:txBody>
+          <a:bodyPr/>
+          <a:lstStyle/>
+          <a:p>
+            <a:endParaRPr lang="fr-FR" dirty="0"/>
+          </a:p>
+        </p:txBody>
+      </p:sp>
+      <p:sp>
+        <p:nvSpPr>
+          <p:cNvPr id="35" name="Shape 27">
+            <a:extLst>
+              <a:ext uri="{FF2B5EF4-FFF2-40B4-BE49-F238E27FC236}">
+                <a16:creationId xmlns:a16="http://schemas.microsoft.com/office/drawing/2014/main" id="{28977A84-89D4-401B-F8D9-9223C8A17D55}"/>
+              </a:ext>
+            </a:extLst>
+          </p:cNvPr>
+          <p:cNvSpPr/>
+          <p:nvPr/>
+        </p:nvSpPr>
+        <p:spPr>
+          <a:xfrm>
+            <a:off x="4773168" y="4137007"/>
+            <a:ext cx="402336" cy="402336"/>
+          </a:xfrm>
+          <a:prstGeom prst="ellipse">
+            <a:avLst/>
+          </a:prstGeom>
+          <a:solidFill>
+            <a:schemeClr val="accent5">
+              <a:lumMod val="50000"/>
+              <a:alpha val="80000"/>
+            </a:schemeClr>
+          </a:solidFill>
+          <a:ln w="12700">
+            <a:solidFill>
+              <a:schemeClr val="accent1">
+                <a:lumMod val="75000"/>
+              </a:schemeClr>
+            </a:solidFill>
+            <a:prstDash val="solid"/>
+          </a:ln>
+        </p:spPr>
+        <p:txBody>
+          <a:bodyPr/>
+          <a:lstStyle/>
+          <a:p>
+            <a:endParaRPr lang="fr-FR"/>
+          </a:p>
+        </p:txBody>
+      </p:sp>
+      <p:sp>
+        <p:nvSpPr>
+          <p:cNvPr id="37" name="Text 28">
+            <a:extLst>
+              <a:ext uri="{FF2B5EF4-FFF2-40B4-BE49-F238E27FC236}">
+                <a16:creationId xmlns:a16="http://schemas.microsoft.com/office/drawing/2014/main" id="{166F4E4C-4C26-3434-AF58-1DEABB64A746}"/>
+              </a:ext>
+            </a:extLst>
+          </p:cNvPr>
+          <p:cNvSpPr/>
+          <p:nvPr/>
+        </p:nvSpPr>
+        <p:spPr>
+          <a:xfrm>
+            <a:off x="5285232" y="4160520"/>
+            <a:ext cx="3337560" cy="347472"/>
+          </a:xfrm>
+          <a:prstGeom prst="rect">
+            <a:avLst/>
+          </a:prstGeom>
+          <a:noFill/>
+          <a:ln/>
+        </p:spPr>
+        <p:txBody>
+          <a:bodyPr wrap="square" rtlCol="0" anchor="ctr"/>
+          <a:lstStyle/>
+          <a:p>
+            <a:pPr marL="0" indent="0">
+              <a:buNone/>
+            </a:pPr>
+            <a:r>
+              <a:rPr lang="en-US" sz="1400" b="1" dirty="0" err="1">
+                <a:solidFill>
+                  <a:srgbClr val="FFFFFF"/>
+                </a:solidFill>
+                <a:latin typeface="Calibri" pitchFamily="34" charset="0"/>
+                <a:ea typeface="Calibri" pitchFamily="34" charset="-122"/>
+                <a:cs typeface="Calibri" pitchFamily="34" charset="-120"/>
+              </a:rPr>
+              <a:t>Profitez</a:t>
+            </a:r>
+            <a:r>
+              <a:rPr lang="en-US" sz="1400" b="1" dirty="0">
+                <a:solidFill>
+                  <a:srgbClr val="FFFFFF"/>
+                </a:solidFill>
+                <a:latin typeface="Calibri" pitchFamily="34" charset="0"/>
+                <a:ea typeface="Calibri" pitchFamily="34" charset="-122"/>
+                <a:cs typeface="Calibri" pitchFamily="34" charset="-120"/>
+              </a:rPr>
+              <a:t> du jeu</a:t>
+            </a:r>
+            <a:endParaRPr lang="en-US" sz="1400" dirty="0"/>
+          </a:p>
+        </p:txBody>
+      </p:sp>
+    </p:spTree>
+    <p:extLst>
+      <p:ext uri="{BB962C8B-B14F-4D97-AF65-F5344CB8AC3E}">
+        <p14:creationId xmlns:p14="http://schemas.microsoft.com/office/powerpoint/2010/main" val="3181075057"/>
+      </p:ext>
+    </p:extLst>
+  </p:cSld>
+  <p:clrMapOvr>
+    <a:masterClrMapping/>
+  </p:clrMapOvr>
+</p:sld>
+</file>
+
+<file path=ppt/slides/slide13.xml><?xml version="1.0" encoding="utf-8"?>
 <p:sld xmlns:a="http://schemas.openxmlformats.org/drawingml/2006/main" xmlns:r="http://schemas.openxmlformats.org/officeDocument/2006/relationships" xmlns:p="http://schemas.openxmlformats.org/presentationml/2006/main">
   <p:cSld name="Slide 11">
     <p:bg>
@@ -4302,7 +7985,7 @@
 </p:sld>
 </file>
 
-<file path=ppt/slides/slide12.xml><?xml version="1.0" encoding="utf-8"?>
+<file path=ppt/slides/slide14.xml><?xml version="1.0" encoding="utf-8"?>
 <p:sld xmlns:a="http://schemas.openxmlformats.org/drawingml/2006/main" xmlns:r="http://schemas.openxmlformats.org/officeDocument/2006/relationships" xmlns:p="http://schemas.openxmlformats.org/presentationml/2006/main">
   <p:cSld name="Slide 12">
     <p:bg>
@@ -5684,7 +9367,7 @@
 </p:sld>
 </file>
 
-<file path=ppt/slides/slide13.xml><?xml version="1.0" encoding="utf-8"?>
+<file path=ppt/slides/slide15.xml><?xml version="1.0" encoding="utf-8"?>
 <p:sld xmlns:a="http://schemas.openxmlformats.org/drawingml/2006/main" xmlns:r="http://schemas.openxmlformats.org/officeDocument/2006/relationships" xmlns:p="http://schemas.openxmlformats.org/presentationml/2006/main">
   <p:cSld name="Slide 13">
     <p:bg>
@@ -8606,6 +12289,587 @@
 
 <file path=ppt/slides/slide4.xml><?xml version="1.0" encoding="utf-8"?>
 <p:sld xmlns:a="http://schemas.openxmlformats.org/drawingml/2006/main" xmlns:r="http://schemas.openxmlformats.org/officeDocument/2006/relationships" xmlns:p="http://schemas.openxmlformats.org/presentationml/2006/main">
+  <p:cSld>
+    <p:bg>
+      <p:bgPr>
+        <a:solidFill>
+          <a:srgbClr val="070B14"/>
+        </a:solidFill>
+        <a:effectLst/>
+      </p:bgPr>
+    </p:bg>
+    <p:spTree>
+      <p:nvGrpSpPr>
+        <p:cNvPr id="1" name="">
+          <a:extLst>
+            <a:ext uri="{FF2B5EF4-FFF2-40B4-BE49-F238E27FC236}">
+              <a16:creationId xmlns:a16="http://schemas.microsoft.com/office/drawing/2014/main" id="{35CC75E0-94D4-B7CE-A513-EBBF444D2CED}"/>
+            </a:ext>
+          </a:extLst>
+        </p:cNvPr>
+        <p:cNvGrpSpPr/>
+        <p:nvPr/>
+      </p:nvGrpSpPr>
+      <p:grpSpPr>
+        <a:xfrm>
+          <a:off x="0" y="0"/>
+          <a:ext cx="0" cy="0"/>
+          <a:chOff x="0" y="0"/>
+          <a:chExt cx="0" cy="0"/>
+        </a:xfrm>
+      </p:grpSpPr>
+      <p:sp>
+        <p:nvSpPr>
+          <p:cNvPr id="2" name="Shape 0">
+            <a:extLst>
+              <a:ext uri="{FF2B5EF4-FFF2-40B4-BE49-F238E27FC236}">
+                <a16:creationId xmlns:a16="http://schemas.microsoft.com/office/drawing/2014/main" id="{6448CBA9-3903-8B0D-886B-A975DB62AE5D}"/>
+              </a:ext>
+            </a:extLst>
+          </p:cNvPr>
+          <p:cNvSpPr/>
+          <p:nvPr/>
+        </p:nvSpPr>
+        <p:spPr>
+          <a:xfrm>
+            <a:off x="365760" y="201168"/>
+            <a:ext cx="54864" cy="548640"/>
+          </a:xfrm>
+          <a:prstGeom prst="roundRect">
+            <a:avLst>
+              <a:gd name="adj" fmla="val 50000"/>
+            </a:avLst>
+          </a:prstGeom>
+          <a:solidFill>
+            <a:srgbClr val="00E5FF"/>
+          </a:solidFill>
+          <a:ln w="12700">
+            <a:solidFill>
+              <a:srgbClr val="00E5FF"/>
+            </a:solidFill>
+            <a:prstDash val="solid"/>
+          </a:ln>
+        </p:spPr>
+        <p:txBody>
+          <a:bodyPr/>
+          <a:lstStyle/>
+          <a:p>
+            <a:endParaRPr lang="fr-FR"/>
+          </a:p>
+        </p:txBody>
+      </p:sp>
+      <p:sp>
+        <p:nvSpPr>
+          <p:cNvPr id="3" name="Text 1">
+            <a:extLst>
+              <a:ext uri="{FF2B5EF4-FFF2-40B4-BE49-F238E27FC236}">
+                <a16:creationId xmlns:a16="http://schemas.microsoft.com/office/drawing/2014/main" id="{B8D15FE1-2A94-9BC2-6E42-77A4DFD47284}"/>
+              </a:ext>
+            </a:extLst>
+          </p:cNvPr>
+          <p:cNvSpPr/>
+          <p:nvPr/>
+        </p:nvSpPr>
+        <p:spPr>
+          <a:xfrm>
+            <a:off x="548640" y="137160"/>
+            <a:ext cx="8229600" cy="685800"/>
+          </a:xfrm>
+          <a:prstGeom prst="rect">
+            <a:avLst/>
+          </a:prstGeom>
+          <a:noFill/>
+          <a:ln/>
+        </p:spPr>
+        <p:txBody>
+          <a:bodyPr wrap="square" lIns="0" tIns="0" rIns="0" bIns="0" rtlCol="0" anchor="ctr"/>
+          <a:lstStyle/>
+          <a:p>
+            <a:pPr marL="0" indent="0" algn="l">
+              <a:buNone/>
+            </a:pPr>
+            <a:r>
+              <a:rPr lang="en-US" sz="2800" b="1" dirty="0">
+                <a:solidFill>
+                  <a:srgbClr val="FFFFFF"/>
+                </a:solidFill>
+                <a:latin typeface="Calibri" pitchFamily="34" charset="0"/>
+                <a:ea typeface="Calibri" pitchFamily="34" charset="-122"/>
+                <a:cs typeface="Calibri" pitchFamily="34" charset="-120"/>
+              </a:rPr>
+              <a:t>Wireframes et maquettes</a:t>
+            </a:r>
+            <a:endParaRPr lang="en-US" sz="2800" dirty="0"/>
+          </a:p>
+        </p:txBody>
+      </p:sp>
+      <p:sp>
+        <p:nvSpPr>
+          <p:cNvPr id="4" name="Shape 2">
+            <a:extLst>
+              <a:ext uri="{FF2B5EF4-FFF2-40B4-BE49-F238E27FC236}">
+                <a16:creationId xmlns:a16="http://schemas.microsoft.com/office/drawing/2014/main" id="{2A973002-66A5-B1DE-65EE-8F9A4CAA4055}"/>
+              </a:ext>
+            </a:extLst>
+          </p:cNvPr>
+          <p:cNvSpPr/>
+          <p:nvPr/>
+        </p:nvSpPr>
+        <p:spPr>
+          <a:xfrm>
+            <a:off x="365760" y="1051560"/>
+            <a:ext cx="4114800" cy="3474720"/>
+          </a:xfrm>
+          <a:prstGeom prst="roundRect">
+            <a:avLst>
+              <a:gd name="adj" fmla="val 3158"/>
+            </a:avLst>
+          </a:prstGeom>
+          <a:solidFill>
+            <a:srgbClr val="0D1526"/>
+          </a:solidFill>
+          <a:ln w="12700">
+            <a:solidFill>
+              <a:srgbClr val="A855F7"/>
+            </a:solidFill>
+            <a:prstDash val="solid"/>
+          </a:ln>
+          <a:effectLst>
+            <a:outerShdw blurRad="127000" dist="38100" dir="2700000" algn="bl" rotWithShape="0">
+              <a:srgbClr val="000000">
+                <a:alpha val="40000"/>
+              </a:srgbClr>
+            </a:outerShdw>
+          </a:effectLst>
+        </p:spPr>
+        <p:txBody>
+          <a:bodyPr/>
+          <a:lstStyle/>
+          <a:p>
+            <a:endParaRPr lang="fr-FR"/>
+          </a:p>
+        </p:txBody>
+      </p:sp>
+      <p:sp>
+        <p:nvSpPr>
+          <p:cNvPr id="5" name="Text 3">
+            <a:extLst>
+              <a:ext uri="{FF2B5EF4-FFF2-40B4-BE49-F238E27FC236}">
+                <a16:creationId xmlns:a16="http://schemas.microsoft.com/office/drawing/2014/main" id="{7E645C60-13D5-4628-13A8-16178E62C223}"/>
+              </a:ext>
+            </a:extLst>
+          </p:cNvPr>
+          <p:cNvSpPr/>
+          <p:nvPr/>
+        </p:nvSpPr>
+        <p:spPr>
+          <a:xfrm>
+            <a:off x="548640" y="1188720"/>
+            <a:ext cx="3749040" cy="411480"/>
+          </a:xfrm>
+          <a:prstGeom prst="rect">
+            <a:avLst/>
+          </a:prstGeom>
+          <a:noFill/>
+          <a:ln/>
+        </p:spPr>
+        <p:txBody>
+          <a:bodyPr wrap="square" rtlCol="0" anchor="ctr"/>
+          <a:lstStyle/>
+          <a:p>
+            <a:pPr marL="0" indent="0" algn="l">
+              <a:buNone/>
+            </a:pPr>
+            <a:endParaRPr lang="en-US" sz="1300" dirty="0"/>
+          </a:p>
+        </p:txBody>
+      </p:sp>
+      <p:sp>
+        <p:nvSpPr>
+          <p:cNvPr id="12" name="Shape 10">
+            <a:extLst>
+              <a:ext uri="{FF2B5EF4-FFF2-40B4-BE49-F238E27FC236}">
+                <a16:creationId xmlns:a16="http://schemas.microsoft.com/office/drawing/2014/main" id="{F9E1830A-6F4F-FD92-947F-51FE5358B8FA}"/>
+              </a:ext>
+            </a:extLst>
+          </p:cNvPr>
+          <p:cNvSpPr/>
+          <p:nvPr/>
+        </p:nvSpPr>
+        <p:spPr>
+          <a:xfrm>
+            <a:off x="4786283" y="2944368"/>
+            <a:ext cx="3931920" cy="749808"/>
+          </a:xfrm>
+          <a:prstGeom prst="roundRect">
+            <a:avLst>
+              <a:gd name="adj" fmla="val 9756"/>
+            </a:avLst>
+          </a:prstGeom>
+          <a:solidFill>
+            <a:srgbClr val="111D35"/>
+          </a:solidFill>
+          <a:ln w="12700">
+            <a:solidFill>
+              <a:srgbClr val="00E5FF">
+                <a:alpha val="60000"/>
+              </a:srgbClr>
+            </a:solidFill>
+            <a:prstDash val="solid"/>
+          </a:ln>
+          <a:effectLst>
+            <a:outerShdw blurRad="127000" dist="38100" dir="2700000" algn="bl" rotWithShape="0">
+              <a:srgbClr val="000000">
+                <a:alpha val="25000"/>
+              </a:srgbClr>
+            </a:outerShdw>
+          </a:effectLst>
+        </p:spPr>
+        <p:txBody>
+          <a:bodyPr/>
+          <a:lstStyle/>
+          <a:p>
+            <a:endParaRPr lang="fr-FR"/>
+          </a:p>
+        </p:txBody>
+      </p:sp>
+      <p:sp>
+        <p:nvSpPr>
+          <p:cNvPr id="13" name="Text 11">
+            <a:extLst>
+              <a:ext uri="{FF2B5EF4-FFF2-40B4-BE49-F238E27FC236}">
+                <a16:creationId xmlns:a16="http://schemas.microsoft.com/office/drawing/2014/main" id="{FE8FECBB-0FAC-C045-42E8-7B8CB56965CD}"/>
+              </a:ext>
+            </a:extLst>
+          </p:cNvPr>
+          <p:cNvSpPr/>
+          <p:nvPr/>
+        </p:nvSpPr>
+        <p:spPr>
+          <a:xfrm>
+            <a:off x="4969163" y="2980944"/>
+            <a:ext cx="3566160" cy="274320"/>
+          </a:xfrm>
+          <a:prstGeom prst="rect">
+            <a:avLst/>
+          </a:prstGeom>
+          <a:noFill/>
+          <a:ln/>
+        </p:spPr>
+        <p:txBody>
+          <a:bodyPr wrap="square" rtlCol="0" anchor="ctr"/>
+          <a:lstStyle/>
+          <a:p>
+            <a:pPr marL="0" indent="0" algn="l">
+              <a:buNone/>
+            </a:pPr>
+            <a:r>
+              <a:rPr lang="en-US" sz="1000" b="1" kern="0" spc="200" dirty="0" err="1">
+                <a:solidFill>
+                  <a:srgbClr val="00E5FF"/>
+                </a:solidFill>
+                <a:latin typeface="Calibri" pitchFamily="34" charset="0"/>
+                <a:ea typeface="Calibri" pitchFamily="34" charset="-122"/>
+                <a:cs typeface="Calibri" pitchFamily="34" charset="-120"/>
+              </a:rPr>
+              <a:t>Réalisation</a:t>
+            </a:r>
+            <a:r>
+              <a:rPr lang="en-US" sz="1000" b="1" kern="0" spc="200" dirty="0">
+                <a:solidFill>
+                  <a:srgbClr val="00E5FF"/>
+                </a:solidFill>
+                <a:latin typeface="Calibri" pitchFamily="34" charset="0"/>
+                <a:ea typeface="Calibri" pitchFamily="34" charset="-122"/>
+                <a:cs typeface="Calibri" pitchFamily="34" charset="-120"/>
+              </a:rPr>
+              <a:t> des maquettes</a:t>
+            </a:r>
+            <a:endParaRPr lang="en-US" sz="1000" dirty="0"/>
+          </a:p>
+        </p:txBody>
+      </p:sp>
+      <p:sp>
+        <p:nvSpPr>
+          <p:cNvPr id="14" name="Text 12">
+            <a:extLst>
+              <a:ext uri="{FF2B5EF4-FFF2-40B4-BE49-F238E27FC236}">
+                <a16:creationId xmlns:a16="http://schemas.microsoft.com/office/drawing/2014/main" id="{ED9E89D9-8695-29ED-0427-8F606FC213BB}"/>
+              </a:ext>
+            </a:extLst>
+          </p:cNvPr>
+          <p:cNvSpPr/>
+          <p:nvPr/>
+        </p:nvSpPr>
+        <p:spPr>
+          <a:xfrm>
+            <a:off x="4969163" y="3236976"/>
+            <a:ext cx="3566160" cy="402336"/>
+          </a:xfrm>
+          <a:prstGeom prst="rect">
+            <a:avLst/>
+          </a:prstGeom>
+          <a:noFill/>
+          <a:ln/>
+        </p:spPr>
+        <p:txBody>
+          <a:bodyPr wrap="square" rtlCol="0" anchor="ctr"/>
+          <a:lstStyle/>
+          <a:p>
+            <a:pPr marL="0" indent="0" algn="l">
+              <a:buNone/>
+            </a:pPr>
+            <a:r>
+              <a:rPr lang="en-US" sz="1400" b="1" dirty="0" err="1">
+                <a:solidFill>
+                  <a:srgbClr val="FFFFFF"/>
+                </a:solidFill>
+                <a:latin typeface="Calibri" pitchFamily="34" charset="0"/>
+                <a:ea typeface="Calibri" pitchFamily="34" charset="-122"/>
+                <a:cs typeface="Calibri" pitchFamily="34" charset="-120"/>
+              </a:rPr>
+              <a:t>Utilisation</a:t>
+            </a:r>
+            <a:r>
+              <a:rPr lang="en-US" sz="1400" b="1" dirty="0">
+                <a:solidFill>
+                  <a:srgbClr val="FFFFFF"/>
+                </a:solidFill>
+                <a:latin typeface="Calibri" pitchFamily="34" charset="0"/>
+                <a:ea typeface="Calibri" pitchFamily="34" charset="-122"/>
+                <a:cs typeface="Calibri" pitchFamily="34" charset="-120"/>
+              </a:rPr>
+              <a:t> de Figma</a:t>
+            </a:r>
+            <a:endParaRPr lang="en-US" sz="1400" dirty="0"/>
+          </a:p>
+        </p:txBody>
+      </p:sp>
+      <p:sp>
+        <p:nvSpPr>
+          <p:cNvPr id="15" name="Shape 13">
+            <a:extLst>
+              <a:ext uri="{FF2B5EF4-FFF2-40B4-BE49-F238E27FC236}">
+                <a16:creationId xmlns:a16="http://schemas.microsoft.com/office/drawing/2014/main" id="{8646E41E-E13C-4EBF-E744-CD334CBF9FF5}"/>
+              </a:ext>
+            </a:extLst>
+          </p:cNvPr>
+          <p:cNvSpPr/>
+          <p:nvPr/>
+        </p:nvSpPr>
+        <p:spPr>
+          <a:xfrm>
+            <a:off x="4786283" y="1759730"/>
+            <a:ext cx="3931920" cy="749808"/>
+          </a:xfrm>
+          <a:prstGeom prst="roundRect">
+            <a:avLst>
+              <a:gd name="adj" fmla="val 9756"/>
+            </a:avLst>
+          </a:prstGeom>
+          <a:solidFill>
+            <a:srgbClr val="111D35"/>
+          </a:solidFill>
+          <a:ln w="12700">
+            <a:solidFill>
+              <a:srgbClr val="00E5FF">
+                <a:alpha val="60000"/>
+              </a:srgbClr>
+            </a:solidFill>
+            <a:prstDash val="solid"/>
+          </a:ln>
+          <a:effectLst>
+            <a:outerShdw blurRad="127000" dist="38100" dir="2700000" algn="bl" rotWithShape="0">
+              <a:srgbClr val="000000">
+                <a:alpha val="25000"/>
+              </a:srgbClr>
+            </a:outerShdw>
+          </a:effectLst>
+        </p:spPr>
+        <p:txBody>
+          <a:bodyPr/>
+          <a:lstStyle/>
+          <a:p>
+            <a:endParaRPr lang="fr-FR"/>
+          </a:p>
+        </p:txBody>
+      </p:sp>
+      <p:sp>
+        <p:nvSpPr>
+          <p:cNvPr id="16" name="Text 14">
+            <a:extLst>
+              <a:ext uri="{FF2B5EF4-FFF2-40B4-BE49-F238E27FC236}">
+                <a16:creationId xmlns:a16="http://schemas.microsoft.com/office/drawing/2014/main" id="{D68654CB-E32F-780C-32F5-138C1D34CA6B}"/>
+              </a:ext>
+            </a:extLst>
+          </p:cNvPr>
+          <p:cNvSpPr/>
+          <p:nvPr/>
+        </p:nvSpPr>
+        <p:spPr>
+          <a:xfrm>
+            <a:off x="4969163" y="1796306"/>
+            <a:ext cx="3566160" cy="274320"/>
+          </a:xfrm>
+          <a:prstGeom prst="rect">
+            <a:avLst/>
+          </a:prstGeom>
+          <a:noFill/>
+          <a:ln/>
+        </p:spPr>
+        <p:txBody>
+          <a:bodyPr wrap="square" rtlCol="0" anchor="ctr"/>
+          <a:lstStyle/>
+          <a:p>
+            <a:pPr marL="0" indent="0" algn="l">
+              <a:buNone/>
+            </a:pPr>
+            <a:r>
+              <a:rPr lang="en-US" sz="1000" b="1" kern="0" spc="200" dirty="0" err="1">
+                <a:solidFill>
+                  <a:srgbClr val="00E5FF"/>
+                </a:solidFill>
+                <a:latin typeface="Calibri" pitchFamily="34" charset="0"/>
+                <a:ea typeface="Calibri" pitchFamily="34" charset="-122"/>
+                <a:cs typeface="Calibri" pitchFamily="34" charset="-120"/>
+              </a:rPr>
+              <a:t>Réunions</a:t>
+            </a:r>
+            <a:endParaRPr lang="en-US" sz="1000" dirty="0"/>
+          </a:p>
+        </p:txBody>
+      </p:sp>
+      <p:sp>
+        <p:nvSpPr>
+          <p:cNvPr id="17" name="Text 15">
+            <a:extLst>
+              <a:ext uri="{FF2B5EF4-FFF2-40B4-BE49-F238E27FC236}">
+                <a16:creationId xmlns:a16="http://schemas.microsoft.com/office/drawing/2014/main" id="{784D1CE8-1871-5AE0-90E2-AC05456043F3}"/>
+              </a:ext>
+            </a:extLst>
+          </p:cNvPr>
+          <p:cNvSpPr/>
+          <p:nvPr/>
+        </p:nvSpPr>
+        <p:spPr>
+          <a:xfrm>
+            <a:off x="4969163" y="2052338"/>
+            <a:ext cx="3566160" cy="402336"/>
+          </a:xfrm>
+          <a:prstGeom prst="rect">
+            <a:avLst/>
+          </a:prstGeom>
+          <a:noFill/>
+          <a:ln/>
+        </p:spPr>
+        <p:txBody>
+          <a:bodyPr wrap="square" rtlCol="0" anchor="ctr"/>
+          <a:lstStyle/>
+          <a:p>
+            <a:pPr marL="0" indent="0" algn="l">
+              <a:buNone/>
+            </a:pPr>
+            <a:r>
+              <a:rPr lang="en-US" sz="1200" b="1" dirty="0" err="1">
+                <a:solidFill>
+                  <a:srgbClr val="FFFFFF"/>
+                </a:solidFill>
+                <a:latin typeface="Calibri" pitchFamily="34" charset="0"/>
+                <a:ea typeface="Calibri" pitchFamily="34" charset="-122"/>
+                <a:cs typeface="Calibri" pitchFamily="34" charset="-120"/>
+              </a:rPr>
+              <a:t>Création</a:t>
+            </a:r>
+            <a:r>
+              <a:rPr lang="en-US" sz="1200" b="1" dirty="0">
+                <a:solidFill>
+                  <a:srgbClr val="FFFFFF"/>
+                </a:solidFill>
+                <a:latin typeface="Calibri" pitchFamily="34" charset="0"/>
+                <a:ea typeface="Calibri" pitchFamily="34" charset="-122"/>
+                <a:cs typeface="Calibri" pitchFamily="34" charset="-120"/>
+              </a:rPr>
+              <a:t> des wireframes</a:t>
+            </a:r>
+            <a:endParaRPr lang="en-US" sz="1200" dirty="0"/>
+          </a:p>
+        </p:txBody>
+      </p:sp>
+      <p:pic>
+        <p:nvPicPr>
+          <p:cNvPr id="7" name="Image 6">
+            <a:extLst>
+              <a:ext uri="{FF2B5EF4-FFF2-40B4-BE49-F238E27FC236}">
+                <a16:creationId xmlns:a16="http://schemas.microsoft.com/office/drawing/2014/main" id="{E7896789-EBEF-3CF0-1B96-4355C7F0D2F1}"/>
+              </a:ext>
+            </a:extLst>
+          </p:cNvPr>
+          <p:cNvPicPr>
+            <a:picLocks noChangeAspect="1"/>
+          </p:cNvPicPr>
+          <p:nvPr/>
+        </p:nvPicPr>
+        <p:blipFill>
+          <a:blip r:embed="rId3"/>
+          <a:stretch>
+            <a:fillRect/>
+          </a:stretch>
+        </p:blipFill>
+        <p:spPr>
+          <a:xfrm>
+            <a:off x="759677" y="1404836"/>
+            <a:ext cx="3326966" cy="1210348"/>
+          </a:xfrm>
+          <a:prstGeom prst="rect">
+            <a:avLst/>
+          </a:prstGeom>
+        </p:spPr>
+      </p:pic>
+      <p:pic>
+        <p:nvPicPr>
+          <p:cNvPr id="9" name="Image 8">
+            <a:extLst>
+              <a:ext uri="{FF2B5EF4-FFF2-40B4-BE49-F238E27FC236}">
+                <a16:creationId xmlns:a16="http://schemas.microsoft.com/office/drawing/2014/main" id="{680E2317-4DCD-6693-908E-606FAF7BCFE6}"/>
+              </a:ext>
+            </a:extLst>
+          </p:cNvPr>
+          <p:cNvPicPr>
+            <a:picLocks noChangeAspect="1"/>
+          </p:cNvPicPr>
+          <p:nvPr/>
+        </p:nvPicPr>
+        <p:blipFill>
+          <a:blip r:embed="rId4"/>
+          <a:stretch>
+            <a:fillRect/>
+          </a:stretch>
+        </p:blipFill>
+        <p:spPr>
+          <a:xfrm>
+            <a:off x="671483" y="2725505"/>
+            <a:ext cx="3549453" cy="1336918"/>
+          </a:xfrm>
+          <a:prstGeom prst="rect">
+            <a:avLst/>
+          </a:prstGeom>
+        </p:spPr>
+      </p:pic>
+    </p:spTree>
+    <p:extLst>
+      <p:ext uri="{BB962C8B-B14F-4D97-AF65-F5344CB8AC3E}">
+        <p14:creationId xmlns:p14="http://schemas.microsoft.com/office/powerpoint/2010/main" val="357443429"/>
+      </p:ext>
+    </p:extLst>
+  </p:cSld>
+  <p:clrMapOvr>
+    <a:masterClrMapping/>
+  </p:clrMapOvr>
+</p:sld>
+</file>
+
+<file path=ppt/slides/slide5.xml><?xml version="1.0" encoding="utf-8"?>
+<p:sld xmlns:a="http://schemas.openxmlformats.org/drawingml/2006/main" xmlns:r="http://schemas.openxmlformats.org/officeDocument/2006/relationships" xmlns:p="http://schemas.openxmlformats.org/presentationml/2006/main">
   <p:cSld name="Slide 3">
     <p:bg>
       <p:bgPr>
@@ -9532,7 +13796,7 @@
 </p:sld>
 </file>
 
-<file path=ppt/slides/slide5.xml><?xml version="1.0" encoding="utf-8"?>
+<file path=ppt/slides/slide6.xml><?xml version="1.0" encoding="utf-8"?>
 <p:sld xmlns:a="http://schemas.openxmlformats.org/drawingml/2006/main" xmlns:r="http://schemas.openxmlformats.org/officeDocument/2006/relationships" xmlns:p="http://schemas.openxmlformats.org/presentationml/2006/main">
   <p:cSld name="Slide 4">
     <p:bg>
@@ -9768,7 +14032,7 @@
               <a:buChar char="•"/>
             </a:pPr>
             <a:r>
-              <a:rPr lang="en-US" sz="1200" dirty="0">
+              <a:rPr lang="en-US" sz="1600" dirty="0">
                 <a:solidFill>
                   <a:srgbClr val="CBD5E1"/>
                 </a:solidFill>
@@ -9785,7 +14049,7 @@
               <a:buChar char="•"/>
             </a:pPr>
             <a:r>
-              <a:rPr lang="en-US" sz="1200" dirty="0">
+              <a:rPr lang="en-US" sz="1600" dirty="0">
                 <a:solidFill>
                   <a:srgbClr val="CBD5E1"/>
                 </a:solidFill>
@@ -9795,7 +14059,7 @@
               </a:rPr>
               <a:t>Express.js 5.x</a:t>
             </a:r>
-            <a:endParaRPr lang="en-US" sz="1200" dirty="0"/>
+            <a:endParaRPr lang="en-US" sz="1600" dirty="0"/>
           </a:p>
           <a:p>
             <a:pPr marL="342900" indent="-342900">
@@ -9803,7 +14067,7 @@
               <a:buChar char="•"/>
             </a:pPr>
             <a:r>
-              <a:rPr lang="en-US" sz="1200" dirty="0" err="1">
+              <a:rPr lang="en-US" sz="1600" dirty="0" err="1">
                 <a:solidFill>
                   <a:srgbClr val="CBD5E1"/>
                 </a:solidFill>
@@ -9814,7 +14078,7 @@
               <a:t>bcrypt</a:t>
             </a:r>
             <a:r>
-              <a:rPr lang="en-US" sz="1200" dirty="0">
+              <a:rPr lang="en-US" sz="1600" dirty="0">
                 <a:solidFill>
                   <a:srgbClr val="CBD5E1"/>
                 </a:solidFill>
@@ -9824,7 +14088,7 @@
               </a:rPr>
               <a:t> (salt ×10)</a:t>
             </a:r>
-            <a:endParaRPr lang="en-US" sz="1200" dirty="0"/>
+            <a:endParaRPr lang="en-US" sz="1600" dirty="0"/>
           </a:p>
           <a:p>
             <a:pPr marL="342900" indent="-342900">
@@ -9832,7 +14096,7 @@
               <a:buChar char="•"/>
             </a:pPr>
             <a:r>
-              <a:rPr lang="en-US" sz="1200" dirty="0">
+              <a:rPr lang="en-US" sz="1600" dirty="0">
                 <a:solidFill>
                   <a:srgbClr val="CBD5E1"/>
                 </a:solidFill>
@@ -9842,7 +14106,7 @@
               </a:rPr>
               <a:t>jsonwebtoken 9.x</a:t>
             </a:r>
-            <a:endParaRPr lang="en-US" sz="1200" dirty="0"/>
+            <a:endParaRPr lang="en-US" sz="1600" dirty="0"/>
           </a:p>
           <a:p>
             <a:pPr marL="342900" indent="-342900">
@@ -9850,7 +14114,7 @@
               <a:buChar char="•"/>
             </a:pPr>
             <a:r>
-              <a:rPr lang="en-US" sz="1200" dirty="0">
+              <a:rPr lang="en-US" sz="1600" dirty="0">
                 <a:solidFill>
                   <a:srgbClr val="CBD5E1"/>
                 </a:solidFill>
@@ -9858,9 +14122,20 @@
                 <a:ea typeface="Calibri" pitchFamily="34" charset="-122"/>
                 <a:cs typeface="Calibri" pitchFamily="34" charset="-120"/>
               </a:rPr>
-              <a:t>pg / node-postgres 8.x</a:t>
-            </a:r>
-            <a:endParaRPr lang="en-US" sz="1200" dirty="0"/>
+              <a:t>pg / node-</a:t>
+            </a:r>
+            <a:r>
+              <a:rPr lang="en-US" sz="1600" dirty="0" err="1">
+                <a:solidFill>
+                  <a:srgbClr val="CBD5E1"/>
+                </a:solidFill>
+                <a:latin typeface="Calibri" pitchFamily="34" charset="0"/>
+                <a:ea typeface="Calibri" pitchFamily="34" charset="-122"/>
+                <a:cs typeface="Calibri" pitchFamily="34" charset="-120"/>
+              </a:rPr>
+              <a:t>postgres</a:t>
+            </a:r>
+            <a:endParaRPr lang="en-US" sz="1600" dirty="0"/>
           </a:p>
           <a:p>
             <a:pPr marL="342900" indent="-342900">
@@ -9868,7 +14143,7 @@
               <a:buChar char="•"/>
             </a:pPr>
             <a:r>
-              <a:rPr lang="en-US" sz="1200" dirty="0">
+              <a:rPr lang="en-US" sz="1600" dirty="0" err="1">
                 <a:solidFill>
                   <a:srgbClr val="CBD5E1"/>
                 </a:solidFill>
@@ -9876,9 +14151,53 @@
                 <a:ea typeface="Calibri" pitchFamily="34" charset="-122"/>
                 <a:cs typeface="Calibri" pitchFamily="34" charset="-120"/>
               </a:rPr>
-              <a:t>dotenv · cors · nodemon</a:t>
-            </a:r>
-            <a:endParaRPr lang="en-US" sz="1200" dirty="0"/>
+              <a:t>dotenv</a:t>
+            </a:r>
+            <a:r>
+              <a:rPr lang="en-US" sz="1600" dirty="0">
+                <a:solidFill>
+                  <a:srgbClr val="CBD5E1"/>
+                </a:solidFill>
+                <a:latin typeface="Calibri" pitchFamily="34" charset="0"/>
+                <a:ea typeface="Calibri" pitchFamily="34" charset="-122"/>
+                <a:cs typeface="Calibri" pitchFamily="34" charset="-120"/>
+              </a:rPr>
+              <a:t> · </a:t>
+            </a:r>
+            <a:r>
+              <a:rPr lang="en-US" sz="1600" dirty="0" err="1">
+                <a:solidFill>
+                  <a:srgbClr val="CBD5E1"/>
+                </a:solidFill>
+                <a:latin typeface="Calibri" pitchFamily="34" charset="0"/>
+                <a:ea typeface="Calibri" pitchFamily="34" charset="-122"/>
+                <a:cs typeface="Calibri" pitchFamily="34" charset="-120"/>
+              </a:rPr>
+              <a:t>cors</a:t>
+            </a:r>
+            <a:r>
+              <a:rPr lang="en-US" sz="1600" dirty="0">
+                <a:solidFill>
+                  <a:srgbClr val="CBD5E1"/>
+                </a:solidFill>
+                <a:latin typeface="Calibri" pitchFamily="34" charset="0"/>
+                <a:ea typeface="Calibri" pitchFamily="34" charset="-122"/>
+                <a:cs typeface="Calibri" pitchFamily="34" charset="-120"/>
+              </a:rPr>
+              <a:t> · </a:t>
+            </a:r>
+            <a:r>
+              <a:rPr lang="en-US" sz="1600" dirty="0" err="1">
+                <a:solidFill>
+                  <a:srgbClr val="CBD5E1"/>
+                </a:solidFill>
+                <a:latin typeface="Calibri" pitchFamily="34" charset="0"/>
+                <a:ea typeface="Calibri" pitchFamily="34" charset="-122"/>
+                <a:cs typeface="Calibri" pitchFamily="34" charset="-120"/>
+              </a:rPr>
+              <a:t>nodemon</a:t>
+            </a:r>
+            <a:endParaRPr lang="en-US" sz="1600" dirty="0"/>
           </a:p>
         </p:txBody>
       </p:sp>
@@ -10020,7 +14339,7 @@
               <a:buChar char="•"/>
             </a:pPr>
             <a:r>
-              <a:rPr lang="en-US" sz="1200" dirty="0">
+              <a:rPr lang="en-US" sz="1600" dirty="0">
                 <a:solidFill>
                   <a:srgbClr val="CBD5E1"/>
                 </a:solidFill>
@@ -10030,7 +14349,7 @@
               </a:rPr>
               <a:t>HTML5 / CSS3 / Bootstrap</a:t>
             </a:r>
-            <a:endParaRPr lang="en-US" sz="1200" dirty="0"/>
+            <a:endParaRPr lang="en-US" sz="1600" dirty="0"/>
           </a:p>
           <a:p>
             <a:pPr marL="342900" indent="-342900">
@@ -10038,7 +14357,7 @@
               <a:buChar char="•"/>
             </a:pPr>
             <a:r>
-              <a:rPr lang="en-US" sz="1200" dirty="0">
+              <a:rPr lang="en-US" sz="1600" dirty="0">
                 <a:solidFill>
                   <a:srgbClr val="CBD5E1"/>
                 </a:solidFill>
@@ -10048,7 +14367,7 @@
               </a:rPr>
               <a:t>JavaScript ES6+</a:t>
             </a:r>
-            <a:endParaRPr lang="en-US" sz="1200" dirty="0"/>
+            <a:endParaRPr lang="en-US" sz="1600" dirty="0"/>
           </a:p>
           <a:p>
             <a:pPr marL="342900" indent="-342900">
@@ -10056,7 +14375,7 @@
               <a:buChar char="•"/>
             </a:pPr>
             <a:r>
-              <a:rPr lang="en-US" sz="1200" dirty="0">
+              <a:rPr lang="en-US" sz="1600" dirty="0">
                 <a:solidFill>
                   <a:srgbClr val="CBD5E1"/>
                 </a:solidFill>
@@ -10066,7 +14385,7 @@
               </a:rPr>
               <a:t>Phaser.js 3 (moteur jeu)</a:t>
             </a:r>
-            <a:endParaRPr lang="en-US" sz="1200" dirty="0"/>
+            <a:endParaRPr lang="en-US" sz="1600" dirty="0"/>
           </a:p>
           <a:p>
             <a:pPr marL="342900" indent="-342900">
@@ -10074,7 +14393,7 @@
               <a:buChar char="•"/>
             </a:pPr>
             <a:r>
-              <a:rPr lang="en-US" sz="1200" dirty="0">
+              <a:rPr lang="en-US" sz="1600" dirty="0">
                 <a:solidFill>
                   <a:srgbClr val="CBD5E1"/>
                 </a:solidFill>
@@ -10084,7 +14403,7 @@
               </a:rPr>
               <a:t>localStorage (session)</a:t>
             </a:r>
-            <a:endParaRPr lang="en-US" sz="1200" dirty="0"/>
+            <a:endParaRPr lang="en-US" sz="1600" dirty="0"/>
           </a:p>
           <a:p>
             <a:pPr marL="342900" indent="-342900">
@@ -10092,7 +14411,7 @@
               <a:buChar char="•"/>
             </a:pPr>
             <a:r>
-              <a:rPr lang="en-US" sz="1200" dirty="0">
+              <a:rPr lang="en-US" sz="1600" dirty="0">
                 <a:solidFill>
                   <a:srgbClr val="CBD5E1"/>
                 </a:solidFill>
@@ -10102,7 +14421,7 @@
               </a:rPr>
               <a:t>fetch() API REST</a:t>
             </a:r>
-            <a:endParaRPr lang="en-US" sz="1200" dirty="0"/>
+            <a:endParaRPr lang="en-US" sz="1600" dirty="0"/>
           </a:p>
           <a:p>
             <a:pPr marL="342900" indent="-342900">
@@ -10110,7 +14429,7 @@
               <a:buChar char="•"/>
             </a:pPr>
             <a:r>
-              <a:rPr lang="en-US" sz="1200" dirty="0" err="1">
+              <a:rPr lang="en-US" sz="1600" dirty="0" err="1">
                 <a:solidFill>
                   <a:srgbClr val="CBD5E1"/>
                 </a:solidFill>
@@ -10120,7 +14439,7 @@
               </a:rPr>
               <a:t>Traduction</a:t>
             </a:r>
-            <a:endParaRPr lang="en-US" sz="1200" dirty="0"/>
+            <a:endParaRPr lang="en-US" sz="1600" dirty="0"/>
           </a:p>
         </p:txBody>
       </p:sp>
@@ -10262,7 +14581,7 @@
               <a:buChar char="•"/>
             </a:pPr>
             <a:r>
-              <a:rPr lang="en-US" sz="1200" dirty="0">
+              <a:rPr lang="en-US" sz="1600" dirty="0">
                 <a:solidFill>
                   <a:srgbClr val="CBD5E1"/>
                 </a:solidFill>
@@ -10279,7 +14598,7 @@
               <a:buChar char="•"/>
             </a:pPr>
             <a:r>
-              <a:rPr lang="en-US" sz="1200" dirty="0">
+              <a:rPr lang="en-US" sz="1600" dirty="0">
                 <a:solidFill>
                   <a:srgbClr val="CBD5E1"/>
                 </a:solidFill>
@@ -10289,7 +14608,7 @@
               </a:rPr>
               <a:t>Git / Codeberg</a:t>
             </a:r>
-            <a:endParaRPr lang="en-US" sz="1200" dirty="0"/>
+            <a:endParaRPr lang="en-US" sz="1600" dirty="0"/>
           </a:p>
           <a:p>
             <a:pPr marL="342900" indent="-342900">
@@ -10297,7 +14616,7 @@
               <a:buChar char="•"/>
             </a:pPr>
             <a:r>
-              <a:rPr lang="en-US" sz="1200" dirty="0">
+              <a:rPr lang="en-US" sz="1600" dirty="0">
                 <a:solidFill>
                   <a:srgbClr val="CBD5E1"/>
                 </a:solidFill>
@@ -10307,7 +14626,7 @@
               </a:rPr>
               <a:t>WAMP / XAMPP</a:t>
             </a:r>
-            <a:endParaRPr lang="en-US" sz="1200" dirty="0"/>
+            <a:endParaRPr lang="en-US" sz="1600" dirty="0"/>
           </a:p>
           <a:p>
             <a:pPr marL="342900" indent="-342900">
@@ -10315,7 +14634,7 @@
               <a:buChar char="•"/>
             </a:pPr>
             <a:r>
-              <a:rPr lang="en-US" sz="1200" dirty="0">
+              <a:rPr lang="en-US" sz="1600" dirty="0">
                 <a:solidFill>
                   <a:srgbClr val="CBD5E1"/>
                 </a:solidFill>
@@ -10325,7 +14644,7 @@
               </a:rPr>
               <a:t>Postman / Insomnia</a:t>
             </a:r>
-            <a:endParaRPr lang="en-US" sz="1200" dirty="0"/>
+            <a:endParaRPr lang="en-US" sz="1600" dirty="0"/>
           </a:p>
           <a:p>
             <a:pPr marL="342900" indent="-342900">
@@ -10333,7 +14652,7 @@
               <a:buChar char="•"/>
             </a:pPr>
             <a:r>
-              <a:rPr lang="en-US" sz="1200" dirty="0">
+              <a:rPr lang="en-US" sz="1600" dirty="0">
                 <a:solidFill>
                   <a:srgbClr val="CBD5E1"/>
                 </a:solidFill>
@@ -10343,7 +14662,7 @@
               </a:rPr>
               <a:t>npm / package.json</a:t>
             </a:r>
-            <a:endParaRPr lang="en-US" sz="1200" dirty="0"/>
+            <a:endParaRPr lang="en-US" sz="1600" dirty="0"/>
           </a:p>
           <a:p>
             <a:pPr marL="342900" indent="-342900">
@@ -10351,7 +14670,7 @@
               <a:buChar char="•"/>
             </a:pPr>
             <a:r>
-              <a:rPr lang="en-US" sz="1200" dirty="0">
+              <a:rPr lang="en-US" sz="1600" dirty="0">
                 <a:solidFill>
                   <a:srgbClr val="CBD5E1"/>
                 </a:solidFill>
@@ -10361,7 +14680,7 @@
               </a:rPr>
               <a:t>nodemon (rechargement auto)</a:t>
             </a:r>
-            <a:endParaRPr lang="en-US" sz="1200" dirty="0"/>
+            <a:endParaRPr lang="en-US" sz="1600" dirty="0"/>
           </a:p>
         </p:txBody>
       </p:sp>
@@ -10373,7 +14692,7 @@
 </p:sld>
 </file>
 
-<file path=ppt/slides/slide6.xml><?xml version="1.0" encoding="utf-8"?>
+<file path=ppt/slides/slide7.xml><?xml version="1.0" encoding="utf-8"?>
 <p:sld xmlns:a="http://schemas.openxmlformats.org/drawingml/2006/main" xmlns:r="http://schemas.openxmlformats.org/officeDocument/2006/relationships" xmlns:p="http://schemas.openxmlformats.org/presentationml/2006/main">
   <p:cSld name="Slide 5">
     <p:bg>
@@ -11687,7 +16006,7 @@
 </p:sld>
 </file>
 
-<file path=ppt/slides/slide7.xml><?xml version="1.0" encoding="utf-8"?>
+<file path=ppt/slides/slide8.xml><?xml version="1.0" encoding="utf-8"?>
 <p:sld xmlns:a="http://schemas.openxmlformats.org/drawingml/2006/main" xmlns:r="http://schemas.openxmlformats.org/officeDocument/2006/relationships" xmlns:p="http://schemas.openxmlformats.org/presentationml/2006/main">
   <p:cSld name="Slide 6">
     <p:bg>
@@ -12873,7 +17192,7 @@
 </p:sld>
 </file>
 
-<file path=ppt/slides/slide8.xml><?xml version="1.0" encoding="utf-8"?>
+<file path=ppt/slides/slide9.xml><?xml version="1.0" encoding="utf-8"?>
 <p:sld xmlns:a="http://schemas.openxmlformats.org/drawingml/2006/main" xmlns:r="http://schemas.openxmlformats.org/officeDocument/2006/relationships" xmlns:p="http://schemas.openxmlformats.org/presentationml/2006/main">
   <p:cSld name="Slide 7">
     <p:bg>
@@ -13990,1336 +18309,6 @@
               <a:t>l'onglet</a:t>
             </a:r>
             <a:endParaRPr lang="en-US" sz="1100" dirty="0"/>
-          </a:p>
-        </p:txBody>
-      </p:sp>
-    </p:spTree>
-  </p:cSld>
-  <p:clrMapOvr>
-    <a:masterClrMapping/>
-  </p:clrMapOvr>
-</p:sld>
-</file>
-
-<file path=ppt/slides/slide9.xml><?xml version="1.0" encoding="utf-8"?>
-<p:sld xmlns:a="http://schemas.openxmlformats.org/drawingml/2006/main" xmlns:r="http://schemas.openxmlformats.org/officeDocument/2006/relationships" xmlns:p="http://schemas.openxmlformats.org/presentationml/2006/main">
-  <p:cSld name="Slide 8">
-    <p:bg>
-      <p:bgPr>
-        <a:solidFill>
-          <a:srgbClr val="070B14"/>
-        </a:solidFill>
-        <a:effectLst/>
-      </p:bgPr>
-    </p:bg>
-    <p:spTree>
-      <p:nvGrpSpPr>
-        <p:cNvPr id="1" name=""/>
-        <p:cNvGrpSpPr/>
-        <p:nvPr/>
-      </p:nvGrpSpPr>
-      <p:grpSpPr>
-        <a:xfrm>
-          <a:off x="0" y="0"/>
-          <a:ext cx="0" cy="0"/>
-          <a:chOff x="0" y="0"/>
-          <a:chExt cx="0" cy="0"/>
-        </a:xfrm>
-      </p:grpSpPr>
-      <p:sp>
-        <p:nvSpPr>
-          <p:cNvPr id="2" name="Shape 0"/>
-          <p:cNvSpPr/>
-          <p:nvPr/>
-        </p:nvSpPr>
-        <p:spPr>
-          <a:xfrm>
-            <a:off x="365760" y="201168"/>
-            <a:ext cx="54864" cy="548640"/>
-          </a:xfrm>
-          <a:prstGeom prst="roundRect">
-            <a:avLst>
-              <a:gd name="adj" fmla="val 50000"/>
-            </a:avLst>
-          </a:prstGeom>
-          <a:solidFill>
-            <a:srgbClr val="00E5FF"/>
-          </a:solidFill>
-          <a:ln w="12700">
-            <a:solidFill>
-              <a:srgbClr val="00E5FF"/>
-            </a:solidFill>
-            <a:prstDash val="solid"/>
-          </a:ln>
-        </p:spPr>
-        <p:txBody>
-          <a:bodyPr/>
-          <a:lstStyle/>
-          <a:p>
-            <a:endParaRPr lang="fr-FR"/>
-          </a:p>
-        </p:txBody>
-      </p:sp>
-      <p:sp>
-        <p:nvSpPr>
-          <p:cNvPr id="3" name="Text 1"/>
-          <p:cNvSpPr/>
-          <p:nvPr/>
-        </p:nvSpPr>
-        <p:spPr>
-          <a:xfrm>
-            <a:off x="548640" y="137160"/>
-            <a:ext cx="8229600" cy="685800"/>
-          </a:xfrm>
-          <a:prstGeom prst="rect">
-            <a:avLst/>
-          </a:prstGeom>
-          <a:noFill/>
-          <a:ln/>
-        </p:spPr>
-        <p:txBody>
-          <a:bodyPr wrap="square" lIns="0" tIns="0" rIns="0" bIns="0" rtlCol="0" anchor="ctr"/>
-          <a:lstStyle/>
-          <a:p>
-            <a:pPr marL="0" indent="0" algn="l">
-              <a:buNone/>
-            </a:pPr>
-            <a:r>
-              <a:rPr lang="en-US" sz="2800" b="1" dirty="0">
-                <a:solidFill>
-                  <a:srgbClr val="FFFFFF"/>
-                </a:solidFill>
-                <a:latin typeface="Calibri" pitchFamily="34" charset="0"/>
-                <a:ea typeface="Calibri" pitchFamily="34" charset="-122"/>
-                <a:cs typeface="Calibri" pitchFamily="34" charset="-120"/>
-              </a:rPr>
-              <a:t>Interface Web</a:t>
-            </a:r>
-            <a:endParaRPr lang="en-US" sz="2800" dirty="0"/>
-          </a:p>
-        </p:txBody>
-      </p:sp>
-      <p:sp>
-        <p:nvSpPr>
-          <p:cNvPr id="4" name="Shape 2"/>
-          <p:cNvSpPr/>
-          <p:nvPr/>
-        </p:nvSpPr>
-        <p:spPr>
-          <a:xfrm>
-            <a:off x="365760" y="1051560"/>
-            <a:ext cx="1965960" cy="1417320"/>
-          </a:xfrm>
-          <a:prstGeom prst="roundRect">
-            <a:avLst>
-              <a:gd name="adj" fmla="val 6452"/>
-            </a:avLst>
-          </a:prstGeom>
-          <a:solidFill>
-            <a:srgbClr val="0D1526"/>
-          </a:solidFill>
-          <a:ln w="12700">
-            <a:solidFill>
-              <a:srgbClr val="A855F7">
-                <a:alpha val="60000"/>
-              </a:srgbClr>
-            </a:solidFill>
-            <a:prstDash val="solid"/>
-          </a:ln>
-          <a:effectLst>
-            <a:outerShdw blurRad="127000" dist="38100" dir="2700000" algn="bl" rotWithShape="0">
-              <a:srgbClr val="000000">
-                <a:alpha val="30000"/>
-              </a:srgbClr>
-            </a:outerShdw>
-          </a:effectLst>
-        </p:spPr>
-        <p:txBody>
-          <a:bodyPr/>
-          <a:lstStyle/>
-          <a:p>
-            <a:endParaRPr lang="fr-FR"/>
-          </a:p>
-        </p:txBody>
-      </p:sp>
-      <p:sp>
-        <p:nvSpPr>
-          <p:cNvPr id="5" name="Text 3"/>
-          <p:cNvSpPr/>
-          <p:nvPr/>
-        </p:nvSpPr>
-        <p:spPr>
-          <a:xfrm>
-            <a:off x="457200" y="1188720"/>
-            <a:ext cx="1783080" cy="457200"/>
-          </a:xfrm>
-          <a:prstGeom prst="rect">
-            <a:avLst/>
-          </a:prstGeom>
-          <a:noFill/>
-          <a:ln/>
-        </p:spPr>
-        <p:txBody>
-          <a:bodyPr wrap="square" rtlCol="0" anchor="ctr"/>
-          <a:lstStyle/>
-          <a:p>
-            <a:pPr marL="0" indent="0" algn="ctr">
-              <a:buNone/>
-            </a:pPr>
-            <a:r>
-              <a:rPr lang="en-US" sz="1000" b="1" dirty="0">
-                <a:solidFill>
-                  <a:srgbClr val="00E5FF"/>
-                </a:solidFill>
-                <a:latin typeface="Courier New" pitchFamily="34" charset="0"/>
-                <a:ea typeface="Courier New" pitchFamily="34" charset="-122"/>
-                <a:cs typeface="Courier New" pitchFamily="34" charset="-120"/>
-              </a:rPr>
-              <a:t>index.html</a:t>
-            </a:r>
-            <a:endParaRPr lang="en-US" sz="1000" dirty="0"/>
-          </a:p>
-        </p:txBody>
-      </p:sp>
-      <p:sp>
-        <p:nvSpPr>
-          <p:cNvPr id="6" name="Shape 4"/>
-          <p:cNvSpPr/>
-          <p:nvPr/>
-        </p:nvSpPr>
-        <p:spPr>
-          <a:xfrm>
-            <a:off x="548640" y="1691640"/>
-            <a:ext cx="1600200" cy="0"/>
-          </a:xfrm>
-          <a:prstGeom prst="line">
-            <a:avLst/>
-          </a:prstGeom>
-          <a:noFill/>
-          <a:ln w="12700">
-            <a:solidFill>
-              <a:srgbClr val="A855F7">
-                <a:alpha val="40000"/>
-              </a:srgbClr>
-            </a:solidFill>
-            <a:prstDash val="solid"/>
-          </a:ln>
-        </p:spPr>
-        <p:txBody>
-          <a:bodyPr/>
-          <a:lstStyle/>
-          <a:p>
-            <a:endParaRPr lang="fr-FR"/>
-          </a:p>
-        </p:txBody>
-      </p:sp>
-      <p:sp>
-        <p:nvSpPr>
-          <p:cNvPr id="7" name="Text 5"/>
-          <p:cNvSpPr/>
-          <p:nvPr/>
-        </p:nvSpPr>
-        <p:spPr>
-          <a:xfrm>
-            <a:off x="457200" y="1783080"/>
-            <a:ext cx="1783080" cy="548640"/>
-          </a:xfrm>
-          <a:prstGeom prst="rect">
-            <a:avLst/>
-          </a:prstGeom>
-          <a:noFill/>
-          <a:ln/>
-        </p:spPr>
-        <p:txBody>
-          <a:bodyPr wrap="square" rtlCol="0" anchor="ctr"/>
-          <a:lstStyle/>
-          <a:p>
-            <a:pPr marL="0" indent="0" algn="ctr">
-              <a:buNone/>
-            </a:pPr>
-            <a:r>
-              <a:rPr lang="en-US" sz="1000" dirty="0">
-                <a:solidFill>
-                  <a:srgbClr val="CBD5E1"/>
-                </a:solidFill>
-                <a:latin typeface="Calibri" pitchFamily="34" charset="0"/>
-                <a:ea typeface="Calibri" pitchFamily="34" charset="-122"/>
-                <a:cs typeface="Calibri" pitchFamily="34" charset="-120"/>
-              </a:rPr>
-              <a:t>Accueil · Navbar dynamique</a:t>
-            </a:r>
-            <a:endParaRPr lang="en-US" sz="1000" dirty="0"/>
-          </a:p>
-        </p:txBody>
-      </p:sp>
-      <p:sp>
-        <p:nvSpPr>
-          <p:cNvPr id="8" name="Shape 6"/>
-          <p:cNvSpPr/>
-          <p:nvPr/>
-        </p:nvSpPr>
-        <p:spPr>
-          <a:xfrm>
-            <a:off x="2514600" y="1051560"/>
-            <a:ext cx="1965960" cy="1417320"/>
-          </a:xfrm>
-          <a:prstGeom prst="roundRect">
-            <a:avLst>
-              <a:gd name="adj" fmla="val 6452"/>
-            </a:avLst>
-          </a:prstGeom>
-          <a:solidFill>
-            <a:srgbClr val="0D1526"/>
-          </a:solidFill>
-          <a:ln w="12700">
-            <a:solidFill>
-              <a:srgbClr val="A855F7">
-                <a:alpha val="60000"/>
-              </a:srgbClr>
-            </a:solidFill>
-            <a:prstDash val="solid"/>
-          </a:ln>
-          <a:effectLst>
-            <a:outerShdw blurRad="127000" dist="38100" dir="2700000" algn="bl" rotWithShape="0">
-              <a:srgbClr val="000000">
-                <a:alpha val="30000"/>
-              </a:srgbClr>
-            </a:outerShdw>
-          </a:effectLst>
-        </p:spPr>
-        <p:txBody>
-          <a:bodyPr/>
-          <a:lstStyle/>
-          <a:p>
-            <a:endParaRPr lang="fr-FR"/>
-          </a:p>
-        </p:txBody>
-      </p:sp>
-      <p:sp>
-        <p:nvSpPr>
-          <p:cNvPr id="9" name="Text 7"/>
-          <p:cNvSpPr/>
-          <p:nvPr/>
-        </p:nvSpPr>
-        <p:spPr>
-          <a:xfrm>
-            <a:off x="2606040" y="1188720"/>
-            <a:ext cx="1783080" cy="457200"/>
-          </a:xfrm>
-          <a:prstGeom prst="rect">
-            <a:avLst/>
-          </a:prstGeom>
-          <a:noFill/>
-          <a:ln/>
-        </p:spPr>
-        <p:txBody>
-          <a:bodyPr wrap="square" rtlCol="0" anchor="ctr"/>
-          <a:lstStyle/>
-          <a:p>
-            <a:pPr marL="0" indent="0" algn="ctr">
-              <a:buNone/>
-            </a:pPr>
-            <a:r>
-              <a:rPr lang="en-US" sz="1000" b="1" dirty="0">
-                <a:solidFill>
-                  <a:srgbClr val="00E5FF"/>
-                </a:solidFill>
-                <a:latin typeface="Courier New" pitchFamily="34" charset="0"/>
-                <a:ea typeface="Courier New" pitchFamily="34" charset="-122"/>
-                <a:cs typeface="Courier New" pitchFamily="34" charset="-120"/>
-              </a:rPr>
-              <a:t>login.html</a:t>
-            </a:r>
-            <a:endParaRPr lang="en-US" sz="1000" dirty="0"/>
-          </a:p>
-        </p:txBody>
-      </p:sp>
-      <p:sp>
-        <p:nvSpPr>
-          <p:cNvPr id="10" name="Shape 8"/>
-          <p:cNvSpPr/>
-          <p:nvPr/>
-        </p:nvSpPr>
-        <p:spPr>
-          <a:xfrm>
-            <a:off x="2697480" y="1691640"/>
-            <a:ext cx="1600200" cy="0"/>
-          </a:xfrm>
-          <a:prstGeom prst="line">
-            <a:avLst/>
-          </a:prstGeom>
-          <a:noFill/>
-          <a:ln w="12700">
-            <a:solidFill>
-              <a:srgbClr val="A855F7">
-                <a:alpha val="40000"/>
-              </a:srgbClr>
-            </a:solidFill>
-            <a:prstDash val="solid"/>
-          </a:ln>
-        </p:spPr>
-        <p:txBody>
-          <a:bodyPr/>
-          <a:lstStyle/>
-          <a:p>
-            <a:endParaRPr lang="fr-FR"/>
-          </a:p>
-        </p:txBody>
-      </p:sp>
-      <p:sp>
-        <p:nvSpPr>
-          <p:cNvPr id="11" name="Text 9"/>
-          <p:cNvSpPr/>
-          <p:nvPr/>
-        </p:nvSpPr>
-        <p:spPr>
-          <a:xfrm>
-            <a:off x="2606040" y="1783080"/>
-            <a:ext cx="1783080" cy="548640"/>
-          </a:xfrm>
-          <a:prstGeom prst="rect">
-            <a:avLst/>
-          </a:prstGeom>
-          <a:noFill/>
-          <a:ln/>
-        </p:spPr>
-        <p:txBody>
-          <a:bodyPr wrap="square" rtlCol="0" anchor="ctr"/>
-          <a:lstStyle/>
-          <a:p>
-            <a:pPr marL="0" indent="0" algn="ctr">
-              <a:buNone/>
-            </a:pPr>
-            <a:r>
-              <a:rPr lang="en-US" sz="1000" dirty="0">
-                <a:solidFill>
-                  <a:srgbClr val="CBD5E1"/>
-                </a:solidFill>
-                <a:latin typeface="Calibri" pitchFamily="34" charset="0"/>
-                <a:ea typeface="Calibri" pitchFamily="34" charset="-122"/>
-                <a:cs typeface="Calibri" pitchFamily="34" charset="-120"/>
-              </a:rPr>
-              <a:t>Formulaire connexion</a:t>
-            </a:r>
-            <a:endParaRPr lang="en-US" sz="1000" dirty="0"/>
-          </a:p>
-        </p:txBody>
-      </p:sp>
-      <p:sp>
-        <p:nvSpPr>
-          <p:cNvPr id="12" name="Shape 10"/>
-          <p:cNvSpPr/>
-          <p:nvPr/>
-        </p:nvSpPr>
-        <p:spPr>
-          <a:xfrm>
-            <a:off x="4663440" y="1051560"/>
-            <a:ext cx="1965960" cy="1417320"/>
-          </a:xfrm>
-          <a:prstGeom prst="roundRect">
-            <a:avLst>
-              <a:gd name="adj" fmla="val 6452"/>
-            </a:avLst>
-          </a:prstGeom>
-          <a:solidFill>
-            <a:srgbClr val="0D1526"/>
-          </a:solidFill>
-          <a:ln w="12700">
-            <a:solidFill>
-              <a:srgbClr val="A855F7">
-                <a:alpha val="60000"/>
-              </a:srgbClr>
-            </a:solidFill>
-            <a:prstDash val="solid"/>
-          </a:ln>
-          <a:effectLst>
-            <a:outerShdw blurRad="127000" dist="38100" dir="2700000" algn="bl" rotWithShape="0">
-              <a:srgbClr val="000000">
-                <a:alpha val="30000"/>
-              </a:srgbClr>
-            </a:outerShdw>
-          </a:effectLst>
-        </p:spPr>
-        <p:txBody>
-          <a:bodyPr/>
-          <a:lstStyle/>
-          <a:p>
-            <a:endParaRPr lang="fr-FR"/>
-          </a:p>
-        </p:txBody>
-      </p:sp>
-      <p:sp>
-        <p:nvSpPr>
-          <p:cNvPr id="13" name="Text 11"/>
-          <p:cNvSpPr/>
-          <p:nvPr/>
-        </p:nvSpPr>
-        <p:spPr>
-          <a:xfrm>
-            <a:off x="4754880" y="1188720"/>
-            <a:ext cx="1783080" cy="457200"/>
-          </a:xfrm>
-          <a:prstGeom prst="rect">
-            <a:avLst/>
-          </a:prstGeom>
-          <a:noFill/>
-          <a:ln/>
-        </p:spPr>
-        <p:txBody>
-          <a:bodyPr wrap="square" rtlCol="0" anchor="ctr"/>
-          <a:lstStyle/>
-          <a:p>
-            <a:pPr marL="0" indent="0" algn="ctr">
-              <a:buNone/>
-            </a:pPr>
-            <a:r>
-              <a:rPr lang="en-US" sz="1000" b="1" dirty="0">
-                <a:solidFill>
-                  <a:srgbClr val="00E5FF"/>
-                </a:solidFill>
-                <a:latin typeface="Courier New" pitchFamily="34" charset="0"/>
-                <a:ea typeface="Courier New" pitchFamily="34" charset="-122"/>
-                <a:cs typeface="Courier New" pitchFamily="34" charset="-120"/>
-              </a:rPr>
-              <a:t>register.html</a:t>
-            </a:r>
-            <a:endParaRPr lang="en-US" sz="1000" dirty="0"/>
-          </a:p>
-        </p:txBody>
-      </p:sp>
-      <p:sp>
-        <p:nvSpPr>
-          <p:cNvPr id="14" name="Shape 12"/>
-          <p:cNvSpPr/>
-          <p:nvPr/>
-        </p:nvSpPr>
-        <p:spPr>
-          <a:xfrm>
-            <a:off x="4846320" y="1691640"/>
-            <a:ext cx="1600200" cy="0"/>
-          </a:xfrm>
-          <a:prstGeom prst="line">
-            <a:avLst/>
-          </a:prstGeom>
-          <a:noFill/>
-          <a:ln w="12700">
-            <a:solidFill>
-              <a:srgbClr val="A855F7">
-                <a:alpha val="40000"/>
-              </a:srgbClr>
-            </a:solidFill>
-            <a:prstDash val="solid"/>
-          </a:ln>
-        </p:spPr>
-        <p:txBody>
-          <a:bodyPr/>
-          <a:lstStyle/>
-          <a:p>
-            <a:endParaRPr lang="fr-FR"/>
-          </a:p>
-        </p:txBody>
-      </p:sp>
-      <p:sp>
-        <p:nvSpPr>
-          <p:cNvPr id="15" name="Text 13"/>
-          <p:cNvSpPr/>
-          <p:nvPr/>
-        </p:nvSpPr>
-        <p:spPr>
-          <a:xfrm>
-            <a:off x="4754880" y="1783080"/>
-            <a:ext cx="1783080" cy="548640"/>
-          </a:xfrm>
-          <a:prstGeom prst="rect">
-            <a:avLst/>
-          </a:prstGeom>
-          <a:noFill/>
-          <a:ln/>
-        </p:spPr>
-        <p:txBody>
-          <a:bodyPr wrap="square" rtlCol="0" anchor="ctr"/>
-          <a:lstStyle/>
-          <a:p>
-            <a:pPr marL="0" indent="0" algn="ctr">
-              <a:buNone/>
-            </a:pPr>
-            <a:r>
-              <a:rPr lang="en-US" sz="1000" dirty="0">
-                <a:solidFill>
-                  <a:srgbClr val="CBD5E1"/>
-                </a:solidFill>
-                <a:latin typeface="Calibri" pitchFamily="34" charset="0"/>
-                <a:ea typeface="Calibri" pitchFamily="34" charset="-122"/>
-                <a:cs typeface="Calibri" pitchFamily="34" charset="-120"/>
-              </a:rPr>
-              <a:t>Formulaire inscription</a:t>
-            </a:r>
-            <a:endParaRPr lang="en-US" sz="1000" dirty="0"/>
-          </a:p>
-        </p:txBody>
-      </p:sp>
-      <p:sp>
-        <p:nvSpPr>
-          <p:cNvPr id="16" name="Shape 14"/>
-          <p:cNvSpPr/>
-          <p:nvPr/>
-        </p:nvSpPr>
-        <p:spPr>
-          <a:xfrm>
-            <a:off x="6812280" y="1051560"/>
-            <a:ext cx="1965960" cy="1417320"/>
-          </a:xfrm>
-          <a:prstGeom prst="roundRect">
-            <a:avLst>
-              <a:gd name="adj" fmla="val 6452"/>
-            </a:avLst>
-          </a:prstGeom>
-          <a:solidFill>
-            <a:srgbClr val="0D1526"/>
-          </a:solidFill>
-          <a:ln w="12700">
-            <a:solidFill>
-              <a:srgbClr val="A855F7">
-                <a:alpha val="60000"/>
-              </a:srgbClr>
-            </a:solidFill>
-            <a:prstDash val="solid"/>
-          </a:ln>
-          <a:effectLst>
-            <a:outerShdw blurRad="127000" dist="38100" dir="2700000" algn="bl" rotWithShape="0">
-              <a:srgbClr val="000000">
-                <a:alpha val="30000"/>
-              </a:srgbClr>
-            </a:outerShdw>
-          </a:effectLst>
-        </p:spPr>
-        <p:txBody>
-          <a:bodyPr/>
-          <a:lstStyle/>
-          <a:p>
-            <a:endParaRPr lang="fr-FR"/>
-          </a:p>
-        </p:txBody>
-      </p:sp>
-      <p:sp>
-        <p:nvSpPr>
-          <p:cNvPr id="17" name="Text 15"/>
-          <p:cNvSpPr/>
-          <p:nvPr/>
-        </p:nvSpPr>
-        <p:spPr>
-          <a:xfrm>
-            <a:off x="6903720" y="1188720"/>
-            <a:ext cx="1783080" cy="457200"/>
-          </a:xfrm>
-          <a:prstGeom prst="rect">
-            <a:avLst/>
-          </a:prstGeom>
-          <a:noFill/>
-          <a:ln/>
-        </p:spPr>
-        <p:txBody>
-          <a:bodyPr wrap="square" rtlCol="0" anchor="ctr"/>
-          <a:lstStyle/>
-          <a:p>
-            <a:pPr marL="0" indent="0" algn="ctr">
-              <a:buNone/>
-            </a:pPr>
-            <a:r>
-              <a:rPr lang="en-US" sz="1000" b="1" dirty="0">
-                <a:solidFill>
-                  <a:srgbClr val="00E5FF"/>
-                </a:solidFill>
-                <a:latin typeface="Courier New" pitchFamily="34" charset="0"/>
-                <a:ea typeface="Courier New" pitchFamily="34" charset="-122"/>
-                <a:cs typeface="Courier New" pitchFamily="34" charset="-120"/>
-              </a:rPr>
-              <a:t>character_save.html</a:t>
-            </a:r>
-            <a:endParaRPr lang="en-US" sz="1000" dirty="0"/>
-          </a:p>
-        </p:txBody>
-      </p:sp>
-      <p:sp>
-        <p:nvSpPr>
-          <p:cNvPr id="18" name="Shape 16"/>
-          <p:cNvSpPr/>
-          <p:nvPr/>
-        </p:nvSpPr>
-        <p:spPr>
-          <a:xfrm>
-            <a:off x="6995160" y="1691640"/>
-            <a:ext cx="1600200" cy="0"/>
-          </a:xfrm>
-          <a:prstGeom prst="line">
-            <a:avLst/>
-          </a:prstGeom>
-          <a:noFill/>
-          <a:ln w="12700">
-            <a:solidFill>
-              <a:srgbClr val="A855F7">
-                <a:alpha val="40000"/>
-              </a:srgbClr>
-            </a:solidFill>
-            <a:prstDash val="solid"/>
-          </a:ln>
-        </p:spPr>
-        <p:txBody>
-          <a:bodyPr/>
-          <a:lstStyle/>
-          <a:p>
-            <a:endParaRPr lang="fr-FR"/>
-          </a:p>
-        </p:txBody>
-      </p:sp>
-      <p:sp>
-        <p:nvSpPr>
-          <p:cNvPr id="19" name="Text 17"/>
-          <p:cNvSpPr/>
-          <p:nvPr/>
-        </p:nvSpPr>
-        <p:spPr>
-          <a:xfrm>
-            <a:off x="6903720" y="1783080"/>
-            <a:ext cx="1783080" cy="548640"/>
-          </a:xfrm>
-          <a:prstGeom prst="rect">
-            <a:avLst/>
-          </a:prstGeom>
-          <a:noFill/>
-          <a:ln/>
-        </p:spPr>
-        <p:txBody>
-          <a:bodyPr wrap="square" rtlCol="0" anchor="ctr"/>
-          <a:lstStyle/>
-          <a:p>
-            <a:pPr marL="0" indent="0" algn="ctr">
-              <a:buNone/>
-            </a:pPr>
-            <a:r>
-              <a:rPr lang="en-US" sz="1000" dirty="0">
-                <a:solidFill>
-                  <a:srgbClr val="CBD5E1"/>
-                </a:solidFill>
-                <a:latin typeface="Calibri" pitchFamily="34" charset="0"/>
-                <a:ea typeface="Calibri" pitchFamily="34" charset="-122"/>
-                <a:cs typeface="Calibri" pitchFamily="34" charset="-120"/>
-              </a:rPr>
-              <a:t>Sélection des slots</a:t>
-            </a:r>
-            <a:endParaRPr lang="en-US" sz="1000" dirty="0"/>
-          </a:p>
-        </p:txBody>
-      </p:sp>
-      <p:sp>
-        <p:nvSpPr>
-          <p:cNvPr id="20" name="Shape 18"/>
-          <p:cNvSpPr/>
-          <p:nvPr/>
-        </p:nvSpPr>
-        <p:spPr>
-          <a:xfrm>
-            <a:off x="365760" y="2697480"/>
-            <a:ext cx="1965960" cy="1417320"/>
-          </a:xfrm>
-          <a:prstGeom prst="roundRect">
-            <a:avLst>
-              <a:gd name="adj" fmla="val 6452"/>
-            </a:avLst>
-          </a:prstGeom>
-          <a:solidFill>
-            <a:srgbClr val="0D1526"/>
-          </a:solidFill>
-          <a:ln w="12700">
-            <a:solidFill>
-              <a:srgbClr val="A855F7">
-                <a:alpha val="60000"/>
-              </a:srgbClr>
-            </a:solidFill>
-            <a:prstDash val="solid"/>
-          </a:ln>
-          <a:effectLst>
-            <a:outerShdw blurRad="127000" dist="38100" dir="2700000" algn="bl" rotWithShape="0">
-              <a:srgbClr val="000000">
-                <a:alpha val="30000"/>
-              </a:srgbClr>
-            </a:outerShdw>
-          </a:effectLst>
-        </p:spPr>
-        <p:txBody>
-          <a:bodyPr/>
-          <a:lstStyle/>
-          <a:p>
-            <a:endParaRPr lang="fr-FR"/>
-          </a:p>
-        </p:txBody>
-      </p:sp>
-      <p:sp>
-        <p:nvSpPr>
-          <p:cNvPr id="21" name="Text 19"/>
-          <p:cNvSpPr/>
-          <p:nvPr/>
-        </p:nvSpPr>
-        <p:spPr>
-          <a:xfrm>
-            <a:off x="457200" y="2834640"/>
-            <a:ext cx="1783080" cy="457200"/>
-          </a:xfrm>
-          <a:prstGeom prst="rect">
-            <a:avLst/>
-          </a:prstGeom>
-          <a:noFill/>
-          <a:ln/>
-        </p:spPr>
-        <p:txBody>
-          <a:bodyPr wrap="square" rtlCol="0" anchor="ctr"/>
-          <a:lstStyle/>
-          <a:p>
-            <a:pPr marL="0" indent="0" algn="ctr">
-              <a:buNone/>
-            </a:pPr>
-            <a:r>
-              <a:rPr lang="en-US" sz="1000" b="1" dirty="0">
-                <a:solidFill>
-                  <a:srgbClr val="00E5FF"/>
-                </a:solidFill>
-                <a:latin typeface="Courier New" pitchFamily="34" charset="0"/>
-                <a:ea typeface="Courier New" pitchFamily="34" charset="-122"/>
-                <a:cs typeface="Courier New" pitchFamily="34" charset="-120"/>
-              </a:rPr>
-              <a:t>create_character.html</a:t>
-            </a:r>
-            <a:endParaRPr lang="en-US" sz="1000" dirty="0"/>
-          </a:p>
-        </p:txBody>
-      </p:sp>
-      <p:sp>
-        <p:nvSpPr>
-          <p:cNvPr id="22" name="Shape 20"/>
-          <p:cNvSpPr/>
-          <p:nvPr/>
-        </p:nvSpPr>
-        <p:spPr>
-          <a:xfrm>
-            <a:off x="548640" y="3337560"/>
-            <a:ext cx="1600200" cy="0"/>
-          </a:xfrm>
-          <a:prstGeom prst="line">
-            <a:avLst/>
-          </a:prstGeom>
-          <a:noFill/>
-          <a:ln w="12700">
-            <a:solidFill>
-              <a:srgbClr val="A855F7">
-                <a:alpha val="40000"/>
-              </a:srgbClr>
-            </a:solidFill>
-            <a:prstDash val="solid"/>
-          </a:ln>
-        </p:spPr>
-        <p:txBody>
-          <a:bodyPr/>
-          <a:lstStyle/>
-          <a:p>
-            <a:endParaRPr lang="fr-FR"/>
-          </a:p>
-        </p:txBody>
-      </p:sp>
-      <p:sp>
-        <p:nvSpPr>
-          <p:cNvPr id="23" name="Text 21"/>
-          <p:cNvSpPr/>
-          <p:nvPr/>
-        </p:nvSpPr>
-        <p:spPr>
-          <a:xfrm>
-            <a:off x="457200" y="3429000"/>
-            <a:ext cx="1783080" cy="548640"/>
-          </a:xfrm>
-          <a:prstGeom prst="rect">
-            <a:avLst/>
-          </a:prstGeom>
-          <a:noFill/>
-          <a:ln/>
-        </p:spPr>
-        <p:txBody>
-          <a:bodyPr wrap="square" rtlCol="0" anchor="ctr"/>
-          <a:lstStyle/>
-          <a:p>
-            <a:pPr marL="0" indent="0" algn="ctr">
-              <a:buNone/>
-            </a:pPr>
-            <a:r>
-              <a:rPr lang="en-US" sz="1000" dirty="0">
-                <a:solidFill>
-                  <a:srgbClr val="CBD5E1"/>
-                </a:solidFill>
-                <a:latin typeface="Calibri" pitchFamily="34" charset="0"/>
-                <a:ea typeface="Calibri" pitchFamily="34" charset="-122"/>
-                <a:cs typeface="Calibri" pitchFamily="34" charset="-120"/>
-              </a:rPr>
-              <a:t>Création personnage</a:t>
-            </a:r>
-            <a:endParaRPr lang="en-US" sz="1000" dirty="0"/>
-          </a:p>
-        </p:txBody>
-      </p:sp>
-      <p:sp>
-        <p:nvSpPr>
-          <p:cNvPr id="24" name="Shape 22"/>
-          <p:cNvSpPr/>
-          <p:nvPr/>
-        </p:nvSpPr>
-        <p:spPr>
-          <a:xfrm>
-            <a:off x="2514600" y="2697480"/>
-            <a:ext cx="1965960" cy="1417320"/>
-          </a:xfrm>
-          <a:prstGeom prst="roundRect">
-            <a:avLst>
-              <a:gd name="adj" fmla="val 6452"/>
-            </a:avLst>
-          </a:prstGeom>
-          <a:solidFill>
-            <a:srgbClr val="0D1526"/>
-          </a:solidFill>
-          <a:ln w="12700">
-            <a:solidFill>
-              <a:srgbClr val="A855F7">
-                <a:alpha val="60000"/>
-              </a:srgbClr>
-            </a:solidFill>
-            <a:prstDash val="solid"/>
-          </a:ln>
-          <a:effectLst>
-            <a:outerShdw blurRad="127000" dist="38100" dir="2700000" algn="bl" rotWithShape="0">
-              <a:srgbClr val="000000">
-                <a:alpha val="30000"/>
-              </a:srgbClr>
-            </a:outerShdw>
-          </a:effectLst>
-        </p:spPr>
-        <p:txBody>
-          <a:bodyPr/>
-          <a:lstStyle/>
-          <a:p>
-            <a:endParaRPr lang="fr-FR"/>
-          </a:p>
-        </p:txBody>
-      </p:sp>
-      <p:sp>
-        <p:nvSpPr>
-          <p:cNvPr id="25" name="Text 23"/>
-          <p:cNvSpPr/>
-          <p:nvPr/>
-        </p:nvSpPr>
-        <p:spPr>
-          <a:xfrm>
-            <a:off x="2606040" y="2834640"/>
-            <a:ext cx="1783080" cy="457200"/>
-          </a:xfrm>
-          <a:prstGeom prst="rect">
-            <a:avLst/>
-          </a:prstGeom>
-          <a:noFill/>
-          <a:ln/>
-        </p:spPr>
-        <p:txBody>
-          <a:bodyPr wrap="square" rtlCol="0" anchor="ctr"/>
-          <a:lstStyle/>
-          <a:p>
-            <a:pPr marL="0" indent="0" algn="ctr">
-              <a:buNone/>
-            </a:pPr>
-            <a:r>
-              <a:rPr lang="en-US" sz="1000" b="1" dirty="0">
-                <a:solidFill>
-                  <a:srgbClr val="00E5FF"/>
-                </a:solidFill>
-                <a:latin typeface="Courier New" pitchFamily="34" charset="0"/>
-                <a:ea typeface="Courier New" pitchFamily="34" charset="-122"/>
-                <a:cs typeface="Courier New" pitchFamily="34" charset="-120"/>
-              </a:rPr>
-              <a:t>edit_character.html</a:t>
-            </a:r>
-            <a:endParaRPr lang="en-US" sz="1000" dirty="0"/>
-          </a:p>
-        </p:txBody>
-      </p:sp>
-      <p:sp>
-        <p:nvSpPr>
-          <p:cNvPr id="26" name="Shape 24"/>
-          <p:cNvSpPr/>
-          <p:nvPr/>
-        </p:nvSpPr>
-        <p:spPr>
-          <a:xfrm>
-            <a:off x="2697480" y="3337560"/>
-            <a:ext cx="1600200" cy="0"/>
-          </a:xfrm>
-          <a:prstGeom prst="line">
-            <a:avLst/>
-          </a:prstGeom>
-          <a:noFill/>
-          <a:ln w="12700">
-            <a:solidFill>
-              <a:srgbClr val="A855F7">
-                <a:alpha val="40000"/>
-              </a:srgbClr>
-            </a:solidFill>
-            <a:prstDash val="solid"/>
-          </a:ln>
-        </p:spPr>
-        <p:txBody>
-          <a:bodyPr/>
-          <a:lstStyle/>
-          <a:p>
-            <a:endParaRPr lang="fr-FR"/>
-          </a:p>
-        </p:txBody>
-      </p:sp>
-      <p:sp>
-        <p:nvSpPr>
-          <p:cNvPr id="27" name="Text 25"/>
-          <p:cNvSpPr/>
-          <p:nvPr/>
-        </p:nvSpPr>
-        <p:spPr>
-          <a:xfrm>
-            <a:off x="2606040" y="3429000"/>
-            <a:ext cx="1783080" cy="548640"/>
-          </a:xfrm>
-          <a:prstGeom prst="rect">
-            <a:avLst/>
-          </a:prstGeom>
-          <a:noFill/>
-          <a:ln/>
-        </p:spPr>
-        <p:txBody>
-          <a:bodyPr wrap="square" rtlCol="0" anchor="ctr"/>
-          <a:lstStyle/>
-          <a:p>
-            <a:pPr marL="0" indent="0" algn="ctr">
-              <a:buNone/>
-            </a:pPr>
-            <a:r>
-              <a:rPr lang="en-US" sz="1000" dirty="0">
-                <a:solidFill>
-                  <a:srgbClr val="CBD5E1"/>
-                </a:solidFill>
-                <a:latin typeface="Calibri" pitchFamily="34" charset="0"/>
-                <a:ea typeface="Calibri" pitchFamily="34" charset="-122"/>
-                <a:cs typeface="Calibri" pitchFamily="34" charset="-120"/>
-              </a:rPr>
-              <a:t>Modification personnage</a:t>
-            </a:r>
-            <a:endParaRPr lang="en-US" sz="1000" dirty="0"/>
-          </a:p>
-        </p:txBody>
-      </p:sp>
-      <p:sp>
-        <p:nvSpPr>
-          <p:cNvPr id="28" name="Shape 26"/>
-          <p:cNvSpPr/>
-          <p:nvPr/>
-        </p:nvSpPr>
-        <p:spPr>
-          <a:xfrm>
-            <a:off x="4663440" y="2697480"/>
-            <a:ext cx="1965960" cy="1417320"/>
-          </a:xfrm>
-          <a:prstGeom prst="roundRect">
-            <a:avLst>
-              <a:gd name="adj" fmla="val 6452"/>
-            </a:avLst>
-          </a:prstGeom>
-          <a:solidFill>
-            <a:srgbClr val="0D1526"/>
-          </a:solidFill>
-          <a:ln w="12700">
-            <a:solidFill>
-              <a:srgbClr val="A855F7">
-                <a:alpha val="60000"/>
-              </a:srgbClr>
-            </a:solidFill>
-            <a:prstDash val="solid"/>
-          </a:ln>
-          <a:effectLst>
-            <a:outerShdw blurRad="127000" dist="38100" dir="2700000" algn="bl" rotWithShape="0">
-              <a:srgbClr val="000000">
-                <a:alpha val="30000"/>
-              </a:srgbClr>
-            </a:outerShdw>
-          </a:effectLst>
-        </p:spPr>
-        <p:txBody>
-          <a:bodyPr/>
-          <a:lstStyle/>
-          <a:p>
-            <a:endParaRPr lang="fr-FR"/>
-          </a:p>
-        </p:txBody>
-      </p:sp>
-      <p:sp>
-        <p:nvSpPr>
-          <p:cNvPr id="29" name="Text 27"/>
-          <p:cNvSpPr/>
-          <p:nvPr/>
-        </p:nvSpPr>
-        <p:spPr>
-          <a:xfrm>
-            <a:off x="4754880" y="2834640"/>
-            <a:ext cx="1783080" cy="457200"/>
-          </a:xfrm>
-          <a:prstGeom prst="rect">
-            <a:avLst/>
-          </a:prstGeom>
-          <a:noFill/>
-          <a:ln/>
-        </p:spPr>
-        <p:txBody>
-          <a:bodyPr wrap="square" rtlCol="0" anchor="ctr"/>
-          <a:lstStyle/>
-          <a:p>
-            <a:pPr marL="0" indent="0" algn="ctr">
-              <a:buNone/>
-            </a:pPr>
-            <a:r>
-              <a:rPr lang="en-US" sz="1000" b="1" dirty="0">
-                <a:solidFill>
-                  <a:srgbClr val="00E5FF"/>
-                </a:solidFill>
-                <a:latin typeface="Courier New" pitchFamily="34" charset="0"/>
-                <a:ea typeface="Courier New" pitchFamily="34" charset="-122"/>
-                <a:cs typeface="Courier New" pitchFamily="34" charset="-120"/>
-              </a:rPr>
-              <a:t>settings.html</a:t>
-            </a:r>
-            <a:endParaRPr lang="en-US" sz="1000" dirty="0"/>
-          </a:p>
-        </p:txBody>
-      </p:sp>
-      <p:sp>
-        <p:nvSpPr>
-          <p:cNvPr id="30" name="Shape 28"/>
-          <p:cNvSpPr/>
-          <p:nvPr/>
-        </p:nvSpPr>
-        <p:spPr>
-          <a:xfrm>
-            <a:off x="4846320" y="3337560"/>
-            <a:ext cx="1600200" cy="0"/>
-          </a:xfrm>
-          <a:prstGeom prst="line">
-            <a:avLst/>
-          </a:prstGeom>
-          <a:noFill/>
-          <a:ln w="12700">
-            <a:solidFill>
-              <a:srgbClr val="A855F7">
-                <a:alpha val="40000"/>
-              </a:srgbClr>
-            </a:solidFill>
-            <a:prstDash val="solid"/>
-          </a:ln>
-        </p:spPr>
-        <p:txBody>
-          <a:bodyPr/>
-          <a:lstStyle/>
-          <a:p>
-            <a:endParaRPr lang="fr-FR"/>
-          </a:p>
-        </p:txBody>
-      </p:sp>
-      <p:sp>
-        <p:nvSpPr>
-          <p:cNvPr id="31" name="Text 29"/>
-          <p:cNvSpPr/>
-          <p:nvPr/>
-        </p:nvSpPr>
-        <p:spPr>
-          <a:xfrm>
-            <a:off x="4754880" y="3429000"/>
-            <a:ext cx="1783080" cy="548640"/>
-          </a:xfrm>
-          <a:prstGeom prst="rect">
-            <a:avLst/>
-          </a:prstGeom>
-          <a:noFill/>
-          <a:ln/>
-        </p:spPr>
-        <p:txBody>
-          <a:bodyPr wrap="square" rtlCol="0" anchor="ctr"/>
-          <a:lstStyle/>
-          <a:p>
-            <a:pPr marL="0" indent="0" algn="ctr">
-              <a:buNone/>
-            </a:pPr>
-            <a:r>
-              <a:rPr lang="en-US" sz="1000" dirty="0">
-                <a:solidFill>
-                  <a:srgbClr val="CBD5E1"/>
-                </a:solidFill>
-                <a:latin typeface="Calibri" pitchFamily="34" charset="0"/>
-                <a:ea typeface="Calibri" pitchFamily="34" charset="-122"/>
-                <a:cs typeface="Calibri" pitchFamily="34" charset="-120"/>
-              </a:rPr>
-              <a:t>Audio · Langue · Contrôles</a:t>
-            </a:r>
-            <a:endParaRPr lang="en-US" sz="1000" dirty="0"/>
-          </a:p>
-        </p:txBody>
-      </p:sp>
-      <p:sp>
-        <p:nvSpPr>
-          <p:cNvPr id="32" name="Shape 30"/>
-          <p:cNvSpPr/>
-          <p:nvPr/>
-        </p:nvSpPr>
-        <p:spPr>
-          <a:xfrm>
-            <a:off x="6812280" y="2697480"/>
-            <a:ext cx="1965960" cy="1417320"/>
-          </a:xfrm>
-          <a:prstGeom prst="roundRect">
-            <a:avLst>
-              <a:gd name="adj" fmla="val 6452"/>
-            </a:avLst>
-          </a:prstGeom>
-          <a:solidFill>
-            <a:srgbClr val="0D1526"/>
-          </a:solidFill>
-          <a:ln w="12700">
-            <a:solidFill>
-              <a:srgbClr val="A855F7">
-                <a:alpha val="60000"/>
-              </a:srgbClr>
-            </a:solidFill>
-            <a:prstDash val="solid"/>
-          </a:ln>
-          <a:effectLst>
-            <a:outerShdw blurRad="127000" dist="38100" dir="2700000" algn="bl" rotWithShape="0">
-              <a:srgbClr val="000000">
-                <a:alpha val="30000"/>
-              </a:srgbClr>
-            </a:outerShdw>
-          </a:effectLst>
-        </p:spPr>
-        <p:txBody>
-          <a:bodyPr/>
-          <a:lstStyle/>
-          <a:p>
-            <a:endParaRPr lang="fr-FR"/>
-          </a:p>
-        </p:txBody>
-      </p:sp>
-      <p:sp>
-        <p:nvSpPr>
-          <p:cNvPr id="33" name="Text 31"/>
-          <p:cNvSpPr/>
-          <p:nvPr/>
-        </p:nvSpPr>
-        <p:spPr>
-          <a:xfrm>
-            <a:off x="6903720" y="2834640"/>
-            <a:ext cx="1783080" cy="457200"/>
-          </a:xfrm>
-          <a:prstGeom prst="rect">
-            <a:avLst/>
-          </a:prstGeom>
-          <a:noFill/>
-          <a:ln/>
-        </p:spPr>
-        <p:txBody>
-          <a:bodyPr wrap="square" rtlCol="0" anchor="ctr"/>
-          <a:lstStyle/>
-          <a:p>
-            <a:pPr marL="0" indent="0" algn="ctr">
-              <a:buNone/>
-            </a:pPr>
-            <a:r>
-              <a:rPr lang="en-US" sz="1000" b="1" dirty="0">
-                <a:solidFill>
-                  <a:srgbClr val="00E5FF"/>
-                </a:solidFill>
-                <a:latin typeface="Courier New" pitchFamily="34" charset="0"/>
-                <a:ea typeface="Courier New" pitchFamily="34" charset="-122"/>
-                <a:cs typeface="Courier New" pitchFamily="34" charset="-120"/>
-              </a:rPr>
-              <a:t>guide.html</a:t>
-            </a:r>
-            <a:endParaRPr lang="en-US" sz="1000" dirty="0"/>
-          </a:p>
-        </p:txBody>
-      </p:sp>
-      <p:sp>
-        <p:nvSpPr>
-          <p:cNvPr id="34" name="Shape 32"/>
-          <p:cNvSpPr/>
-          <p:nvPr/>
-        </p:nvSpPr>
-        <p:spPr>
-          <a:xfrm>
-            <a:off x="6995160" y="3337560"/>
-            <a:ext cx="1600200" cy="0"/>
-          </a:xfrm>
-          <a:prstGeom prst="line">
-            <a:avLst/>
-          </a:prstGeom>
-          <a:noFill/>
-          <a:ln w="12700">
-            <a:solidFill>
-              <a:srgbClr val="A855F7">
-                <a:alpha val="40000"/>
-              </a:srgbClr>
-            </a:solidFill>
-            <a:prstDash val="solid"/>
-          </a:ln>
-        </p:spPr>
-        <p:txBody>
-          <a:bodyPr/>
-          <a:lstStyle/>
-          <a:p>
-            <a:endParaRPr lang="fr-FR"/>
-          </a:p>
-        </p:txBody>
-      </p:sp>
-      <p:sp>
-        <p:nvSpPr>
-          <p:cNvPr id="35" name="Text 33"/>
-          <p:cNvSpPr/>
-          <p:nvPr/>
-        </p:nvSpPr>
-        <p:spPr>
-          <a:xfrm>
-            <a:off x="6903720" y="3429000"/>
-            <a:ext cx="1783080" cy="548640"/>
-          </a:xfrm>
-          <a:prstGeom prst="rect">
-            <a:avLst/>
-          </a:prstGeom>
-          <a:noFill/>
-          <a:ln/>
-        </p:spPr>
-        <p:txBody>
-          <a:bodyPr wrap="square" rtlCol="0" anchor="ctr"/>
-          <a:lstStyle/>
-          <a:p>
-            <a:pPr marL="0" indent="0" algn="ctr">
-              <a:buNone/>
-            </a:pPr>
-            <a:r>
-              <a:rPr lang="en-US" sz="1000" dirty="0">
-                <a:solidFill>
-                  <a:srgbClr val="CBD5E1"/>
-                </a:solidFill>
-                <a:latin typeface="Calibri" pitchFamily="34" charset="0"/>
-                <a:ea typeface="Calibri" pitchFamily="34" charset="-122"/>
-                <a:cs typeface="Calibri" pitchFamily="34" charset="-120"/>
-              </a:rPr>
-              <a:t>Guide du jeu</a:t>
-            </a:r>
-            <a:endParaRPr lang="en-US" sz="1000" dirty="0"/>
           </a:p>
         </p:txBody>
       </p:sp>

--- a/Presentation_Neuropulse.pptx
+++ b/Presentation_Neuropulse.pptx
@@ -140,18 +140,18 @@
   <pc:docChgLst>
     <pc:chgData name="Antoine VIVIEN" userId="360f1131c864c888" providerId="LiveId" clId="{BCF8220F-FA57-4D90-A194-5A123AAEFF6E}"/>
     <pc:docChg chg="undo redo custSel addSld delSld modSld sldOrd">
-      <pc:chgData name="Antoine VIVIEN" userId="360f1131c864c888" providerId="LiveId" clId="{BCF8220F-FA57-4D90-A194-5A123AAEFF6E}" dt="2026-07-01T08:59:09.408" v="1494" actId="20577"/>
+      <pc:chgData name="Antoine VIVIEN" userId="360f1131c864c888" providerId="LiveId" clId="{BCF8220F-FA57-4D90-A194-5A123AAEFF6E}" dt="2026-07-01T09:26:00.389" v="1542" actId="20577"/>
       <pc:docMkLst>
         <pc:docMk/>
       </pc:docMkLst>
       <pc:sldChg chg="modSp mod">
-        <pc:chgData name="Antoine VIVIEN" userId="360f1131c864c888" providerId="LiveId" clId="{BCF8220F-FA57-4D90-A194-5A123AAEFF6E}" dt="2026-07-01T08:30:54.642" v="719" actId="403"/>
+        <pc:chgData name="Antoine VIVIEN" userId="360f1131c864c888" providerId="LiveId" clId="{BCF8220F-FA57-4D90-A194-5A123AAEFF6E}" dt="2026-07-01T09:20:40.384" v="1522" actId="20577"/>
         <pc:sldMkLst>
           <pc:docMk/>
           <pc:sldMk cId="0" sldId="259"/>
         </pc:sldMkLst>
         <pc:spChg chg="mod">
-          <ac:chgData name="Antoine VIVIEN" userId="360f1131c864c888" providerId="LiveId" clId="{BCF8220F-FA57-4D90-A194-5A123AAEFF6E}" dt="2026-07-01T08:30:43.049" v="715" actId="20577"/>
+          <ac:chgData name="Antoine VIVIEN" userId="360f1131c864c888" providerId="LiveId" clId="{BCF8220F-FA57-4D90-A194-5A123AAEFF6E}" dt="2026-07-01T09:20:30.452" v="1515" actId="20577"/>
           <ac:spMkLst>
             <pc:docMk/>
             <pc:sldMk cId="0" sldId="259"/>
@@ -159,7 +159,7 @@
           </ac:spMkLst>
         </pc:spChg>
         <pc:spChg chg="mod">
-          <ac:chgData name="Antoine VIVIEN" userId="360f1131c864c888" providerId="LiveId" clId="{BCF8220F-FA57-4D90-A194-5A123AAEFF6E}" dt="2026-07-01T08:30:49.213" v="717" actId="403"/>
+          <ac:chgData name="Antoine VIVIEN" userId="360f1131c864c888" providerId="LiveId" clId="{BCF8220F-FA57-4D90-A194-5A123AAEFF6E}" dt="2026-07-01T09:20:40.384" v="1522" actId="20577"/>
           <ac:spMkLst>
             <pc:docMk/>
             <pc:sldMk cId="0" sldId="259"/>
@@ -410,17 +410,33 @@
         </pc:sldMkLst>
       </pc:sldChg>
       <pc:sldChg chg="addSp modSp mod">
-        <pc:chgData name="Antoine VIVIEN" userId="360f1131c864c888" providerId="LiveId" clId="{BCF8220F-FA57-4D90-A194-5A123AAEFF6E}" dt="2026-06-30T20:28:34.219" v="290" actId="20577"/>
+        <pc:chgData name="Antoine VIVIEN" userId="360f1131c864c888" providerId="LiveId" clId="{BCF8220F-FA57-4D90-A194-5A123AAEFF6E}" dt="2026-07-01T09:26:00.389" v="1542" actId="20577"/>
         <pc:sldMkLst>
           <pc:docMk/>
           <pc:sldMk cId="0" sldId="267"/>
         </pc:sldMkLst>
+        <pc:spChg chg="mod">
+          <ac:chgData name="Antoine VIVIEN" userId="360f1131c864c888" providerId="LiveId" clId="{BCF8220F-FA57-4D90-A194-5A123AAEFF6E}" dt="2026-07-01T09:24:38.178" v="1524" actId="1076"/>
+          <ac:spMkLst>
+            <pc:docMk/>
+            <pc:sldMk cId="0" sldId="267"/>
+            <ac:spMk id="3" creationId="{00000000-0000-0000-0000-000000000000}"/>
+          </ac:spMkLst>
+        </pc:spChg>
         <pc:spChg chg="mod">
           <ac:chgData name="Antoine VIVIEN" userId="360f1131c864c888" providerId="LiveId" clId="{BCF8220F-FA57-4D90-A194-5A123AAEFF6E}" dt="2026-06-30T20:20:53.523" v="85" actId="20577"/>
           <ac:spMkLst>
             <pc:docMk/>
             <pc:sldMk cId="0" sldId="267"/>
             <ac:spMk id="19" creationId="{00000000-0000-0000-0000-000000000000}"/>
+          </ac:spMkLst>
+        </pc:spChg>
+        <pc:spChg chg="mod">
+          <ac:chgData name="Antoine VIVIEN" userId="360f1131c864c888" providerId="LiveId" clId="{BCF8220F-FA57-4D90-A194-5A123AAEFF6E}" dt="2026-07-01T09:26:00.389" v="1542" actId="20577"/>
+          <ac:spMkLst>
+            <pc:docMk/>
+            <pc:sldMk cId="0" sldId="267"/>
+            <ac:spMk id="26" creationId="{00000000-0000-0000-0000-000000000000}"/>
           </ac:spMkLst>
         </pc:spChg>
         <pc:spChg chg="add mod">
@@ -8971,6 +8987,17 @@
               <a:buNone/>
             </a:pPr>
             <a:r>
+              <a:rPr lang="en-US" sz="1400" b="1" dirty="0" err="1">
+                <a:solidFill>
+                  <a:srgbClr val="FFFFFF"/>
+                </a:solidFill>
+                <a:latin typeface="Calibri" pitchFamily="34" charset="0"/>
+                <a:ea typeface="Calibri" pitchFamily="34" charset="-122"/>
+                <a:cs typeface="Calibri" pitchFamily="34" charset="-120"/>
+              </a:rPr>
+              <a:t>Déploiement</a:t>
+            </a:r>
+            <a:r>
               <a:rPr lang="en-US" sz="1400" b="1" dirty="0">
                 <a:solidFill>
                   <a:srgbClr val="FFFFFF"/>
@@ -8979,7 +9006,18 @@
                 <a:ea typeface="Calibri" pitchFamily="34" charset="-122"/>
                 <a:cs typeface="Calibri" pitchFamily="34" charset="-120"/>
               </a:rPr>
-              <a:t>Déploiement</a:t>
+              <a:t> et </a:t>
+            </a:r>
+            <a:r>
+              <a:rPr lang="en-US" sz="1400" b="1" dirty="0" err="1">
+                <a:solidFill>
+                  <a:srgbClr val="FFFFFF"/>
+                </a:solidFill>
+                <a:latin typeface="Calibri" pitchFamily="34" charset="0"/>
+                <a:ea typeface="Calibri" pitchFamily="34" charset="-122"/>
+                <a:cs typeface="Calibri" pitchFamily="34" charset="-120"/>
+              </a:rPr>
+              <a:t>sécurisation</a:t>
             </a:r>
             <a:endParaRPr lang="en-US" sz="1400" dirty="0"/>
           </a:p>
@@ -14057,7 +14095,7 @@
                 <a:ea typeface="Calibri" pitchFamily="34" charset="-122"/>
                 <a:cs typeface="Calibri" pitchFamily="34" charset="-120"/>
               </a:rPr>
-              <a:t>Express.js 5.x</a:t>
+              <a:t>Express.js</a:t>
             </a:r>
             <a:endParaRPr lang="en-US" sz="1600" dirty="0"/>
           </a:p>
@@ -14077,17 +14115,6 @@
               </a:rPr>
               <a:t>bcrypt</a:t>
             </a:r>
-            <a:r>
-              <a:rPr lang="en-US" sz="1600" dirty="0">
-                <a:solidFill>
-                  <a:srgbClr val="CBD5E1"/>
-                </a:solidFill>
-                <a:latin typeface="Calibri" pitchFamily="34" charset="0"/>
-                <a:ea typeface="Calibri" pitchFamily="34" charset="-122"/>
-                <a:cs typeface="Calibri" pitchFamily="34" charset="-120"/>
-              </a:rPr>
-              <a:t> (salt ×10)</a:t>
-            </a:r>
             <a:endParaRPr lang="en-US" sz="1600" dirty="0"/>
           </a:p>
           <a:p>
@@ -14096,7 +14123,7 @@
               <a:buChar char="•"/>
             </a:pPr>
             <a:r>
-              <a:rPr lang="en-US" sz="1600" dirty="0">
+              <a:rPr lang="en-US" sz="1600" dirty="0" err="1">
                 <a:solidFill>
                   <a:srgbClr val="CBD5E1"/>
                 </a:solidFill>
@@ -14104,7 +14131,7 @@
                 <a:ea typeface="Calibri" pitchFamily="34" charset="-122"/>
                 <a:cs typeface="Calibri" pitchFamily="34" charset="-120"/>
               </a:rPr>
-              <a:t>jsonwebtoken 9.x</a:t>
+              <a:t>jsonwebtoken</a:t>
             </a:r>
             <a:endParaRPr lang="en-US" sz="1600" dirty="0"/>
           </a:p>
@@ -14365,7 +14392,7 @@
                 <a:ea typeface="Calibri" pitchFamily="34" charset="-122"/>
                 <a:cs typeface="Calibri" pitchFamily="34" charset="-120"/>
               </a:rPr>
-              <a:t>JavaScript ES6+</a:t>
+              <a:t>JavaScript</a:t>
             </a:r>
             <a:endParaRPr lang="en-US" sz="1600" dirty="0"/>
           </a:p>
@@ -14383,7 +14410,7 @@
                 <a:ea typeface="Calibri" pitchFamily="34" charset="-122"/>
                 <a:cs typeface="Calibri" pitchFamily="34" charset="-120"/>
               </a:rPr>
-              <a:t>Phaser.js 3 (moteur jeu)</a:t>
+              <a:t>Phaser.js (moteur jeu)</a:t>
             </a:r>
             <a:endParaRPr lang="en-US" sz="1600" dirty="0"/>
           </a:p>
